--- a/docs/virtual-threads-technical.pptx
+++ b/docs/virtual-threads-technical.pptx
@@ -4,6 +4,9 @@
   <p:sldMasterIdLst>
     <p:sldMasterId id="2147483648" r:id="rId1"/>
   </p:sldMasterIdLst>
+  <p:notesMasterIdLst>
+    <p:notesMasterId r:id="rId11"/>
+  </p:notesMasterIdLst>
   <p:sldIdLst>
     <p:sldId id="256" r:id="rId2"/>
     <p:sldId id="257" r:id="rId3"/>
@@ -13,14 +16,8 @@
     <p:sldId id="261" r:id="rId7"/>
     <p:sldId id="262" r:id="rId8"/>
     <p:sldId id="263" r:id="rId9"/>
-    <p:sldId id="264" r:id="rId10"/>
-    <p:sldId id="265" r:id="rId11"/>
-    <p:sldId id="266" r:id="rId12"/>
-    <p:sldId id="267" r:id="rId13"/>
+    <p:sldId id="267" r:id="rId10"/>
   </p:sldIdLst>
-  <p:notesMasterIdLst>
-    <p:notesMasterId r:id="rId14"/>
-  </p:notesMasterIdLst>
   <p:sldSz cx="12192000" cy="6858000"/>
   <p:notesSz cx="6858000" cy="12192000"/>
   <p:defaultTextStyle>
@@ -115,13 +112,20 @@
       </a:defRPr>
     </a:lvl9pPr>
   </p:defaultTextStyle>
+  <p:extLst>
+    <p:ext uri="{EFAFB233-063F-42B5-8137-9DF3F51BA10A}">
+      <p15:sldGuideLst xmlns:p15="http://schemas.microsoft.com/office/powerpoint/2012/main"/>
+    </p:ext>
+  </p:extLst>
 </p:presentation>
 </file>
 
-<file path=ppt/charts/chart5.xml><?xml version="1.0" encoding="utf-8"?>
-<c:chartSpace xmlns:c="http://schemas.openxmlformats.org/drawingml/2006/chart" xmlns:a="http://schemas.openxmlformats.org/drawingml/2006/main" xmlns:r="http://schemas.openxmlformats.org/officeDocument/2006/relationships">
+<file path=ppt/charts/chart1.xml><?xml version="1.0" encoding="utf-8"?>
+<c:chartSpace xmlns:c="http://schemas.openxmlformats.org/drawingml/2006/chart" xmlns:a="http://schemas.openxmlformats.org/drawingml/2006/main" xmlns:r="http://schemas.openxmlformats.org/officeDocument/2006/relationships" xmlns:c16r2="http://schemas.microsoft.com/office/drawing/2015/06/chart">
   <c:date1904 val="0"/>
+  <c:lang val="en-US"/>
   <c:roundedCorners val="1"/>
+  <c:style val="2"/>
   <c:chart>
     <c:title>
       <c:tx>
@@ -138,7 +142,7 @@
               </a:defRPr>
             </a:pPr>
             <a:r>
-              <a:rPr sz="1300" b="0" i="0" u="none" strike="noStrike">
+              <a:rPr lang="en-US" sz="1300" b="0" i="0" u="none" strike="noStrike">
                 <a:solidFill>
                   <a:srgbClr val="5C6B77"/>
                 </a:solidFill>
@@ -149,7 +153,6 @@
           </a:p>
         </c:rich>
       </c:tx>
-      <c:layout/>
       <c:overlay val="0"/>
     </c:title>
     <c:autoTitleDeleted val="0"/>
@@ -182,18 +185,26 @@
           <c:invertIfNegative val="0"/>
           <c:dLbls>
             <c:numFmt formatCode="#,##0" sourceLinked="0"/>
+            <c:spPr>
+              <a:noFill/>
+              <a:ln>
+                <a:noFill/>
+              </a:ln>
+              <a:effectLst/>
+            </c:spPr>
             <c:txPr>
               <a:bodyPr/>
               <a:lstStyle/>
               <a:p>
                 <a:pPr>
-                  <a:defRPr b="0" i="0" strike="noStrike" sz="1000" u="none">
+                  <a:defRPr sz="1000" b="0" i="0" u="none" strike="noStrike">
                     <a:solidFill>
                       <a:srgbClr val="1F2933"/>
                     </a:solidFill>
                     <a:latin typeface="Calibri"/>
                   </a:defRPr>
                 </a:pPr>
+                <a:endParaRPr lang="en-US"/>
               </a:p>
             </c:txPr>
             <c:showLegendKey val="0"/>
@@ -203,22 +214,25 @@
             <c:showPercent val="0"/>
             <c:showBubbleSize val="0"/>
             <c:showLeaderLines val="0"/>
+            <c:extLst>
+              <c:ext xmlns:c15="http://schemas.microsoft.com/office/drawing/2012/chart" uri="{CE6537A1-D6FC-4f65-9D91-7224C49458BB}">
+                <c15:showLeaderLines val="0"/>
+              </c:ext>
+            </c:extLst>
           </c:dLbls>
           <c:cat>
-            <c:multiLvlStrRef>
+            <c:strRef>
               <c:f>Sheet1!$A$2:$A$3</c:f>
-              <c:multiLvlStrCache>
+              <c:strCache>
                 <c:ptCount val="2"/>
-                <c:lvl>
-                  <c:pt idx="0">
-                    <c:v>500 rps</c:v>
-                  </c:pt>
-                  <c:pt idx="1">
-                    <c:v>1,000 rps</c:v>
-                  </c:pt>
-                </c:lvl>
-              </c:multiLvlStrCache>
-            </c:multiLvlStrRef>
+                <c:pt idx="0">
+                  <c:v>500 rps</c:v>
+                </c:pt>
+                <c:pt idx="1">
+                  <c:v>1,000 rps</c:v>
+                </c:pt>
+              </c:strCache>
+            </c:strRef>
           </c:cat>
           <c:val>
             <c:numRef>
@@ -235,6 +249,11 @@
               </c:numCache>
             </c:numRef>
           </c:val>
+          <c:extLst>
+            <c:ext xmlns:c16="http://schemas.microsoft.com/office/drawing/2014/chart" uri="{C3380CC4-5D6E-409C-BE32-E72D297353CC}">
+              <c16:uniqueId val="{00000000-ECAA-CB47-B4D9-19F467DA5CC9}"/>
+            </c:ext>
+          </c:extLst>
         </c:ser>
         <c:ser>
           <c:idx val="1"/>
@@ -259,18 +278,26 @@
           <c:invertIfNegative val="0"/>
           <c:dLbls>
             <c:numFmt formatCode="#,##0" sourceLinked="0"/>
+            <c:spPr>
+              <a:noFill/>
+              <a:ln>
+                <a:noFill/>
+              </a:ln>
+              <a:effectLst/>
+            </c:spPr>
             <c:txPr>
               <a:bodyPr/>
               <a:lstStyle/>
               <a:p>
                 <a:pPr>
-                  <a:defRPr b="0" i="0" strike="noStrike" sz="1000" u="none">
+                  <a:defRPr sz="1000" b="0" i="0" u="none" strike="noStrike">
                     <a:solidFill>
                       <a:srgbClr val="1F2933"/>
                     </a:solidFill>
                     <a:latin typeface="Calibri"/>
                   </a:defRPr>
                 </a:pPr>
+                <a:endParaRPr lang="en-US"/>
               </a:p>
             </c:txPr>
             <c:showLegendKey val="0"/>
@@ -280,22 +307,25 @@
             <c:showPercent val="0"/>
             <c:showBubbleSize val="0"/>
             <c:showLeaderLines val="0"/>
+            <c:extLst>
+              <c:ext xmlns:c15="http://schemas.microsoft.com/office/drawing/2012/chart" uri="{CE6537A1-D6FC-4f65-9D91-7224C49458BB}">
+                <c15:showLeaderLines val="0"/>
+              </c:ext>
+            </c:extLst>
           </c:dLbls>
           <c:cat>
-            <c:multiLvlStrRef>
+            <c:strRef>
               <c:f>Sheet1!$A$2:$A$3</c:f>
-              <c:multiLvlStrCache>
+              <c:strCache>
                 <c:ptCount val="2"/>
-                <c:lvl>
-                  <c:pt idx="0">
-                    <c:v>500 rps</c:v>
-                  </c:pt>
-                  <c:pt idx="1">
-                    <c:v>1,000 rps</c:v>
-                  </c:pt>
-                </c:lvl>
-              </c:multiLvlStrCache>
-            </c:multiLvlStrRef>
+                <c:pt idx="0">
+                  <c:v>500 rps</c:v>
+                </c:pt>
+                <c:pt idx="1">
+                  <c:v>1,000 rps</c:v>
+                </c:pt>
+              </c:strCache>
+            </c:strRef>
           </c:cat>
           <c:val>
             <c:numRef>
@@ -312,6 +342,11 @@
               </c:numCache>
             </c:numRef>
           </c:val>
+          <c:extLst>
+            <c:ext xmlns:c16="http://schemas.microsoft.com/office/drawing/2014/chart" uri="{C3380CC4-5D6E-409C-BE32-E72D297353CC}">
+              <c16:uniqueId val="{00000001-ECAA-CB47-B4D9-19F467DA5CC9}"/>
+            </c:ext>
+          </c:extLst>
         </c:ser>
         <c:ser>
           <c:idx val="2"/>
@@ -336,18 +371,26 @@
           <c:invertIfNegative val="0"/>
           <c:dLbls>
             <c:numFmt formatCode="#,##0" sourceLinked="0"/>
+            <c:spPr>
+              <a:noFill/>
+              <a:ln>
+                <a:noFill/>
+              </a:ln>
+              <a:effectLst/>
+            </c:spPr>
             <c:txPr>
               <a:bodyPr/>
               <a:lstStyle/>
               <a:p>
                 <a:pPr>
-                  <a:defRPr b="0" i="0" strike="noStrike" sz="1000" u="none">
+                  <a:defRPr sz="1000" b="0" i="0" u="none" strike="noStrike">
                     <a:solidFill>
                       <a:srgbClr val="1F2933"/>
                     </a:solidFill>
                     <a:latin typeface="Calibri"/>
                   </a:defRPr>
                 </a:pPr>
+                <a:endParaRPr lang="en-US"/>
               </a:p>
             </c:txPr>
             <c:showLegendKey val="0"/>
@@ -357,22 +400,25 @@
             <c:showPercent val="0"/>
             <c:showBubbleSize val="0"/>
             <c:showLeaderLines val="0"/>
+            <c:extLst>
+              <c:ext xmlns:c15="http://schemas.microsoft.com/office/drawing/2012/chart" uri="{CE6537A1-D6FC-4f65-9D91-7224C49458BB}">
+                <c15:showLeaderLines val="0"/>
+              </c:ext>
+            </c:extLst>
           </c:dLbls>
           <c:cat>
-            <c:multiLvlStrRef>
+            <c:strRef>
               <c:f>Sheet1!$A$2:$A$3</c:f>
-              <c:multiLvlStrCache>
+              <c:strCache>
                 <c:ptCount val="2"/>
-                <c:lvl>
-                  <c:pt idx="0">
-                    <c:v>500 rps</c:v>
-                  </c:pt>
-                  <c:pt idx="1">
-                    <c:v>1,000 rps</c:v>
-                  </c:pt>
-                </c:lvl>
-              </c:multiLvlStrCache>
-            </c:multiLvlStrRef>
+                <c:pt idx="0">
+                  <c:v>500 rps</c:v>
+                </c:pt>
+                <c:pt idx="1">
+                  <c:v>1,000 rps</c:v>
+                </c:pt>
+              </c:strCache>
+            </c:strRef>
           </c:cat>
           <c:val>
             <c:numRef>
@@ -389,36 +435,23 @@
               </c:numCache>
             </c:numRef>
           </c:val>
+          <c:extLst>
+            <c:ext xmlns:c16="http://schemas.microsoft.com/office/drawing/2014/chart" uri="{C3380CC4-5D6E-409C-BE32-E72D297353CC}">
+              <c16:uniqueId val="{00000002-ECAA-CB47-B4D9-19F467DA5CC9}"/>
+            </c:ext>
+          </c:extLst>
         </c:ser>
         <c:dLbls>
-          <c:numFmt formatCode="#,##0" sourceLinked="0"/>
-          <c:txPr>
-            <a:bodyPr/>
-            <a:lstStyle/>
-            <a:p>
-              <a:pPr>
-                <a:defRPr b="0" i="0" strike="noStrike" sz="1000" u="none">
-                  <a:solidFill>
-                    <a:srgbClr val="1F2933"/>
-                  </a:solidFill>
-                  <a:latin typeface="Calibri"/>
-                </a:defRPr>
-              </a:pPr>
-            </a:p>
-          </c:txPr>
           <c:showLegendKey val="0"/>
           <c:showVal val="1"/>
           <c:showCatName val="0"/>
           <c:showSerName val="0"/>
           <c:showPercent val="0"/>
           <c:showBubbleSize val="0"/>
-          <c:showLeaderLines val="0"/>
         </c:dLbls>
         <c:gapWidth val="45"/>
-        <c:overlap val="0"/>
         <c:axId val="2094734554"/>
         <c:axId val="2094734552"/>
-        <c:axId val="2094734556"/>
       </c:barChart>
       <c:catAx>
         <c:axId val="2094734554"/>
@@ -457,6 +490,7 @@
         <c:crosses val="autoZero"/>
         <c:auto val="1"/>
         <c:lblAlgn val="ctr"/>
+        <c:lblOffset val="100"/>
         <c:noMultiLvlLbl val="1"/>
       </c:catAx>
       <c:valAx>
@@ -537,6 +571,7 @@
     </c:legend>
     <c:plotVisOnly val="1"/>
     <c:dispBlanksAs val="span"/>
+    <c:showDLblsOverMax val="1"/>
   </c:chart>
   <c:spPr>
     <a:noFill/>
@@ -586,7 +621,7 @@
         <p:spPr>
           <a:xfrm>
             <a:off x="0" y="0"/>
-            <a:ext cx="2971800" cy="458788"/>
+            <a:ext cx="2971800" cy="611188"/>
           </a:xfrm>
           <a:prstGeom prst="rect">
             <a:avLst/>
@@ -617,7 +652,7 @@
         <p:spPr>
           <a:xfrm>
             <a:off x="3884613" y="0"/>
-            <a:ext cx="2971800" cy="458788"/>
+            <a:ext cx="2971800" cy="611188"/>
           </a:xfrm>
           <a:prstGeom prst="rect">
             <a:avLst/>
@@ -631,9 +666,9 @@
             </a:lvl1pPr>
           </a:lstStyle>
           <a:p>
-            <a:fld id="{5282F153-3F37-0F45-9E97-73ACFA13230C}" type="datetimeFigureOut">
-              <a:rPr lang="en-US"/>
-              <a:t>7/23/19</a:t>
+            <a:fld id="{810D969B-AB26-DB48-ABFB-7F3359579D5A}" type="datetimeFigureOut">
+              <a:rPr lang="en-US" smtClean="0"/>
+              <a:t>9/20/2026</a:t>
             </a:fld>
             <a:endParaRPr lang="en-US"/>
           </a:p>
@@ -651,8 +686,8 @@
         </p:nvSpPr>
         <p:spPr>
           <a:xfrm>
-            <a:off x="685800" y="1143000"/>
-            <a:ext cx="5486400" cy="3086100"/>
+            <a:off x="-228600" y="1524000"/>
+            <a:ext cx="7315200" cy="4114800"/>
           </a:xfrm>
           <a:prstGeom prst="rect">
             <a:avLst/>
@@ -684,8 +719,8 @@
         </p:nvSpPr>
         <p:spPr>
           <a:xfrm>
-            <a:off x="685800" y="4400550"/>
-            <a:ext cx="5486400" cy="3600450"/>
+            <a:off x="685800" y="5867400"/>
+            <a:ext cx="5486400" cy="4800600"/>
           </a:xfrm>
           <a:prstGeom prst="rect">
             <a:avLst/>
@@ -743,8 +778,8 @@
         </p:nvSpPr>
         <p:spPr>
           <a:xfrm>
-            <a:off x="0" y="8685213"/>
-            <a:ext cx="2971800" cy="458787"/>
+            <a:off x="0" y="11580813"/>
+            <a:ext cx="2971800" cy="611187"/>
           </a:xfrm>
           <a:prstGeom prst="rect">
             <a:avLst/>
@@ -774,8 +809,8 @@
         </p:nvSpPr>
         <p:spPr>
           <a:xfrm>
-            <a:off x="3884613" y="8685213"/>
-            <a:ext cx="2971800" cy="458787"/>
+            <a:off x="3884613" y="11580813"/>
+            <a:ext cx="2971800" cy="611187"/>
           </a:xfrm>
           <a:prstGeom prst="rect">
             <a:avLst/>
@@ -789,8 +824,8 @@
             </a:lvl1pPr>
           </a:lstStyle>
           <a:p>
-            <a:fld id="{CE5E9CC1-C706-0F49-92D6-E571CC5EEA8F}" type="slidenum">
-              <a:rPr lang="en-US"/>
+            <a:fld id="{8612E7BA-C881-B942-BE5A-7955BF288AA8}" type="slidenum">
+              <a:rPr lang="en-US" smtClean="0"/>
               <a:t>‹#›</a:t>
             </a:fld>
             <a:endParaRPr lang="en-US"/>
@@ -800,7 +835,7 @@
     </p:spTree>
     <p:extLst>
       <p:ext uri="{BB962C8B-B14F-4D97-AF65-F5344CB8AC3E}">
-        <p14:creationId xmlns:p14="http://schemas.microsoft.com/office/powerpoint/2010/main" val="1024086991"/>
+        <p14:creationId xmlns:p14="http://schemas.microsoft.com/office/powerpoint/2010/main" val="789207542"/>
       </p:ext>
     </p:extLst>
   </p:cSld>
@@ -944,10 +979,6 @@
           <a:bodyPr/>
           <a:lstStyle/>
           <a:p>
-            <a:r>
-              <a:rPr lang="en-US" dirty="0"/>
-              <a:t/>
-            </a:r>
             <a:endParaRPr lang="en-US" dirty="0"/>
           </a:p>
         </p:txBody>
@@ -970,270 +1001,6 @@
             <a:fld id="{F7021451-1387-4CA6-816F-3879F97B5CBC}" type="slidenum">
               <a:rPr lang="en-US"/>
               <a:t>1</a:t>
-            </a:fld>
-            <a:endParaRPr lang="en-US"/>
-          </a:p>
-        </p:txBody>
-      </p:sp>
-    </p:spTree>
-    <p:extLst>
-      <p:ext uri="{BB962C8B-B14F-4D97-AF65-F5344CB8AC3E}">
-        <p14:creationId xmlns:p14="http://schemas.microsoft.com/office/powerpoint/2010/main" val="1024086991"/>
-      </p:ext>
-    </p:extLst>
-  </p:cSld>
-  <p:clrMapOvr>
-    <a:masterClrMapping/>
-  </p:clrMapOvr>
-</p:notes>
-</file>
-
-<file path=ppt/notesSlides/notesSlide10.xml><?xml version="1.0" encoding="utf-8"?>
-<p:notes xmlns:a="http://schemas.openxmlformats.org/drawingml/2006/main" xmlns:r="http://schemas.openxmlformats.org/officeDocument/2006/relationships" xmlns:p="http://schemas.openxmlformats.org/presentationml/2006/main">
-  <p:cSld>
-    <p:spTree>
-      <p:nvGrpSpPr>
-        <p:cNvPr id="1" name=""/>
-        <p:cNvGrpSpPr/>
-        <p:nvPr/>
-      </p:nvGrpSpPr>
-      <p:grpSpPr>
-        <a:xfrm>
-          <a:off x="0" y="0"/>
-          <a:ext cx="0" cy="0"/>
-          <a:chOff x="0" y="0"/>
-          <a:chExt cx="0" cy="0"/>
-        </a:xfrm>
-      </p:grpSpPr>
-      <p:sp>
-        <p:nvSpPr>
-          <p:cNvPr id="2" name="Slide Image Placeholder 1"/>
-          <p:cNvSpPr>
-            <a:spLocks noGrp="1" noRot="1" noChangeAspect="1"/>
-          </p:cNvSpPr>
-          <p:nvPr>
-            <p:ph type="sldImg"/>
-          </p:nvPr>
-        </p:nvSpPr>
-        <p:spPr/>
-      </p:sp>
-      <p:sp>
-        <p:nvSpPr>
-          <p:cNvPr id="3" name="Notes Placeholder 2"/>
-          <p:cNvSpPr>
-            <a:spLocks noGrp="1"/>
-          </p:cNvSpPr>
-          <p:nvPr>
-            <p:ph type="body" idx="1"/>
-          </p:nvPr>
-        </p:nvSpPr>
-        <p:spPr/>
-        <p:txBody>
-          <a:bodyPr/>
-          <a:lstStyle/>
-          <a:p>
-            <a:r>
-              <a:rPr lang="en-US" dirty="0"/>
-              <a:t/>
-            </a:r>
-            <a:endParaRPr lang="en-US" dirty="0"/>
-          </a:p>
-        </p:txBody>
-      </p:sp>
-      <p:sp>
-        <p:nvSpPr>
-          <p:cNvPr id="4" name="Slide Number Placeholder 3"/>
-          <p:cNvSpPr>
-            <a:spLocks noGrp="1"/>
-          </p:cNvSpPr>
-          <p:nvPr>
-            <p:ph type="sldNum" sz="quarter" idx="10"/>
-          </p:nvPr>
-        </p:nvSpPr>
-        <p:spPr/>
-        <p:txBody>
-          <a:bodyPr/>
-          <a:lstStyle/>
-          <a:p>
-            <a:fld id="{F7021451-1387-4CA6-816F-3879F97B5CBC}" type="slidenum">
-              <a:rPr lang="en-US"/>
-              <a:t>10</a:t>
-            </a:fld>
-            <a:endParaRPr lang="en-US"/>
-          </a:p>
-        </p:txBody>
-      </p:sp>
-    </p:spTree>
-    <p:extLst>
-      <p:ext uri="{BB962C8B-B14F-4D97-AF65-F5344CB8AC3E}">
-        <p14:creationId xmlns:p14="http://schemas.microsoft.com/office/powerpoint/2010/main" val="1024086991"/>
-      </p:ext>
-    </p:extLst>
-  </p:cSld>
-  <p:clrMapOvr>
-    <a:masterClrMapping/>
-  </p:clrMapOvr>
-</p:notes>
-</file>
-
-<file path=ppt/notesSlides/notesSlide11.xml><?xml version="1.0" encoding="utf-8"?>
-<p:notes xmlns:a="http://schemas.openxmlformats.org/drawingml/2006/main" xmlns:r="http://schemas.openxmlformats.org/officeDocument/2006/relationships" xmlns:p="http://schemas.openxmlformats.org/presentationml/2006/main">
-  <p:cSld>
-    <p:spTree>
-      <p:nvGrpSpPr>
-        <p:cNvPr id="1" name=""/>
-        <p:cNvGrpSpPr/>
-        <p:nvPr/>
-      </p:nvGrpSpPr>
-      <p:grpSpPr>
-        <a:xfrm>
-          <a:off x="0" y="0"/>
-          <a:ext cx="0" cy="0"/>
-          <a:chOff x="0" y="0"/>
-          <a:chExt cx="0" cy="0"/>
-        </a:xfrm>
-      </p:grpSpPr>
-      <p:sp>
-        <p:nvSpPr>
-          <p:cNvPr id="2" name="Slide Image Placeholder 1"/>
-          <p:cNvSpPr>
-            <a:spLocks noGrp="1" noRot="1" noChangeAspect="1"/>
-          </p:cNvSpPr>
-          <p:nvPr>
-            <p:ph type="sldImg"/>
-          </p:nvPr>
-        </p:nvSpPr>
-        <p:spPr/>
-      </p:sp>
-      <p:sp>
-        <p:nvSpPr>
-          <p:cNvPr id="3" name="Notes Placeholder 2"/>
-          <p:cNvSpPr>
-            <a:spLocks noGrp="1"/>
-          </p:cNvSpPr>
-          <p:nvPr>
-            <p:ph type="body" idx="1"/>
-          </p:nvPr>
-        </p:nvSpPr>
-        <p:spPr/>
-        <p:txBody>
-          <a:bodyPr/>
-          <a:lstStyle/>
-          <a:p>
-            <a:r>
-              <a:rPr lang="en-US" dirty="0"/>
-              <a:t/>
-            </a:r>
-            <a:endParaRPr lang="en-US" dirty="0"/>
-          </a:p>
-        </p:txBody>
-      </p:sp>
-      <p:sp>
-        <p:nvSpPr>
-          <p:cNvPr id="4" name="Slide Number Placeholder 3"/>
-          <p:cNvSpPr>
-            <a:spLocks noGrp="1"/>
-          </p:cNvSpPr>
-          <p:nvPr>
-            <p:ph type="sldNum" sz="quarter" idx="10"/>
-          </p:nvPr>
-        </p:nvSpPr>
-        <p:spPr/>
-        <p:txBody>
-          <a:bodyPr/>
-          <a:lstStyle/>
-          <a:p>
-            <a:fld id="{F7021451-1387-4CA6-816F-3879F97B5CBC}" type="slidenum">
-              <a:rPr lang="en-US"/>
-              <a:t>11</a:t>
-            </a:fld>
-            <a:endParaRPr lang="en-US"/>
-          </a:p>
-        </p:txBody>
-      </p:sp>
-    </p:spTree>
-    <p:extLst>
-      <p:ext uri="{BB962C8B-B14F-4D97-AF65-F5344CB8AC3E}">
-        <p14:creationId xmlns:p14="http://schemas.microsoft.com/office/powerpoint/2010/main" val="1024086991"/>
-      </p:ext>
-    </p:extLst>
-  </p:cSld>
-  <p:clrMapOvr>
-    <a:masterClrMapping/>
-  </p:clrMapOvr>
-</p:notes>
-</file>
-
-<file path=ppt/notesSlides/notesSlide12.xml><?xml version="1.0" encoding="utf-8"?>
-<p:notes xmlns:a="http://schemas.openxmlformats.org/drawingml/2006/main" xmlns:r="http://schemas.openxmlformats.org/officeDocument/2006/relationships" xmlns:p="http://schemas.openxmlformats.org/presentationml/2006/main">
-  <p:cSld>
-    <p:spTree>
-      <p:nvGrpSpPr>
-        <p:cNvPr id="1" name=""/>
-        <p:cNvGrpSpPr/>
-        <p:nvPr/>
-      </p:nvGrpSpPr>
-      <p:grpSpPr>
-        <a:xfrm>
-          <a:off x="0" y="0"/>
-          <a:ext cx="0" cy="0"/>
-          <a:chOff x="0" y="0"/>
-          <a:chExt cx="0" cy="0"/>
-        </a:xfrm>
-      </p:grpSpPr>
-      <p:sp>
-        <p:nvSpPr>
-          <p:cNvPr id="2" name="Slide Image Placeholder 1"/>
-          <p:cNvSpPr>
-            <a:spLocks noGrp="1" noRot="1" noChangeAspect="1"/>
-          </p:cNvSpPr>
-          <p:nvPr>
-            <p:ph type="sldImg"/>
-          </p:nvPr>
-        </p:nvSpPr>
-        <p:spPr/>
-      </p:sp>
-      <p:sp>
-        <p:nvSpPr>
-          <p:cNvPr id="3" name="Notes Placeholder 2"/>
-          <p:cNvSpPr>
-            <a:spLocks noGrp="1"/>
-          </p:cNvSpPr>
-          <p:nvPr>
-            <p:ph type="body" idx="1"/>
-          </p:nvPr>
-        </p:nvSpPr>
-        <p:spPr/>
-        <p:txBody>
-          <a:bodyPr/>
-          <a:lstStyle/>
-          <a:p>
-            <a:r>
-              <a:rPr lang="en-US" dirty="0"/>
-              <a:t/>
-            </a:r>
-            <a:endParaRPr lang="en-US" dirty="0"/>
-          </a:p>
-        </p:txBody>
-      </p:sp>
-      <p:sp>
-        <p:nvSpPr>
-          <p:cNvPr id="4" name="Slide Number Placeholder 3"/>
-          <p:cNvSpPr>
-            <a:spLocks noGrp="1"/>
-          </p:cNvSpPr>
-          <p:nvPr>
-            <p:ph type="sldNum" sz="quarter" idx="10"/>
-          </p:nvPr>
-        </p:nvSpPr>
-        <p:spPr/>
-        <p:txBody>
-          <a:bodyPr/>
-          <a:lstStyle/>
-          <a:p>
-            <a:fld id="{F7021451-1387-4CA6-816F-3879F97B5CBC}" type="slidenum">
-              <a:rPr lang="en-US"/>
-              <a:t>12</a:t>
             </a:fld>
             <a:endParaRPr lang="en-US"/>
           </a:p>
@@ -1296,10 +1063,6 @@
           <a:bodyPr/>
           <a:lstStyle/>
           <a:p>
-            <a:r>
-              <a:rPr lang="en-US" dirty="0"/>
-              <a:t/>
-            </a:r>
             <a:endParaRPr lang="en-US" dirty="0"/>
           </a:p>
         </p:txBody>
@@ -1384,10 +1147,6 @@
           <a:bodyPr/>
           <a:lstStyle/>
           <a:p>
-            <a:r>
-              <a:rPr lang="en-US" dirty="0"/>
-              <a:t/>
-            </a:r>
             <a:endParaRPr lang="en-US" dirty="0"/>
           </a:p>
         </p:txBody>
@@ -1472,10 +1231,6 @@
           <a:bodyPr/>
           <a:lstStyle/>
           <a:p>
-            <a:r>
-              <a:rPr lang="en-US" dirty="0"/>
-              <a:t/>
-            </a:r>
             <a:endParaRPr lang="en-US" dirty="0"/>
           </a:p>
         </p:txBody>
@@ -1560,10 +1315,6 @@
           <a:bodyPr/>
           <a:lstStyle/>
           <a:p>
-            <a:r>
-              <a:rPr lang="en-US" dirty="0"/>
-              <a:t/>
-            </a:r>
             <a:endParaRPr lang="en-US" dirty="0"/>
           </a:p>
         </p:txBody>
@@ -1648,10 +1399,6 @@
           <a:bodyPr/>
           <a:lstStyle/>
           <a:p>
-            <a:r>
-              <a:rPr lang="en-US" dirty="0"/>
-              <a:t/>
-            </a:r>
             <a:endParaRPr lang="en-US" dirty="0"/>
           </a:p>
         </p:txBody>
@@ -1736,10 +1483,6 @@
           <a:bodyPr/>
           <a:lstStyle/>
           <a:p>
-            <a:r>
-              <a:rPr lang="en-US" dirty="0"/>
-              <a:t/>
-            </a:r>
             <a:endParaRPr lang="en-US" dirty="0"/>
           </a:p>
         </p:txBody>
@@ -1824,10 +1567,6 @@
           <a:bodyPr/>
           <a:lstStyle/>
           <a:p>
-            <a:r>
-              <a:rPr lang="en-US" dirty="0"/>
-              <a:t/>
-            </a:r>
             <a:endParaRPr lang="en-US" dirty="0"/>
           </a:p>
         </p:txBody>
@@ -1912,10 +1651,6 @@
           <a:bodyPr/>
           <a:lstStyle/>
           <a:p>
-            <a:r>
-              <a:rPr lang="en-US" dirty="0"/>
-              <a:t/>
-            </a:r>
             <a:endParaRPr lang="en-US" dirty="0"/>
           </a:p>
         </p:txBody>
@@ -1989,6 +1724,11 @@
 <file path=ppt/slideMasters/slideMaster1.xml><?xml version="1.0" encoding="utf-8"?>
 <p:sldMaster xmlns:a="http://schemas.openxmlformats.org/drawingml/2006/main" xmlns:r="http://schemas.openxmlformats.org/officeDocument/2006/relationships" xmlns:p="http://schemas.openxmlformats.org/presentationml/2006/main">
   <p:cSld>
+    <p:bg>
+      <p:bgRef idx="1001">
+        <a:schemeClr val="bg1"/>
+      </p:bgRef>
+    </p:bg>
     <p:spTree>
       <p:nvGrpSpPr>
         <p:cNvPr id="1" name=""/>
@@ -2271,6 +2011,7 @@
         <a:solidFill>
           <a:srgbClr val="1F2933"/>
         </a:solidFill>
+        <a:effectLst/>
       </p:bgPr>
     </p:bg>
     <p:spTree>
@@ -2308,7 +2049,7 @@
           <a:bodyPr wrap="square" lIns="0" tIns="0" rIns="0" bIns="0" rtlCol="0" anchor="ctr"/>
           <a:lstStyle/>
           <a:p>
-            <a:pPr indent="0" marL="0">
+            <a:pPr marL="0" indent="0">
               <a:buNone/>
             </a:pPr>
             <a:r>
@@ -2347,7 +2088,7 @@
           <a:bodyPr wrap="square" lIns="0" tIns="0" rIns="0" bIns="0" rtlCol="0" anchor="ctr"/>
           <a:lstStyle/>
           <a:p>
-            <a:pPr indent="0" marL="0">
+            <a:pPr marL="0" indent="0">
               <a:buNone/>
             </a:pPr>
             <a:r>
@@ -2386,7 +2127,7 @@
           <a:bodyPr wrap="square" lIns="0" tIns="0" rIns="0" bIns="0" rtlCol="0" anchor="ctr"/>
           <a:lstStyle/>
           <a:p>
-            <a:pPr indent="0" marL="0">
+            <a:pPr marL="0" indent="0">
               <a:buNone/>
             </a:pPr>
             <a:r>
@@ -2412,14 +2153,15 @@
 </p:sld>
 </file>
 
-<file path=ppt/slides/slide10.xml><?xml version="1.0" encoding="utf-8"?>
+<file path=ppt/slides/slide2.xml><?xml version="1.0" encoding="utf-8"?>
 <p:sld xmlns:a="http://schemas.openxmlformats.org/drawingml/2006/main" xmlns:r="http://schemas.openxmlformats.org/officeDocument/2006/relationships" xmlns:p="http://schemas.openxmlformats.org/presentationml/2006/main">
-  <p:cSld name="Slide 10">
+  <p:cSld name="Slide 2">
     <p:bg>
       <p:bgPr>
         <a:solidFill>
           <a:srgbClr val="FFFFFF"/>
         </a:solidFill>
+        <a:effectLst/>
       </p:bgPr>
     </p:bg>
     <p:spTree>
@@ -2457,1763 +2199,11 @@
           <a:bodyPr wrap="square" lIns="0" tIns="0" rIns="0" bIns="0" rtlCol="0" anchor="ctr"/>
           <a:lstStyle/>
           <a:p>
-            <a:pPr indent="0" marL="0">
+            <a:pPr marL="0" indent="0">
               <a:buNone/>
             </a:pPr>
             <a:r>
-              <a:rPr lang="en-US" sz="1100" b="1" spc="160" kern="0" dirty="0">
-                <a:solidFill>
-                  <a:srgbClr val="5C6B77"/>
-                </a:solidFill>
-                <a:latin typeface="Calibri" pitchFamily="34" charset="0"/>
-                <a:ea typeface="Calibri" pitchFamily="34" charset="-122"/>
-                <a:cs typeface="Calibri" pitchFamily="34" charset="-120"/>
-              </a:rPr>
-              <a:t>LIMITS</a:t>
-            </a:r>
-            <a:endParaRPr lang="en-US" sz="1100" dirty="0"/>
-          </a:p>
-        </p:txBody>
-      </p:sp>
-      <p:sp>
-        <p:nvSpPr>
-          <p:cNvPr id="3" name="Text 1"/>
-          <p:cNvSpPr txBox="1"/>
-          <p:nvPr/>
-        </p:nvSpPr>
-        <p:spPr>
-          <a:xfrm>
-            <a:off x="594360" y="603504"/>
-            <a:ext cx="10972800" cy="749808"/>
-          </a:xfrm>
-          <a:prstGeom prst="rect">
-            <a:avLst/>
-          </a:prstGeom>
-          <a:noFill/>
-          <a:ln/>
-        </p:spPr>
-        <p:txBody>
-          <a:bodyPr wrap="square" lIns="0" tIns="0" rIns="0" bIns="0" rtlCol="0" anchor="ctr"/>
-          <a:lstStyle/>
-          <a:p>
-            <a:pPr indent="0" marL="0">
-              <a:buNone/>
-            </a:pPr>
-            <a:r>
-              <a:rPr lang="en-US" sz="3000" b="1" dirty="0">
-                <a:solidFill>
-                  <a:srgbClr val="1F2933"/>
-                </a:solidFill>
-                <a:latin typeface="Cambria" pitchFamily="34" charset="0"/>
-                <a:ea typeface="Cambria" pitchFamily="34" charset="-122"/>
-                <a:cs typeface="Cambria" pitchFamily="34" charset="-120"/>
-              </a:rPr>
-              <a:t>What this does not yet establish</a:t>
-            </a:r>
-            <a:endParaRPr lang="en-US" sz="3000" dirty="0"/>
-          </a:p>
-        </p:txBody>
-      </p:sp>
-      <p:sp>
-        <p:nvSpPr>
-          <p:cNvPr id="4" name="Text 2"/>
-          <p:cNvSpPr txBox="1"/>
-          <p:nvPr/>
-        </p:nvSpPr>
-        <p:spPr>
-          <a:xfrm>
-            <a:off x="594360" y="1444752"/>
-            <a:ext cx="5303520" cy="310896"/>
-          </a:xfrm>
-          <a:prstGeom prst="rect">
-            <a:avLst/>
-          </a:prstGeom>
-          <a:noFill/>
-          <a:ln/>
-        </p:spPr>
-        <p:txBody>
-          <a:bodyPr wrap="square" lIns="0" tIns="0" rIns="0" bIns="0" rtlCol="0" anchor="ctr"/>
-          <a:lstStyle/>
-          <a:p>
-            <a:pPr indent="0" marL="0">
-              <a:buNone/>
-            </a:pPr>
-            <a:r>
-              <a:rPr lang="en-US" sz="1500" b="1" dirty="0">
-                <a:solidFill>
-                  <a:srgbClr val="1F2933"/>
-                </a:solidFill>
-                <a:latin typeface="Calibri" pitchFamily="34" charset="0"/>
-                <a:ea typeface="Calibri" pitchFamily="34" charset="-122"/>
-                <a:cs typeface="Calibri" pitchFamily="34" charset="-120"/>
-              </a:rPr>
-              <a:t>One machine</a:t>
-            </a:r>
-            <a:endParaRPr lang="en-US" sz="1500" dirty="0"/>
-          </a:p>
-        </p:txBody>
-      </p:sp>
-      <p:sp>
-        <p:nvSpPr>
-          <p:cNvPr id="5" name="Text 3"/>
-          <p:cNvSpPr txBox="1"/>
-          <p:nvPr/>
-        </p:nvSpPr>
-        <p:spPr>
-          <a:xfrm>
-            <a:off x="594360" y="1773936"/>
-            <a:ext cx="5303520" cy="960120"/>
-          </a:xfrm>
-          <a:prstGeom prst="rect">
-            <a:avLst/>
-          </a:prstGeom>
-          <a:noFill/>
-          <a:ln/>
-        </p:spPr>
-        <p:txBody>
-          <a:bodyPr wrap="square" lIns="0" tIns="0" rIns="0" bIns="0" rtlCol="0" anchor="ctr"/>
-          <a:lstStyle/>
-          <a:p>
-            <a:pPr indent="0" marL="0">
-              <a:buNone/>
-            </a:pPr>
-            <a:r>
-              <a:rPr lang="en-US" sz="1300" dirty="0">
-                <a:solidFill>
-                  <a:srgbClr val="5C6B77"/>
-                </a:solidFill>
-                <a:latin typeface="Calibri" pitchFamily="34" charset="0"/>
-                <a:ea typeface="Calibri" pitchFamily="34" charset="-122"/>
-                <a:cs typeface="Calibri" pitchFamily="34" charset="-120"/>
-              </a:rPr>
-              <a:t>Load generator, app, database and stub shared six cores. They compete.</a:t>
-            </a:r>
-            <a:endParaRPr lang="en-US" sz="1300" dirty="0"/>
-          </a:p>
-        </p:txBody>
-      </p:sp>
-      <p:sp>
-        <p:nvSpPr>
-          <p:cNvPr id="6" name="Text 4"/>
-          <p:cNvSpPr txBox="1"/>
-          <p:nvPr/>
-        </p:nvSpPr>
-        <p:spPr>
-          <a:xfrm>
-            <a:off x="594360" y="2862072"/>
-            <a:ext cx="5303520" cy="310896"/>
-          </a:xfrm>
-          <a:prstGeom prst="rect">
-            <a:avLst/>
-          </a:prstGeom>
-          <a:noFill/>
-          <a:ln/>
-        </p:spPr>
-        <p:txBody>
-          <a:bodyPr wrap="square" lIns="0" tIns="0" rIns="0" bIns="0" rtlCol="0" anchor="ctr"/>
-          <a:lstStyle/>
-          <a:p>
-            <a:pPr indent="0" marL="0">
-              <a:buNone/>
-            </a:pPr>
-            <a:r>
-              <a:rPr lang="en-US" sz="1500" b="1" dirty="0">
-                <a:solidFill>
-                  <a:srgbClr val="1F2933"/>
-                </a:solidFill>
-                <a:latin typeface="Calibri" pitchFamily="34" charset="0"/>
-                <a:ea typeface="Calibri" pitchFamily="34" charset="-122"/>
-                <a:cs typeface="Calibri" pitchFamily="34" charset="-120"/>
-              </a:rPr>
-              <a:t>One run per cell</a:t>
-            </a:r>
-            <a:endParaRPr lang="en-US" sz="1500" dirty="0"/>
-          </a:p>
-        </p:txBody>
-      </p:sp>
-      <p:sp>
-        <p:nvSpPr>
-          <p:cNvPr id="7" name="Text 5"/>
-          <p:cNvSpPr txBox="1"/>
-          <p:nvPr/>
-        </p:nvSpPr>
-        <p:spPr>
-          <a:xfrm>
-            <a:off x="594360" y="3191256"/>
-            <a:ext cx="5303520" cy="960120"/>
-          </a:xfrm>
-          <a:prstGeom prst="rect">
-            <a:avLst/>
-          </a:prstGeom>
-          <a:noFill/>
-          <a:ln/>
-        </p:spPr>
-        <p:txBody>
-          <a:bodyPr wrap="square" lIns="0" tIns="0" rIns="0" bIns="0" rtlCol="0" anchor="ctr"/>
-          <a:lstStyle/>
-          <a:p>
-            <a:pPr indent="0" marL="0">
-              <a:buNone/>
-            </a:pPr>
-            <a:r>
-              <a:rPr lang="en-US" sz="1300" dirty="0">
-                <a:solidFill>
-                  <a:srgbClr val="5C6B77"/>
-                </a:solidFill>
-                <a:latin typeface="Calibri" pitchFamily="34" charset="0"/>
-                <a:ea typeface="Calibri" pitchFamily="34" charset="-122"/>
-                <a:cs typeface="Calibri" pitchFamily="34" charset="-120"/>
-              </a:rPr>
-              <a:t>Except /nodb and /db. Single-digit-percent differences are noise.</a:t>
-            </a:r>
-            <a:endParaRPr lang="en-US" sz="1300" dirty="0"/>
-          </a:p>
-        </p:txBody>
-      </p:sp>
-      <p:sp>
-        <p:nvSpPr>
-          <p:cNvPr id="8" name="Text 6"/>
-          <p:cNvSpPr txBox="1"/>
-          <p:nvPr/>
-        </p:nvSpPr>
-        <p:spPr>
-          <a:xfrm>
-            <a:off x="594360" y="4279392"/>
-            <a:ext cx="5303520" cy="310896"/>
-          </a:xfrm>
-          <a:prstGeom prst="rect">
-            <a:avLst/>
-          </a:prstGeom>
-          <a:noFill/>
-          <a:ln/>
-        </p:spPr>
-        <p:txBody>
-          <a:bodyPr wrap="square" lIns="0" tIns="0" rIns="0" bIns="0" rtlCol="0" anchor="ctr"/>
-          <a:lstStyle/>
-          <a:p>
-            <a:pPr indent="0" marL="0">
-              <a:buNone/>
-            </a:pPr>
-            <a:r>
-              <a:rPr lang="en-US" sz="1500" b="1" dirty="0">
-                <a:solidFill>
-                  <a:srgbClr val="1F2933"/>
-                </a:solidFill>
-                <a:latin typeface="Calibri" pitchFamily="34" charset="0"/>
-                <a:ea typeface="Calibri" pitchFamily="34" charset="-122"/>
-                <a:cs typeface="Calibri" pitchFamily="34" charset="-120"/>
-              </a:rPr>
-              <a:t>/db-heavy is unusable</a:t>
-            </a:r>
-            <a:endParaRPr lang="en-US" sz="1500" dirty="0"/>
-          </a:p>
-        </p:txBody>
-      </p:sp>
-      <p:sp>
-        <p:nvSpPr>
-          <p:cNvPr id="9" name="Text 7"/>
-          <p:cNvSpPr txBox="1"/>
-          <p:nvPr/>
-        </p:nvSpPr>
-        <p:spPr>
-          <a:xfrm>
-            <a:off x="594360" y="4608576"/>
-            <a:ext cx="5303520" cy="960120"/>
-          </a:xfrm>
-          <a:prstGeom prst="rect">
-            <a:avLst/>
-          </a:prstGeom>
-          <a:noFill/>
-          <a:ln/>
-        </p:spPr>
-        <p:txBody>
-          <a:bodyPr wrap="square" lIns="0" tIns="0" rIns="0" bIns="0" rtlCol="0" anchor="ctr"/>
-          <a:lstStyle/>
-          <a:p>
-            <a:pPr indent="0" marL="0">
-              <a:buNone/>
-            </a:pPr>
-            <a:r>
-              <a:rPr lang="en-US" sz="1300" dirty="0">
-                <a:solidFill>
-                  <a:srgbClr val="5C6B77"/>
-                </a:solidFill>
-                <a:latin typeface="Calibri" pitchFamily="34" charset="0"/>
-                <a:ea typeface="Calibri" pitchFamily="34" charset="-122"/>
-                <a:cs typeface="Calibri" pitchFamily="34" charset="-120"/>
-              </a:rPr>
-              <a:t>The whole machine saturated. That workload says nothing yet.</a:t>
-            </a:r>
-            <a:endParaRPr lang="en-US" sz="1300" dirty="0"/>
-          </a:p>
-        </p:txBody>
-      </p:sp>
-      <p:sp>
-        <p:nvSpPr>
-          <p:cNvPr id="10" name="Text 8"/>
-          <p:cNvSpPr txBox="1"/>
-          <p:nvPr/>
-        </p:nvSpPr>
-        <p:spPr>
-          <a:xfrm>
-            <a:off x="6263640" y="1444752"/>
-            <a:ext cx="5303520" cy="310896"/>
-          </a:xfrm>
-          <a:prstGeom prst="rect">
-            <a:avLst/>
-          </a:prstGeom>
-          <a:noFill/>
-          <a:ln/>
-        </p:spPr>
-        <p:txBody>
-          <a:bodyPr wrap="square" lIns="0" tIns="0" rIns="0" bIns="0" rtlCol="0" anchor="ctr"/>
-          <a:lstStyle/>
-          <a:p>
-            <a:pPr indent="0" marL="0">
-              <a:buNone/>
-            </a:pPr>
-            <a:r>
-              <a:rPr lang="en-US" sz="1500" b="1" dirty="0">
-                <a:solidFill>
-                  <a:srgbClr val="1F2933"/>
-                </a:solidFill>
-                <a:latin typeface="Calibri" pitchFamily="34" charset="0"/>
-                <a:ea typeface="Calibri" pitchFamily="34" charset="-122"/>
-                <a:cs typeface="Calibri" pitchFamily="34" charset="-120"/>
-              </a:rPr>
-              <a:t>No network hop to the database</a:t>
-            </a:r>
-            <a:endParaRPr lang="en-US" sz="1500" dirty="0"/>
-          </a:p>
-        </p:txBody>
-      </p:sp>
-      <p:sp>
-        <p:nvSpPr>
-          <p:cNvPr id="11" name="Text 9"/>
-          <p:cNvSpPr txBox="1"/>
-          <p:nvPr/>
-        </p:nvSpPr>
-        <p:spPr>
-          <a:xfrm>
-            <a:off x="6263640" y="1773936"/>
-            <a:ext cx="5303520" cy="960120"/>
-          </a:xfrm>
-          <a:prstGeom prst="rect">
-            <a:avLst/>
-          </a:prstGeom>
-          <a:noFill/>
-          <a:ln/>
-        </p:spPr>
-        <p:txBody>
-          <a:bodyPr wrap="square" lIns="0" tIns="0" rIns="0" bIns="0" rtlCol="0" anchor="ctr"/>
-          <a:lstStyle/>
-          <a:p>
-            <a:pPr indent="0" marL="0">
-              <a:buNone/>
-            </a:pPr>
-            <a:r>
-              <a:rPr lang="en-US" sz="1300" dirty="0">
-                <a:solidFill>
-                  <a:srgbClr val="5C6B77"/>
-                </a:solidFill>
-                <a:latin typeface="Calibri" pitchFamily="34" charset="0"/>
-                <a:ea typeface="Calibri" pitchFamily="34" charset="-122"/>
-                <a:cs typeface="Calibri" pitchFamily="34" charset="-120"/>
-              </a:rPr>
-              <a:t>Connection hold measured 1.0 ms locally against a reported 15 ms in production. /db-heavy carries a deliberate pad to compensate.</a:t>
-            </a:r>
-            <a:endParaRPr lang="en-US" sz="1300" dirty="0"/>
-          </a:p>
-        </p:txBody>
-      </p:sp>
-      <p:sp>
-        <p:nvSpPr>
-          <p:cNvPr id="12" name="Text 10"/>
-          <p:cNvSpPr txBox="1"/>
-          <p:nvPr/>
-        </p:nvSpPr>
-        <p:spPr>
-          <a:xfrm>
-            <a:off x="6263640" y="2862072"/>
-            <a:ext cx="5303520" cy="310896"/>
-          </a:xfrm>
-          <a:prstGeom prst="rect">
-            <a:avLst/>
-          </a:prstGeom>
-          <a:noFill/>
-          <a:ln/>
-        </p:spPr>
-        <p:txBody>
-          <a:bodyPr wrap="square" lIns="0" tIns="0" rIns="0" bIns="0" rtlCol="0" anchor="ctr"/>
-          <a:lstStyle/>
-          <a:p>
-            <a:pPr indent="0" marL="0">
-              <a:buNone/>
-            </a:pPr>
-            <a:r>
-              <a:rPr lang="en-US" sz="1500" b="1" dirty="0">
-                <a:solidFill>
-                  <a:srgbClr val="1F2933"/>
-                </a:solidFill>
-                <a:latin typeface="Calibri" pitchFamily="34" charset="0"/>
-                <a:ea typeface="Calibri" pitchFamily="34" charset="-122"/>
-                <a:cs typeface="Calibri" pitchFamily="34" charset="-120"/>
-              </a:rPr>
-              <a:t>Windows RSS is not cgroup RSS</a:t>
-            </a:r>
-            <a:endParaRPr lang="en-US" sz="1500" dirty="0"/>
-          </a:p>
-        </p:txBody>
-      </p:sp>
-      <p:sp>
-        <p:nvSpPr>
-          <p:cNvPr id="13" name="Text 11"/>
-          <p:cNvSpPr txBox="1"/>
-          <p:nvPr/>
-        </p:nvSpPr>
-        <p:spPr>
-          <a:xfrm>
-            <a:off x="6263640" y="3191256"/>
-            <a:ext cx="5303520" cy="960120"/>
-          </a:xfrm>
-          <a:prstGeom prst="rect">
-            <a:avLst/>
-          </a:prstGeom>
-          <a:noFill/>
-          <a:ln/>
-        </p:spPr>
-        <p:txBody>
-          <a:bodyPr wrap="square" lIns="0" tIns="0" rIns="0" bIns="0" rtlCol="0" anchor="ctr"/>
-          <a:lstStyle/>
-          <a:p>
-            <a:pPr indent="0" marL="0">
-              <a:buNone/>
-            </a:pPr>
-            <a:r>
-              <a:rPr lang="en-US" sz="1300" dirty="0">
-                <a:solidFill>
-                  <a:srgbClr val="5C6B77"/>
-                </a:solidFill>
-                <a:latin typeface="Calibri" pitchFamily="34" charset="0"/>
-                <a:ea typeface="Calibri" pitchFamily="34" charset="-122"/>
-                <a:cs typeface="Calibri" pitchFamily="34" charset="-120"/>
-              </a:rPr>
-              <a:t>What constrains a container is different from what Task Manager reports. Re-measure before sizing anything.</a:t>
-            </a:r>
-            <a:endParaRPr lang="en-US" sz="1300" dirty="0"/>
-          </a:p>
-        </p:txBody>
-      </p:sp>
-      <p:sp>
-        <p:nvSpPr>
-          <p:cNvPr id="14" name="Text 12"/>
-          <p:cNvSpPr txBox="1"/>
-          <p:nvPr/>
-        </p:nvSpPr>
-        <p:spPr>
-          <a:xfrm>
-            <a:off x="6263640" y="4279392"/>
-            <a:ext cx="5303520" cy="310896"/>
-          </a:xfrm>
-          <a:prstGeom prst="rect">
-            <a:avLst/>
-          </a:prstGeom>
-          <a:noFill/>
-          <a:ln/>
-        </p:spPr>
-        <p:txBody>
-          <a:bodyPr wrap="square" lIns="0" tIns="0" rIns="0" bIns="0" rtlCol="0" anchor="ctr"/>
-          <a:lstStyle/>
-          <a:p>
-            <a:pPr indent="0" marL="0">
-              <a:buNone/>
-            </a:pPr>
-            <a:r>
-              <a:rPr lang="en-US" sz="1500" b="1" dirty="0">
-                <a:solidFill>
-                  <a:srgbClr val="1F2933"/>
-                </a:solidFill>
-                <a:latin typeface="Calibri" pitchFamily="34" charset="0"/>
-                <a:ea typeface="Calibri" pitchFamily="34" charset="-122"/>
-                <a:cs typeface="Calibri" pitchFamily="34" charset="-120"/>
-              </a:rPr>
-              <a:t>Write paths untested</a:t>
-            </a:r>
-            <a:endParaRPr lang="en-US" sz="1500" dirty="0"/>
-          </a:p>
-        </p:txBody>
-      </p:sp>
-      <p:sp>
-        <p:nvSpPr>
-          <p:cNvPr id="15" name="Text 13"/>
-          <p:cNvSpPr txBox="1"/>
-          <p:nvPr/>
-        </p:nvSpPr>
-        <p:spPr>
-          <a:xfrm>
-            <a:off x="6263640" y="4608576"/>
-            <a:ext cx="5303520" cy="960120"/>
-          </a:xfrm>
-          <a:prstGeom prst="rect">
-            <a:avLst/>
-          </a:prstGeom>
-          <a:noFill/>
-          <a:ln/>
-        </p:spPr>
-        <p:txBody>
-          <a:bodyPr wrap="square" lIns="0" tIns="0" rIns="0" bIns="0" rtlCol="0" anchor="ctr"/>
-          <a:lstStyle/>
-          <a:p>
-            <a:pPr indent="0" marL="0">
-              <a:buNone/>
-            </a:pPr>
-            <a:r>
-              <a:rPr lang="en-US" sz="1300" dirty="0">
-                <a:solidFill>
-                  <a:srgbClr val="5C6B77"/>
-                </a:solidFill>
-                <a:latin typeface="Calibri" pitchFamily="34" charset="0"/>
-                <a:ea typeface="Calibri" pitchFamily="34" charset="-122"/>
-                <a:cs typeface="Calibri" pitchFamily="34" charset="-120"/>
-              </a:rPr>
-              <a:t>Every workload is a read. Transactional write behaviour differs most between the two models.</a:t>
-            </a:r>
-            <a:endParaRPr lang="en-US" sz="1300" dirty="0"/>
-          </a:p>
-        </p:txBody>
-      </p:sp>
-      <p:sp>
-        <p:nvSpPr>
-          <p:cNvPr id="16" name="Shape 14"/>
-          <p:cNvSpPr/>
-          <p:nvPr/>
-        </p:nvSpPr>
-        <p:spPr>
-          <a:xfrm>
-            <a:off x="594360" y="5486400"/>
-            <a:ext cx="10972800" cy="868680"/>
-          </a:xfrm>
-          <a:prstGeom prst="roundRect">
-            <a:avLst>
-              <a:gd name="adj" fmla="val 8421"/>
-            </a:avLst>
-          </a:prstGeom>
-          <a:solidFill>
-            <a:srgbClr val="FDF3E7"/>
-          </a:solidFill>
-          <a:ln w="12700">
-            <a:solidFill>
-              <a:srgbClr val="F2D9BE"/>
-            </a:solidFill>
-            <a:prstDash val="solid"/>
-          </a:ln>
-        </p:spPr>
-      </p:sp>
-      <p:sp>
-        <p:nvSpPr>
-          <p:cNvPr id="17" name="Text 15"/>
-          <p:cNvSpPr txBox="1"/>
-          <p:nvPr/>
-        </p:nvSpPr>
-        <p:spPr>
-          <a:xfrm>
-            <a:off x="886968" y="5641848"/>
-            <a:ext cx="10387584" cy="292608"/>
-          </a:xfrm>
-          <a:prstGeom prst="rect">
-            <a:avLst/>
-          </a:prstGeom>
-          <a:noFill/>
-          <a:ln/>
-        </p:spPr>
-        <p:txBody>
-          <a:bodyPr wrap="square" lIns="0" tIns="0" rIns="0" bIns="0" rtlCol="0" anchor="ctr"/>
-          <a:lstStyle/>
-          <a:p>
-            <a:pPr indent="0" marL="0">
-              <a:buNone/>
-            </a:pPr>
-            <a:r>
-              <a:rPr lang="en-US" sz="1400" b="1" dirty="0">
-                <a:solidFill>
-                  <a:srgbClr val="8A4B08"/>
-                </a:solidFill>
-                <a:latin typeface="Calibri" pitchFamily="34" charset="0"/>
-                <a:ea typeface="Calibri" pitchFamily="34" charset="-122"/>
-                <a:cs typeface="Calibri" pitchFamily="34" charset="-120"/>
-              </a:rPr>
-              <a:t>The one result that is solid</a:t>
-            </a:r>
-            <a:endParaRPr lang="en-US" sz="1400" dirty="0"/>
-          </a:p>
-        </p:txBody>
-      </p:sp>
-      <p:sp>
-        <p:nvSpPr>
-          <p:cNvPr id="18" name="Text 16"/>
-          <p:cNvSpPr txBox="1"/>
-          <p:nvPr/>
-        </p:nvSpPr>
-        <p:spPr>
-          <a:xfrm>
-            <a:off x="886968" y="5961888"/>
-            <a:ext cx="10387584" cy="228600"/>
-          </a:xfrm>
-          <a:prstGeom prst="rect">
-            <a:avLst/>
-          </a:prstGeom>
-          <a:noFill/>
-          <a:ln/>
-        </p:spPr>
-        <p:txBody>
-          <a:bodyPr wrap="square" lIns="0" tIns="0" rIns="0" bIns="0" rtlCol="0" anchor="ctr"/>
-          <a:lstStyle/>
-          <a:p>
-            <a:pPr indent="0" marL="0">
-              <a:buNone/>
-            </a:pPr>
-            <a:r>
-              <a:rPr lang="en-US" sz="1300" dirty="0">
-                <a:solidFill>
-                  <a:srgbClr val="8A4B08"/>
-                </a:solidFill>
-                <a:latin typeface="Calibri" pitchFamily="34" charset="0"/>
-                <a:ea typeface="Calibri" pitchFamily="34" charset="-122"/>
-                <a:cs typeface="Calibri" pitchFamily="34" charset="-120"/>
-              </a:rPr>
-              <a:t>The /api thread ceiling reproduced across independent runs and lands exactly where the arithmetic predicted before any code was written.</a:t>
-            </a:r>
-            <a:endParaRPr lang="en-US" sz="1300" dirty="0"/>
-          </a:p>
-        </p:txBody>
-      </p:sp>
-    </p:spTree>
-  </p:cSld>
-  <p:clrMapOvr>
-    <a:masterClrMapping/>
-  </p:clrMapOvr>
-</p:sld>
-</file>
-
-<file path=ppt/slides/slide11.xml><?xml version="1.0" encoding="utf-8"?>
-<p:sld xmlns:a="http://schemas.openxmlformats.org/drawingml/2006/main" xmlns:r="http://schemas.openxmlformats.org/officeDocument/2006/relationships" xmlns:p="http://schemas.openxmlformats.org/presentationml/2006/main">
-  <p:cSld name="Slide 11">
-    <p:bg>
-      <p:bgPr>
-        <a:solidFill>
-          <a:srgbClr val="FFFFFF"/>
-        </a:solidFill>
-      </p:bgPr>
-    </p:bg>
-    <p:spTree>
-      <p:nvGrpSpPr>
-        <p:cNvPr id="1" name=""/>
-        <p:cNvGrpSpPr/>
-        <p:nvPr/>
-      </p:nvGrpSpPr>
-      <p:grpSpPr>
-        <a:xfrm>
-          <a:off x="0" y="0"/>
-          <a:ext cx="0" cy="0"/>
-          <a:chOff x="0" y="0"/>
-          <a:chExt cx="0" cy="0"/>
-        </a:xfrm>
-      </p:grpSpPr>
-      <p:sp>
-        <p:nvSpPr>
-          <p:cNvPr id="2" name="Text 0"/>
-          <p:cNvSpPr txBox="1"/>
-          <p:nvPr/>
-        </p:nvSpPr>
-        <p:spPr>
-          <a:xfrm>
-            <a:off x="594360" y="347472"/>
-            <a:ext cx="10972800" cy="237744"/>
-          </a:xfrm>
-          <a:prstGeom prst="rect">
-            <a:avLst/>
-          </a:prstGeom>
-          <a:noFill/>
-          <a:ln/>
-        </p:spPr>
-        <p:txBody>
-          <a:bodyPr wrap="square" lIns="0" tIns="0" rIns="0" bIns="0" rtlCol="0" anchor="ctr"/>
-          <a:lstStyle/>
-          <a:p>
-            <a:pPr indent="0" marL="0">
-              <a:buNone/>
-            </a:pPr>
-            <a:r>
-              <a:rPr lang="en-US" sz="1100" b="1" spc="160" kern="0" dirty="0">
-                <a:solidFill>
-                  <a:srgbClr val="5C6B77"/>
-                </a:solidFill>
-                <a:latin typeface="Calibri" pitchFamily="34" charset="0"/>
-                <a:ea typeface="Calibri" pitchFamily="34" charset="-122"/>
-                <a:cs typeface="Calibri" pitchFamily="34" charset="-120"/>
-              </a:rPr>
-              <a:t>NEXT</a:t>
-            </a:r>
-            <a:endParaRPr lang="en-US" sz="1100" dirty="0"/>
-          </a:p>
-        </p:txBody>
-      </p:sp>
-      <p:sp>
-        <p:nvSpPr>
-          <p:cNvPr id="3" name="Text 1"/>
-          <p:cNvSpPr txBox="1"/>
-          <p:nvPr/>
-        </p:nvSpPr>
-        <p:spPr>
-          <a:xfrm>
-            <a:off x="594360" y="603504"/>
-            <a:ext cx="10972800" cy="749808"/>
-          </a:xfrm>
-          <a:prstGeom prst="rect">
-            <a:avLst/>
-          </a:prstGeom>
-          <a:noFill/>
-          <a:ln/>
-        </p:spPr>
-        <p:txBody>
-          <a:bodyPr wrap="square" lIns="0" tIns="0" rIns="0" bIns="0" rtlCol="0" anchor="ctr"/>
-          <a:lstStyle/>
-          <a:p>
-            <a:pPr indent="0" marL="0">
-              <a:buNone/>
-            </a:pPr>
-            <a:r>
-              <a:rPr lang="en-US" sz="3000" b="1" dirty="0">
-                <a:solidFill>
-                  <a:srgbClr val="1F2933"/>
-                </a:solidFill>
-                <a:latin typeface="Cambria" pitchFamily="34" charset="0"/>
-                <a:ea typeface="Cambria" pitchFamily="34" charset="-122"/>
-                <a:cs typeface="Cambria" pitchFamily="34" charset="-120"/>
-              </a:rPr>
-              <a:t>What the AWS run will settle</a:t>
-            </a:r>
-            <a:endParaRPr lang="en-US" sz="3000" dirty="0"/>
-          </a:p>
-        </p:txBody>
-      </p:sp>
-      <p:sp>
-        <p:nvSpPr>
-          <p:cNvPr id="4" name="Text 2"/>
-          <p:cNvSpPr txBox="1"/>
-          <p:nvPr/>
-        </p:nvSpPr>
-        <p:spPr>
-          <a:xfrm>
-            <a:off x="594360" y="1444752"/>
-            <a:ext cx="10972800" cy="640080"/>
-          </a:xfrm>
-          <a:prstGeom prst="rect">
-            <a:avLst/>
-          </a:prstGeom>
-          <a:noFill/>
-          <a:ln/>
-        </p:spPr>
-        <p:txBody>
-          <a:bodyPr wrap="square" lIns="0" tIns="0" rIns="0" bIns="0" rtlCol="0" anchor="ctr"/>
-          <a:lstStyle/>
-          <a:p>
-            <a:pPr indent="0" marL="0">
-              <a:buNone/>
-            </a:pPr>
-            <a:r>
-              <a:rPr lang="en-US" sz="1500" dirty="0">
-                <a:solidFill>
-                  <a:srgbClr val="5C6B77"/>
-                </a:solidFill>
-                <a:latin typeface="Calibri" pitchFamily="34" charset="0"/>
-                <a:ea typeface="Calibri" pitchFamily="34" charset="-122"/>
-                <a:cs typeface="Calibri" pitchFamily="34" charset="-120"/>
-              </a:rPr>
-              <a:t>Three instances in one availability zone: a 4-core load generator, a 2-core system under test, and a backend running PostgreSQL and the stub service. Nothing shares a CPU with the application.</a:t>
-            </a:r>
-            <a:endParaRPr lang="en-US" sz="1500" dirty="0"/>
-          </a:p>
-        </p:txBody>
-      </p:sp>
-      <p:sp>
-        <p:nvSpPr>
-          <p:cNvPr id="5" name="Shape 3"/>
-          <p:cNvSpPr/>
-          <p:nvPr/>
-        </p:nvSpPr>
-        <p:spPr>
-          <a:xfrm>
-            <a:off x="594360" y="2313432"/>
-            <a:ext cx="5303520" cy="1325880"/>
-          </a:xfrm>
-          <a:prstGeom prst="roundRect">
-            <a:avLst>
-              <a:gd name="adj" fmla="val 5517"/>
-            </a:avLst>
-          </a:prstGeom>
-          <a:solidFill>
-            <a:srgbClr val="F2F5F7"/>
-          </a:solidFill>
-          <a:ln w="12700">
-            <a:solidFill>
-              <a:srgbClr val="F2F5F7"/>
-            </a:solidFill>
-            <a:prstDash val="solid"/>
-          </a:ln>
-        </p:spPr>
-      </p:sp>
-      <p:sp>
-        <p:nvSpPr>
-          <p:cNvPr id="6" name="Text 4"/>
-          <p:cNvSpPr txBox="1"/>
-          <p:nvPr/>
-        </p:nvSpPr>
-        <p:spPr>
-          <a:xfrm>
-            <a:off x="868680" y="2496312"/>
-            <a:ext cx="4754880" cy="310896"/>
-          </a:xfrm>
-          <a:prstGeom prst="rect">
-            <a:avLst/>
-          </a:prstGeom>
-          <a:noFill/>
-          <a:ln/>
-        </p:spPr>
-        <p:txBody>
-          <a:bodyPr wrap="square" lIns="0" tIns="0" rIns="0" bIns="0" rtlCol="0" anchor="ctr"/>
-          <a:lstStyle/>
-          <a:p>
-            <a:pPr indent="0" marL="0">
-              <a:buNone/>
-            </a:pPr>
-            <a:r>
-              <a:rPr lang="en-US" sz="1500" b="1" dirty="0">
-                <a:solidFill>
-                  <a:srgbClr val="1F2933"/>
-                </a:solidFill>
-                <a:latin typeface="Calibri" pitchFamily="34" charset="0"/>
-                <a:ea typeface="Calibri" pitchFamily="34" charset="-122"/>
-                <a:cs typeface="Calibri" pitchFamily="34" charset="-120"/>
-              </a:rPr>
-              <a:t>Does the memory gap hold?</a:t>
-            </a:r>
-            <a:endParaRPr lang="en-US" sz="1500" dirty="0"/>
-          </a:p>
-        </p:txBody>
-      </p:sp>
-      <p:sp>
-        <p:nvSpPr>
-          <p:cNvPr id="7" name="Text 5"/>
-          <p:cNvSpPr txBox="1"/>
-          <p:nvPr/>
-        </p:nvSpPr>
-        <p:spPr>
-          <a:xfrm>
-            <a:off x="868680" y="2825496"/>
-            <a:ext cx="4754880" cy="731520"/>
-          </a:xfrm>
-          <a:prstGeom prst="rect">
-            <a:avLst/>
-          </a:prstGeom>
-          <a:noFill/>
-          <a:ln/>
-        </p:spPr>
-        <p:txBody>
-          <a:bodyPr wrap="square" lIns="0" tIns="0" rIns="0" bIns="0" rtlCol="0" anchor="ctr"/>
-          <a:lstStyle/>
-          <a:p>
-            <a:pPr indent="0" marL="0">
-              <a:buNone/>
-            </a:pPr>
-            <a:r>
-              <a:rPr lang="en-US" sz="1200" dirty="0">
-                <a:solidFill>
-                  <a:srgbClr val="5C6B77"/>
-                </a:solidFill>
-                <a:latin typeface="Calibri" pitchFamily="34" charset="0"/>
-                <a:ea typeface="Calibri" pitchFamily="34" charset="-122"/>
-                <a:cs typeface="Calibri" pitchFamily="34" charset="-120"/>
-              </a:rPr>
-              <a:t>The +2% against +47% is the only structural difference found. Two data points is not a trend.</a:t>
-            </a:r>
-            <a:endParaRPr lang="en-US" sz="1200" dirty="0"/>
-          </a:p>
-        </p:txBody>
-      </p:sp>
-      <p:sp>
-        <p:nvSpPr>
-          <p:cNvPr id="8" name="Shape 6"/>
-          <p:cNvSpPr/>
-          <p:nvPr/>
-        </p:nvSpPr>
-        <p:spPr>
-          <a:xfrm>
-            <a:off x="6263640" y="2313432"/>
-            <a:ext cx="5303520" cy="1325880"/>
-          </a:xfrm>
-          <a:prstGeom prst="roundRect">
-            <a:avLst>
-              <a:gd name="adj" fmla="val 5517"/>
-            </a:avLst>
-          </a:prstGeom>
-          <a:solidFill>
-            <a:srgbClr val="F2F5F7"/>
-          </a:solidFill>
-          <a:ln w="12700">
-            <a:solidFill>
-              <a:srgbClr val="F2F5F7"/>
-            </a:solidFill>
-            <a:prstDash val="solid"/>
-          </a:ln>
-        </p:spPr>
-      </p:sp>
-      <p:sp>
-        <p:nvSpPr>
-          <p:cNvPr id="9" name="Text 7"/>
-          <p:cNvSpPr txBox="1"/>
-          <p:nvPr/>
-        </p:nvSpPr>
-        <p:spPr>
-          <a:xfrm>
-            <a:off x="6537960" y="2496312"/>
-            <a:ext cx="4754880" cy="310896"/>
-          </a:xfrm>
-          <a:prstGeom prst="rect">
-            <a:avLst/>
-          </a:prstGeom>
-          <a:noFill/>
-          <a:ln/>
-        </p:spPr>
-        <p:txBody>
-          <a:bodyPr wrap="square" lIns="0" tIns="0" rIns="0" bIns="0" rtlCol="0" anchor="ctr"/>
-          <a:lstStyle/>
-          <a:p>
-            <a:pPr indent="0" marL="0">
-              <a:buNone/>
-            </a:pPr>
-            <a:r>
-              <a:rPr lang="en-US" sz="1500" b="1" dirty="0">
-                <a:solidFill>
-                  <a:srgbClr val="1F2933"/>
-                </a:solidFill>
-                <a:latin typeface="Calibri" pitchFamily="34" charset="0"/>
-                <a:ea typeface="Calibri" pitchFamily="34" charset="-122"/>
-                <a:cs typeface="Calibri" pitchFamily="34" charset="-120"/>
-              </a:rPr>
-              <a:t>Is the CPU gap still ~40%?</a:t>
-            </a:r>
-            <a:endParaRPr lang="en-US" sz="1500" dirty="0"/>
-          </a:p>
-        </p:txBody>
-      </p:sp>
-      <p:sp>
-        <p:nvSpPr>
-          <p:cNvPr id="10" name="Text 8"/>
-          <p:cNvSpPr txBox="1"/>
-          <p:nvPr/>
-        </p:nvSpPr>
-        <p:spPr>
-          <a:xfrm>
-            <a:off x="6537960" y="2825496"/>
-            <a:ext cx="4754880" cy="731520"/>
-          </a:xfrm>
-          <a:prstGeom prst="rect">
-            <a:avLst/>
-          </a:prstGeom>
-          <a:noFill/>
-          <a:ln/>
-        </p:spPr>
-        <p:txBody>
-          <a:bodyPr wrap="square" lIns="0" tIns="0" rIns="0" bIns="0" rtlCol="0" anchor="ctr"/>
-          <a:lstStyle/>
-          <a:p>
-            <a:pPr indent="0" marL="0">
-              <a:buNone/>
-            </a:pPr>
-            <a:r>
-              <a:rPr lang="en-US" sz="1200" dirty="0">
-                <a:solidFill>
-                  <a:srgbClr val="5C6B77"/>
-                </a:solidFill>
-                <a:latin typeface="Calibri" pitchFamily="34" charset="0"/>
-                <a:ea typeface="Calibri" pitchFamily="34" charset="-122"/>
-                <a:cs typeface="Calibri" pitchFamily="34" charset="-120"/>
-              </a:rPr>
-              <a:t>Measured while four processes fought over six cores. It could move either way.</a:t>
-            </a:r>
-            <a:endParaRPr lang="en-US" sz="1200" dirty="0"/>
-          </a:p>
-        </p:txBody>
-      </p:sp>
-      <p:sp>
-        <p:nvSpPr>
-          <p:cNvPr id="11" name="Shape 9"/>
-          <p:cNvSpPr/>
-          <p:nvPr/>
-        </p:nvSpPr>
-        <p:spPr>
-          <a:xfrm>
-            <a:off x="594360" y="3867912"/>
-            <a:ext cx="5303520" cy="1325880"/>
-          </a:xfrm>
-          <a:prstGeom prst="roundRect">
-            <a:avLst>
-              <a:gd name="adj" fmla="val 5517"/>
-            </a:avLst>
-          </a:prstGeom>
-          <a:solidFill>
-            <a:srgbClr val="F2F5F7"/>
-          </a:solidFill>
-          <a:ln w="12700">
-            <a:solidFill>
-              <a:srgbClr val="F2F5F7"/>
-            </a:solidFill>
-            <a:prstDash val="solid"/>
-          </a:ln>
-        </p:spPr>
-      </p:sp>
-      <p:sp>
-        <p:nvSpPr>
-          <p:cNvPr id="12" name="Text 10"/>
-          <p:cNvSpPr txBox="1"/>
-          <p:nvPr/>
-        </p:nvSpPr>
-        <p:spPr>
-          <a:xfrm>
-            <a:off x="868680" y="4050792"/>
-            <a:ext cx="4754880" cy="310896"/>
-          </a:xfrm>
-          <a:prstGeom prst="rect">
-            <a:avLst/>
-          </a:prstGeom>
-          <a:noFill/>
-          <a:ln/>
-        </p:spPr>
-        <p:txBody>
-          <a:bodyPr wrap="square" lIns="0" tIns="0" rIns="0" bIns="0" rtlCol="0" anchor="ctr"/>
-          <a:lstStyle/>
-          <a:p>
-            <a:pPr indent="0" marL="0">
-              <a:buNone/>
-            </a:pPr>
-            <a:r>
-              <a:rPr lang="en-US" sz="1500" b="1" dirty="0">
-                <a:solidFill>
-                  <a:srgbClr val="1F2933"/>
-                </a:solidFill>
-                <a:latin typeface="Calibri" pitchFamily="34" charset="0"/>
-                <a:ea typeface="Calibri" pitchFamily="34" charset="-122"/>
-                <a:cs typeface="Calibri" pitchFamily="34" charset="-120"/>
-              </a:rPr>
-              <a:t>What is the real connection hold time?</a:t>
-            </a:r>
-            <a:endParaRPr lang="en-US" sz="1500" dirty="0"/>
-          </a:p>
-        </p:txBody>
-      </p:sp>
-      <p:sp>
-        <p:nvSpPr>
-          <p:cNvPr id="13" name="Text 11"/>
-          <p:cNvSpPr txBox="1"/>
-          <p:nvPr/>
-        </p:nvSpPr>
-        <p:spPr>
-          <a:xfrm>
-            <a:off x="868680" y="4379976"/>
-            <a:ext cx="4754880" cy="731520"/>
-          </a:xfrm>
-          <a:prstGeom prst="rect">
-            <a:avLst/>
-          </a:prstGeom>
-          <a:noFill/>
-          <a:ln/>
-        </p:spPr>
-        <p:txBody>
-          <a:bodyPr wrap="square" lIns="0" tIns="0" rIns="0" bIns="0" rtlCol="0" anchor="ctr"/>
-          <a:lstStyle/>
-          <a:p>
-            <a:pPr indent="0" marL="0">
-              <a:buNone/>
-            </a:pPr>
-            <a:r>
-              <a:rPr lang="en-US" sz="1200" dirty="0">
-                <a:solidFill>
-                  <a:srgbClr val="5C6B77"/>
-                </a:solidFill>
-                <a:latin typeface="Calibri" pitchFamily="34" charset="0"/>
-                <a:ea typeface="Calibri" pitchFamily="34" charset="-122"/>
-                <a:cs typeface="Calibri" pitchFamily="34" charset="-120"/>
-              </a:rPr>
-              <a:t>A network hop to a separate database may reach the 15 ms production reports, making the synthetic pad unnecessary.</a:t>
-            </a:r>
-            <a:endParaRPr lang="en-US" sz="1200" dirty="0"/>
-          </a:p>
-        </p:txBody>
-      </p:sp>
-      <p:sp>
-        <p:nvSpPr>
-          <p:cNvPr id="14" name="Shape 12"/>
-          <p:cNvSpPr/>
-          <p:nvPr/>
-        </p:nvSpPr>
-        <p:spPr>
-          <a:xfrm>
-            <a:off x="6263640" y="3867912"/>
-            <a:ext cx="5303520" cy="1325880"/>
-          </a:xfrm>
-          <a:prstGeom prst="roundRect">
-            <a:avLst>
-              <a:gd name="adj" fmla="val 5517"/>
-            </a:avLst>
-          </a:prstGeom>
-          <a:solidFill>
-            <a:srgbClr val="F2F5F7"/>
-          </a:solidFill>
-          <a:ln w="12700">
-            <a:solidFill>
-              <a:srgbClr val="F2F5F7"/>
-            </a:solidFill>
-            <a:prstDash val="solid"/>
-          </a:ln>
-        </p:spPr>
-      </p:sp>
-      <p:sp>
-        <p:nvSpPr>
-          <p:cNvPr id="15" name="Text 13"/>
-          <p:cNvSpPr txBox="1"/>
-          <p:nvPr/>
-        </p:nvSpPr>
-        <p:spPr>
-          <a:xfrm>
-            <a:off x="6537960" y="4050792"/>
-            <a:ext cx="4754880" cy="310896"/>
-          </a:xfrm>
-          <a:prstGeom prst="rect">
-            <a:avLst/>
-          </a:prstGeom>
-          <a:noFill/>
-          <a:ln/>
-        </p:spPr>
-        <p:txBody>
-          <a:bodyPr wrap="square" lIns="0" tIns="0" rIns="0" bIns="0" rtlCol="0" anchor="ctr"/>
-          <a:lstStyle/>
-          <a:p>
-            <a:pPr indent="0" marL="0">
-              <a:buNone/>
-            </a:pPr>
-            <a:r>
-              <a:rPr lang="en-US" sz="1500" b="1" dirty="0">
-                <a:solidFill>
-                  <a:srgbClr val="1F2933"/>
-                </a:solidFill>
-                <a:latin typeface="Calibri" pitchFamily="34" charset="0"/>
-                <a:ea typeface="Calibri" pitchFamily="34" charset="-122"/>
-                <a:cs typeface="Calibri" pitchFamily="34" charset="-120"/>
-              </a:rPr>
-              <a:t>Does /db-heavy say anything?</a:t>
-            </a:r>
-            <a:endParaRPr lang="en-US" sz="1500" dirty="0"/>
-          </a:p>
-        </p:txBody>
-      </p:sp>
-      <p:sp>
-        <p:nvSpPr>
-          <p:cNvPr id="16" name="Text 14"/>
-          <p:cNvSpPr txBox="1"/>
-          <p:nvPr/>
-        </p:nvSpPr>
-        <p:spPr>
-          <a:xfrm>
-            <a:off x="6537960" y="4379976"/>
-            <a:ext cx="4754880" cy="731520"/>
-          </a:xfrm>
-          <a:prstGeom prst="rect">
-            <a:avLst/>
-          </a:prstGeom>
-          <a:noFill/>
-          <a:ln/>
-        </p:spPr>
-        <p:txBody>
-          <a:bodyPr wrap="square" lIns="0" tIns="0" rIns="0" bIns="0" rtlCol="0" anchor="ctr"/>
-          <a:lstStyle/>
-          <a:p>
-            <a:pPr indent="0" marL="0">
-              <a:buNone/>
-            </a:pPr>
-            <a:r>
-              <a:rPr lang="en-US" sz="1200" dirty="0">
-                <a:solidFill>
-                  <a:srgbClr val="5C6B77"/>
-                </a:solidFill>
-                <a:latin typeface="Calibri" pitchFamily="34" charset="0"/>
-                <a:ea typeface="Calibri" pitchFamily="34" charset="-122"/>
-                <a:cs typeface="Calibri" pitchFamily="34" charset="-120"/>
-              </a:rPr>
-              <a:t>It was unusable locally. On dedicated hardware the pool knee at ~1,387 rps should become visible.</a:t>
-            </a:r>
-            <a:endParaRPr lang="en-US" sz="1200" dirty="0"/>
-          </a:p>
-        </p:txBody>
-      </p:sp>
-      <p:sp>
-        <p:nvSpPr>
-          <p:cNvPr id="17" name="Text 15"/>
-          <p:cNvSpPr txBox="1"/>
-          <p:nvPr/>
-        </p:nvSpPr>
-        <p:spPr>
-          <a:xfrm>
-            <a:off x="594360" y="5806440"/>
-            <a:ext cx="10972800" cy="457200"/>
-          </a:xfrm>
-          <a:prstGeom prst="rect">
-            <a:avLst/>
-          </a:prstGeom>
-          <a:noFill/>
-          <a:ln/>
-        </p:spPr>
-        <p:txBody>
-          <a:bodyPr wrap="square" lIns="0" tIns="0" rIns="0" bIns="0" rtlCol="0" anchor="ctr"/>
-          <a:lstStyle/>
-          <a:p>
-            <a:pPr indent="0" marL="0">
-              <a:buNone/>
-            </a:pPr>
-            <a:r>
-              <a:rPr lang="en-US" sz="1300" i="1" dirty="0">
-                <a:solidFill>
-                  <a:srgbClr val="5C6B77"/>
-                </a:solidFill>
-                <a:latin typeface="Calibri" pitchFamily="34" charset="0"/>
-                <a:ea typeface="Calibri" pitchFamily="34" charset="-122"/>
-                <a:cs typeface="Calibri" pitchFamily="34" charset="-120"/>
-              </a:rPr>
-              <a:t>Everything is in the repository — four builds, the k6 scenarios, the run scripts and the raw results — so any of this can be re-run or disputed.</a:t>
-            </a:r>
-            <a:endParaRPr lang="en-US" sz="1300" dirty="0"/>
-          </a:p>
-        </p:txBody>
-      </p:sp>
-    </p:spTree>
-  </p:cSld>
-  <p:clrMapOvr>
-    <a:masterClrMapping/>
-  </p:clrMapOvr>
-</p:sld>
-</file>
-
-<file path=ppt/slides/slide12.xml><?xml version="1.0" encoding="utf-8"?>
-<p:sld xmlns:a="http://schemas.openxmlformats.org/drawingml/2006/main" xmlns:r="http://schemas.openxmlformats.org/officeDocument/2006/relationships" xmlns:p="http://schemas.openxmlformats.org/presentationml/2006/main">
-  <p:cSld name="Slide 12">
-    <p:bg>
-      <p:bgPr>
-        <a:solidFill>
-          <a:srgbClr val="1F2933"/>
-        </a:solidFill>
-      </p:bgPr>
-    </p:bg>
-    <p:spTree>
-      <p:nvGrpSpPr>
-        <p:cNvPr id="1" name=""/>
-        <p:cNvGrpSpPr/>
-        <p:nvPr/>
-      </p:nvGrpSpPr>
-      <p:grpSpPr>
-        <a:xfrm>
-          <a:off x="0" y="0"/>
-          <a:ext cx="0" cy="0"/>
-          <a:chOff x="0" y="0"/>
-          <a:chExt cx="0" cy="0"/>
-        </a:xfrm>
-      </p:grpSpPr>
-      <p:sp>
-        <p:nvSpPr>
-          <p:cNvPr id="2" name="Text 0"/>
-          <p:cNvSpPr txBox="1"/>
-          <p:nvPr/>
-        </p:nvSpPr>
-        <p:spPr>
-          <a:xfrm>
-            <a:off x="594360" y="502920"/>
-            <a:ext cx="10972800" cy="274320"/>
-          </a:xfrm>
-          <a:prstGeom prst="rect">
-            <a:avLst/>
-          </a:prstGeom>
-          <a:noFill/>
-          <a:ln/>
-        </p:spPr>
-        <p:txBody>
-          <a:bodyPr wrap="square" lIns="0" tIns="0" rIns="0" bIns="0" rtlCol="0" anchor="ctr"/>
-          <a:lstStyle/>
-          <a:p>
-            <a:pPr indent="0" marL="0">
-              <a:buNone/>
-            </a:pPr>
-            <a:r>
-              <a:rPr lang="en-US" sz="1200" b="1" spc="180" kern="0" dirty="0">
-                <a:solidFill>
-                  <a:srgbClr val="8896A2"/>
-                </a:solidFill>
-                <a:latin typeface="Calibri" pitchFamily="34" charset="0"/>
-                <a:ea typeface="Calibri" pitchFamily="34" charset="-122"/>
-                <a:cs typeface="Calibri" pitchFamily="34" charset="-120"/>
-              </a:rPr>
-              <a:t>WHERE THIS LEAVES US</a:t>
-            </a:r>
-            <a:endParaRPr lang="en-US" sz="1200" dirty="0"/>
-          </a:p>
-        </p:txBody>
-      </p:sp>
-      <p:sp>
-        <p:nvSpPr>
-          <p:cNvPr id="3" name="Text 1"/>
-          <p:cNvSpPr txBox="1"/>
-          <p:nvPr/>
-        </p:nvSpPr>
-        <p:spPr>
-          <a:xfrm>
-            <a:off x="594360" y="868680"/>
-            <a:ext cx="10607040" cy="914400"/>
-          </a:xfrm>
-          <a:prstGeom prst="rect">
-            <a:avLst/>
-          </a:prstGeom>
-          <a:noFill/>
-          <a:ln/>
-        </p:spPr>
-        <p:txBody>
-          <a:bodyPr wrap="square" lIns="0" tIns="0" rIns="0" bIns="0" rtlCol="0" anchor="ctr"/>
-          <a:lstStyle/>
-          <a:p>
-            <a:pPr indent="0" marL="0">
-              <a:buNone/>
-            </a:pPr>
-            <a:r>
-              <a:rPr lang="en-US" sz="2800" b="1" dirty="0">
-                <a:solidFill>
-                  <a:srgbClr val="FFFFFF"/>
-                </a:solidFill>
-                <a:latin typeface="Cambria" pitchFamily="34" charset="0"/>
-                <a:ea typeface="Cambria" pitchFamily="34" charset="-122"/>
-                <a:cs typeface="Cambria" pitchFamily="34" charset="-120"/>
-              </a:rPr>
-              <a:t>Virtual threads are a credible replacement. The open question is cost, not capability.</a:t>
-            </a:r>
-            <a:endParaRPr lang="en-US" sz="2800" dirty="0"/>
-          </a:p>
-        </p:txBody>
-      </p:sp>
-      <p:sp>
-        <p:nvSpPr>
-          <p:cNvPr id="4" name="Text 2"/>
-          <p:cNvSpPr txBox="1"/>
-          <p:nvPr/>
-        </p:nvSpPr>
-        <p:spPr>
-          <a:xfrm>
-            <a:off x="594360" y="1965960"/>
-            <a:ext cx="2286000" cy="310896"/>
-          </a:xfrm>
-          <a:prstGeom prst="rect">
-            <a:avLst/>
-          </a:prstGeom>
-          <a:noFill/>
-          <a:ln/>
-        </p:spPr>
-        <p:txBody>
-          <a:bodyPr wrap="square" lIns="0" tIns="0" rIns="0" bIns="0" rtlCol="0" anchor="ctr"/>
-          <a:lstStyle/>
-          <a:p>
-            <a:pPr indent="0" marL="0">
-              <a:buNone/>
-            </a:pPr>
-            <a:r>
-              <a:rPr lang="en-US" sz="1600" b="1" dirty="0">
-                <a:solidFill>
-                  <a:srgbClr val="009E73"/>
-                </a:solidFill>
-                <a:latin typeface="Calibri" pitchFamily="34" charset="0"/>
-                <a:ea typeface="Calibri" pitchFamily="34" charset="-122"/>
-                <a:cs typeface="Calibri" pitchFamily="34" charset="-120"/>
-              </a:rPr>
-              <a:t>Capability</a:t>
-            </a:r>
-            <a:endParaRPr lang="en-US" sz="1600" dirty="0"/>
-          </a:p>
-        </p:txBody>
-      </p:sp>
-      <p:sp>
-        <p:nvSpPr>
-          <p:cNvPr id="5" name="Text 3"/>
-          <p:cNvSpPr txBox="1"/>
-          <p:nvPr/>
-        </p:nvSpPr>
-        <p:spPr>
-          <a:xfrm>
-            <a:off x="3063240" y="1965960"/>
-            <a:ext cx="8412480" cy="777240"/>
-          </a:xfrm>
-          <a:prstGeom prst="rect">
-            <a:avLst/>
-          </a:prstGeom>
-          <a:noFill/>
-          <a:ln/>
-        </p:spPr>
-        <p:txBody>
-          <a:bodyPr wrap="square" lIns="0" tIns="0" rIns="0" bIns="0" rtlCol="0" anchor="ctr"/>
-          <a:lstStyle/>
-          <a:p>
-            <a:pPr indent="0" marL="0">
-              <a:buNone/>
-            </a:pPr>
-            <a:r>
-              <a:rPr lang="en-US" sz="1400" dirty="0">
-                <a:solidFill>
-                  <a:srgbClr val="C9D3DB"/>
-                </a:solidFill>
-                <a:latin typeface="Calibri" pitchFamily="34" charset="0"/>
-                <a:ea typeface="Calibri" pitchFamily="34" charset="-122"/>
-                <a:cs typeface="Calibri" pitchFamily="34" charset="-120"/>
-              </a:rPr>
-              <a:t>Matched WebFlux on latency and errors at every rate tested, on every workload.</a:t>
-            </a:r>
-            <a:endParaRPr lang="en-US" sz="1400" dirty="0"/>
-          </a:p>
-        </p:txBody>
-      </p:sp>
-      <p:sp>
-        <p:nvSpPr>
-          <p:cNvPr id="6" name="Text 4"/>
-          <p:cNvSpPr txBox="1"/>
-          <p:nvPr/>
-        </p:nvSpPr>
-        <p:spPr>
-          <a:xfrm>
-            <a:off x="594360" y="2990088"/>
-            <a:ext cx="2286000" cy="310896"/>
-          </a:xfrm>
-          <a:prstGeom prst="rect">
-            <a:avLst/>
-          </a:prstGeom>
-          <a:noFill/>
-          <a:ln/>
-        </p:spPr>
-        <p:txBody>
-          <a:bodyPr wrap="square" lIns="0" tIns="0" rIns="0" bIns="0" rtlCol="0" anchor="ctr"/>
-          <a:lstStyle/>
-          <a:p>
-            <a:pPr indent="0" marL="0">
-              <a:buNone/>
-            </a:pPr>
-            <a:r>
-              <a:rPr lang="en-US" sz="1600" b="1" dirty="0">
-                <a:solidFill>
-                  <a:srgbClr val="E8B4A0"/>
-                </a:solidFill>
-                <a:latin typeface="Calibri" pitchFamily="34" charset="0"/>
-                <a:ea typeface="Calibri" pitchFamily="34" charset="-122"/>
-                <a:cs typeface="Calibri" pitchFamily="34" charset="-120"/>
-              </a:rPr>
-              <a:t>CPU</a:t>
-            </a:r>
-            <a:endParaRPr lang="en-US" sz="1600" dirty="0"/>
-          </a:p>
-        </p:txBody>
-      </p:sp>
-      <p:sp>
-        <p:nvSpPr>
-          <p:cNvPr id="7" name="Text 5"/>
-          <p:cNvSpPr txBox="1"/>
-          <p:nvPr/>
-        </p:nvSpPr>
-        <p:spPr>
-          <a:xfrm>
-            <a:off x="3063240" y="2990088"/>
-            <a:ext cx="8412480" cy="777240"/>
-          </a:xfrm>
-          <a:prstGeom prst="rect">
-            <a:avLst/>
-          </a:prstGeom>
-          <a:noFill/>
-          <a:ln/>
-        </p:spPr>
-        <p:txBody>
-          <a:bodyPr wrap="square" lIns="0" tIns="0" rIns="0" bIns="0" rtlCol="0" anchor="ctr"/>
-          <a:lstStyle/>
-          <a:p>
-            <a:pPr indent="0" marL="0">
-              <a:buNone/>
-            </a:pPr>
-            <a:r>
-              <a:rPr lang="en-US" sz="1400" dirty="0">
-                <a:solidFill>
-                  <a:srgbClr val="C9D3DB"/>
-                </a:solidFill>
-                <a:latin typeface="Calibri" pitchFamily="34" charset="0"/>
-                <a:ea typeface="Calibri" pitchFamily="34" charset="-122"/>
-                <a:cs typeface="Calibri" pitchFamily="34" charset="-120"/>
-              </a:rPr>
-              <a:t>About 40% more for identical work. Affordable at our load; verify on AWS.</a:t>
-            </a:r>
-            <a:endParaRPr lang="en-US" sz="1400" dirty="0"/>
-          </a:p>
-        </p:txBody>
-      </p:sp>
-      <p:sp>
-        <p:nvSpPr>
-          <p:cNvPr id="8" name="Text 6"/>
-          <p:cNvSpPr txBox="1"/>
-          <p:nvPr/>
-        </p:nvSpPr>
-        <p:spPr>
-          <a:xfrm>
-            <a:off x="594360" y="4014216"/>
-            <a:ext cx="2286000" cy="310896"/>
-          </a:xfrm>
-          <a:prstGeom prst="rect">
-            <a:avLst/>
-          </a:prstGeom>
-          <a:noFill/>
-          <a:ln/>
-        </p:spPr>
-        <p:txBody>
-          <a:bodyPr wrap="square" lIns="0" tIns="0" rIns="0" bIns="0" rtlCol="0" anchor="ctr"/>
-          <a:lstStyle/>
-          <a:p>
-            <a:pPr indent="0" marL="0">
-              <a:buNone/>
-            </a:pPr>
-            <a:r>
-              <a:rPr lang="en-US" sz="1600" b="1" dirty="0">
-                <a:solidFill>
-                  <a:srgbClr val="E8B4A0"/>
-                </a:solidFill>
-                <a:latin typeface="Calibri" pitchFamily="34" charset="0"/>
-                <a:ea typeface="Calibri" pitchFamily="34" charset="-122"/>
-                <a:cs typeface="Calibri" pitchFamily="34" charset="-120"/>
-              </a:rPr>
-              <a:t>Memory</a:t>
-            </a:r>
-            <a:endParaRPr lang="en-US" sz="1600" dirty="0"/>
-          </a:p>
-        </p:txBody>
-      </p:sp>
-      <p:sp>
-        <p:nvSpPr>
-          <p:cNvPr id="9" name="Text 7"/>
-          <p:cNvSpPr txBox="1"/>
-          <p:nvPr/>
-        </p:nvSpPr>
-        <p:spPr>
-          <a:xfrm>
-            <a:off x="3063240" y="4014216"/>
-            <a:ext cx="8412480" cy="777240"/>
-          </a:xfrm>
-          <a:prstGeom prst="rect">
-            <a:avLst/>
-          </a:prstGeom>
-          <a:noFill/>
-          <a:ln/>
-        </p:spPr>
-        <p:txBody>
-          <a:bodyPr wrap="square" lIns="0" tIns="0" rIns="0" bIns="0" rtlCol="0" anchor="ctr"/>
-          <a:lstStyle/>
-          <a:p>
-            <a:pPr indent="0" marL="0">
-              <a:buNone/>
-            </a:pPr>
-            <a:r>
-              <a:rPr lang="en-US" sz="1400" dirty="0">
-                <a:solidFill>
-                  <a:srgbClr val="C9D3DB"/>
-                </a:solidFill>
-                <a:latin typeface="Calibri" pitchFamily="34" charset="0"/>
-                <a:ea typeface="Calibri" pitchFamily="34" charset="-122"/>
-                <a:cs typeface="Calibri" pitchFamily="34" charset="-120"/>
-              </a:rPr>
-              <a:t>15% more at rest, and it grows with concurrency where reactive does not. The one thing that could change the answer.</a:t>
-            </a:r>
-            <a:endParaRPr lang="en-US" sz="1400" dirty="0"/>
-          </a:p>
-        </p:txBody>
-      </p:sp>
-      <p:sp>
-        <p:nvSpPr>
-          <p:cNvPr id="10" name="Text 8"/>
-          <p:cNvSpPr txBox="1"/>
-          <p:nvPr/>
-        </p:nvSpPr>
-        <p:spPr>
-          <a:xfrm>
-            <a:off x="594360" y="5038344"/>
-            <a:ext cx="2286000" cy="310896"/>
-          </a:xfrm>
-          <a:prstGeom prst="rect">
-            <a:avLst/>
-          </a:prstGeom>
-          <a:noFill/>
-          <a:ln/>
-        </p:spPr>
-        <p:txBody>
-          <a:bodyPr wrap="square" lIns="0" tIns="0" rIns="0" bIns="0" rtlCol="0" anchor="ctr"/>
-          <a:lstStyle/>
-          <a:p>
-            <a:pPr indent="0" marL="0">
-              <a:buNone/>
-            </a:pPr>
-            <a:r>
-              <a:rPr lang="en-US" sz="1600" b="1" dirty="0">
-                <a:solidFill>
-                  <a:srgbClr val="009E73"/>
-                </a:solidFill>
-                <a:latin typeface="Calibri" pitchFamily="34" charset="0"/>
-                <a:ea typeface="Calibri" pitchFamily="34" charset="-122"/>
-                <a:cs typeface="Calibri" pitchFamily="34" charset="-120"/>
-              </a:rPr>
-              <a:t>Engineering</a:t>
-            </a:r>
-            <a:endParaRPr lang="en-US" sz="1600" dirty="0"/>
-          </a:p>
-        </p:txBody>
-      </p:sp>
-      <p:sp>
-        <p:nvSpPr>
-          <p:cNvPr id="11" name="Text 9"/>
-          <p:cNvSpPr txBox="1"/>
-          <p:nvPr/>
-        </p:nvSpPr>
-        <p:spPr>
-          <a:xfrm>
-            <a:off x="3063240" y="5038344"/>
-            <a:ext cx="8412480" cy="777240"/>
-          </a:xfrm>
-          <a:prstGeom prst="rect">
-            <a:avLst/>
-          </a:prstGeom>
-          <a:noFill/>
-          <a:ln/>
-        </p:spPr>
-        <p:txBody>
-          <a:bodyPr wrap="square" lIns="0" tIns="0" rIns="0" bIns="0" rtlCol="0" anchor="ctr"/>
-          <a:lstStyle/>
-          <a:p>
-            <a:pPr indent="0" marL="0">
-              <a:buNone/>
-            </a:pPr>
-            <a:r>
-              <a:rPr lang="en-US" sz="1400" dirty="0">
-                <a:solidFill>
-                  <a:srgbClr val="C9D3DB"/>
-                </a:solidFill>
-                <a:latin typeface="Calibri" pitchFamily="34" charset="0"/>
-                <a:ea typeface="Calibri" pitchFamily="34" charset="-122"/>
-                <a:cs typeface="Calibri" pitchFamily="34" charset="-120"/>
-              </a:rPr>
-              <a:t>Ordinary code, real stack traces, working debuggers, a mature driver, a larger hiring pool.</a:t>
-            </a:r>
-            <a:endParaRPr lang="en-US" sz="1400" dirty="0"/>
-          </a:p>
-        </p:txBody>
-      </p:sp>
-      <p:sp>
-        <p:nvSpPr>
-          <p:cNvPr id="12" name="Text 10"/>
-          <p:cNvSpPr txBox="1"/>
-          <p:nvPr/>
-        </p:nvSpPr>
-        <p:spPr>
-          <a:xfrm>
-            <a:off x="594360" y="5897880"/>
-            <a:ext cx="10972800" cy="365760"/>
-          </a:xfrm>
-          <a:prstGeom prst="rect">
-            <a:avLst/>
-          </a:prstGeom>
-          <a:noFill/>
-          <a:ln/>
-        </p:spPr>
-        <p:txBody>
-          <a:bodyPr wrap="square" lIns="0" tIns="0" rIns="0" bIns="0" rtlCol="0" anchor="ctr"/>
-          <a:lstStyle/>
-          <a:p>
-            <a:pPr indent="0" marL="0">
-              <a:buNone/>
-            </a:pPr>
-            <a:r>
-              <a:rPr lang="en-US" sz="1300" i="1" dirty="0">
-                <a:solidFill>
-                  <a:srgbClr val="8896A2"/>
-                </a:solidFill>
-                <a:latin typeface="Calibri" pitchFamily="34" charset="0"/>
-                <a:ea typeface="Calibri" pitchFamily="34" charset="-122"/>
-                <a:cs typeface="Calibri" pitchFamily="34" charset="-120"/>
-              </a:rPr>
-              <a:t>Recommendation: hold the decision until the AWS numbers land, then decide on the memory curve.</a:t>
-            </a:r>
-            <a:endParaRPr lang="en-US" sz="1300" dirty="0"/>
-          </a:p>
-        </p:txBody>
-      </p:sp>
-    </p:spTree>
-  </p:cSld>
-  <p:clrMapOvr>
-    <a:masterClrMapping/>
-  </p:clrMapOvr>
-</p:sld>
-</file>
-
-<file path=ppt/slides/slide2.xml><?xml version="1.0" encoding="utf-8"?>
-<p:sld xmlns:a="http://schemas.openxmlformats.org/drawingml/2006/main" xmlns:r="http://schemas.openxmlformats.org/officeDocument/2006/relationships" xmlns:p="http://schemas.openxmlformats.org/presentationml/2006/main">
-  <p:cSld name="Slide 2">
-    <p:bg>
-      <p:bgPr>
-        <a:solidFill>
-          <a:srgbClr val="FFFFFF"/>
-        </a:solidFill>
-      </p:bgPr>
-    </p:bg>
-    <p:spTree>
-      <p:nvGrpSpPr>
-        <p:cNvPr id="1" name=""/>
-        <p:cNvGrpSpPr/>
-        <p:nvPr/>
-      </p:nvGrpSpPr>
-      <p:grpSpPr>
-        <a:xfrm>
-          <a:off x="0" y="0"/>
-          <a:ext cx="0" cy="0"/>
-          <a:chOff x="0" y="0"/>
-          <a:chExt cx="0" cy="0"/>
-        </a:xfrm>
-      </p:grpSpPr>
-      <p:sp>
-        <p:nvSpPr>
-          <p:cNvPr id="2" name="Text 0"/>
-          <p:cNvSpPr txBox="1"/>
-          <p:nvPr/>
-        </p:nvSpPr>
-        <p:spPr>
-          <a:xfrm>
-            <a:off x="594360" y="347472"/>
-            <a:ext cx="10972800" cy="237744"/>
-          </a:xfrm>
-          <a:prstGeom prst="rect">
-            <a:avLst/>
-          </a:prstGeom>
-          <a:noFill/>
-          <a:ln/>
-        </p:spPr>
-        <p:txBody>
-          <a:bodyPr wrap="square" lIns="0" tIns="0" rIns="0" bIns="0" rtlCol="0" anchor="ctr"/>
-          <a:lstStyle/>
-          <a:p>
-            <a:pPr indent="0" marL="0">
-              <a:buNone/>
-            </a:pPr>
-            <a:r>
-              <a:rPr lang="en-US" sz="1100" b="1" spc="160" kern="0" dirty="0">
+              <a:rPr lang="en-US" sz="1100" b="1" kern="0" spc="160" dirty="0">
                 <a:solidFill>
                   <a:srgbClr val="5C6B77"/>
                 </a:solidFill>
@@ -4248,7 +2238,7 @@
           <a:bodyPr wrap="square" lIns="0" tIns="0" rIns="0" bIns="0" rtlCol="0" anchor="ctr"/>
           <a:lstStyle/>
           <a:p>
-            <a:pPr indent="0" marL="0">
+            <a:pPr marL="0" indent="0">
               <a:buNone/>
             </a:pPr>
             <a:r>
@@ -4260,7 +2250,7 @@
                 <a:ea typeface="Cambria" pitchFamily="34" charset="-122"/>
                 <a:cs typeface="Cambria" pitchFamily="34" charset="-120"/>
               </a:rPr>
-              <a:t>Four builds, one variable each</a:t>
+              <a:t>Three builds, one variable each</a:t>
             </a:r>
             <a:endParaRPr lang="en-US" sz="3000" dirty="0"/>
           </a:p>
@@ -4285,6 +2275,13 @@
           </a:solidFill>
           <a:ln/>
         </p:spPr>
+        <p:txBody>
+          <a:bodyPr/>
+          <a:lstStyle/>
+          <a:p>
+            <a:endParaRPr lang="en-US"/>
+          </a:p>
+        </p:txBody>
       </p:sp>
       <p:sp>
         <p:nvSpPr>
@@ -4307,7 +2304,7 @@
           <a:bodyPr wrap="square" lIns="0" tIns="0" rIns="0" bIns="0" rtlCol="0" anchor="ctr"/>
           <a:lstStyle/>
           <a:p>
-            <a:pPr indent="0" marL="0">
+            <a:pPr marL="0" indent="0">
               <a:buNone/>
             </a:pPr>
             <a:r>
@@ -4346,7 +2343,7 @@
           <a:bodyPr wrap="square" lIns="0" tIns="0" rIns="0" bIns="0" rtlCol="0" anchor="ctr"/>
           <a:lstStyle/>
           <a:p>
-            <a:pPr indent="0" marL="0">
+            <a:pPr marL="0" indent="0">
               <a:buNone/>
             </a:pPr>
             <a:r>
@@ -4383,6 +2380,13 @@
           </a:solidFill>
           <a:ln/>
         </p:spPr>
+        <p:txBody>
+          <a:bodyPr/>
+          <a:lstStyle/>
+          <a:p>
+            <a:endParaRPr lang="en-US"/>
+          </a:p>
+        </p:txBody>
       </p:sp>
       <p:sp>
         <p:nvSpPr>
@@ -4405,7 +2409,7 @@
           <a:bodyPr wrap="square" lIns="0" tIns="0" rIns="0" bIns="0" rtlCol="0" anchor="ctr"/>
           <a:lstStyle/>
           <a:p>
-            <a:pPr indent="0" marL="0">
+            <a:pPr marL="0" indent="0">
               <a:buNone/>
             </a:pPr>
             <a:r>
@@ -4444,7 +2448,7 @@
           <a:bodyPr wrap="square" lIns="0" tIns="0" rIns="0" bIns="0" rtlCol="0" anchor="ctr"/>
           <a:lstStyle/>
           <a:p>
-            <a:pPr indent="0" marL="0">
+            <a:pPr marL="0" indent="0">
               <a:buNone/>
             </a:pPr>
             <a:r>
@@ -4481,6 +2485,13 @@
           </a:solidFill>
           <a:ln/>
         </p:spPr>
+        <p:txBody>
+          <a:bodyPr/>
+          <a:lstStyle/>
+          <a:p>
+            <a:endParaRPr lang="en-US"/>
+          </a:p>
+        </p:txBody>
       </p:sp>
       <p:sp>
         <p:nvSpPr>
@@ -4503,7 +2514,7 @@
           <a:bodyPr wrap="square" lIns="0" tIns="0" rIns="0" bIns="0" rtlCol="0" anchor="ctr"/>
           <a:lstStyle/>
           <a:p>
-            <a:pPr indent="0" marL="0">
+            <a:pPr marL="0" indent="0">
               <a:buNone/>
             </a:pPr>
             <a:r>
@@ -4542,7 +2553,7 @@
           <a:bodyPr wrap="square" lIns="0" tIns="0" rIns="0" bIns="0" rtlCol="0" anchor="ctr"/>
           <a:lstStyle/>
           <a:p>
-            <a:pPr indent="0" marL="0">
+            <a:pPr marL="0" indent="0">
               <a:buNone/>
             </a:pPr>
             <a:r>
@@ -4557,209 +2568,6 @@
               <a:t>Reference. Byte-identical to mvc-virtual; virtual threads off.</a:t>
             </a:r>
             <a:endParaRPr lang="en-US" sz="1400" dirty="0"/>
-          </a:p>
-        </p:txBody>
-      </p:sp>
-      <p:sp>
-        <p:nvSpPr>
-          <p:cNvPr id="13" name="Shape 11"/>
-          <p:cNvSpPr/>
-          <p:nvPr/>
-        </p:nvSpPr>
-        <p:spPr>
-          <a:xfrm>
-            <a:off x="594360" y="4183380"/>
-            <a:ext cx="146304" cy="146304"/>
-          </a:xfrm>
-          <a:prstGeom prst="ellipse">
-            <a:avLst/>
-          </a:prstGeom>
-          <a:solidFill>
-            <a:srgbClr val="5C6B77"/>
-          </a:solidFill>
-          <a:ln/>
-        </p:spPr>
-      </p:sp>
-      <p:sp>
-        <p:nvSpPr>
-          <p:cNvPr id="14" name="Text 12"/>
-          <p:cNvSpPr txBox="1"/>
-          <p:nvPr/>
-        </p:nvSpPr>
-        <p:spPr>
-          <a:xfrm>
-            <a:off x="832104" y="4142232"/>
-            <a:ext cx="2743200" cy="237744"/>
-          </a:xfrm>
-          <a:prstGeom prst="rect">
-            <a:avLst/>
-          </a:prstGeom>
-          <a:noFill/>
-          <a:ln/>
-        </p:spPr>
-        <p:txBody>
-          <a:bodyPr wrap="square" lIns="0" tIns="0" rIns="0" bIns="0" rtlCol="0" anchor="ctr"/>
-          <a:lstStyle/>
-          <a:p>
-            <a:pPr indent="0" marL="0">
-              <a:buNone/>
-            </a:pPr>
-            <a:r>
-              <a:rPr lang="en-US" sz="1500" b="1" dirty="0">
-                <a:solidFill>
-                  <a:srgbClr val="1F2933"/>
-                </a:solidFill>
-                <a:latin typeface="Calibri" pitchFamily="34" charset="0"/>
-                <a:ea typeface="Calibri" pitchFamily="34" charset="-122"/>
-                <a:cs typeface="Calibri" pitchFamily="34" charset="-120"/>
-              </a:rPr>
-              <a:t>mvc-jpa</a:t>
-            </a:r>
-            <a:endParaRPr lang="en-US" sz="1500" dirty="0"/>
-          </a:p>
-        </p:txBody>
-      </p:sp>
-      <p:sp>
-        <p:nvSpPr>
-          <p:cNvPr id="15" name="Text 13"/>
-          <p:cNvSpPr txBox="1"/>
-          <p:nvPr/>
-        </p:nvSpPr>
-        <p:spPr>
-          <a:xfrm>
-            <a:off x="3703320" y="4142232"/>
-            <a:ext cx="7863840" cy="640080"/>
-          </a:xfrm>
-          <a:prstGeom prst="rect">
-            <a:avLst/>
-          </a:prstGeom>
-          <a:noFill/>
-          <a:ln/>
-        </p:spPr>
-        <p:txBody>
-          <a:bodyPr wrap="square" lIns="0" tIns="0" rIns="0" bIns="0" rtlCol="0" anchor="ctr"/>
-          <a:lstStyle/>
-          <a:p>
-            <a:pPr indent="0" marL="0">
-              <a:buNone/>
-            </a:pPr>
-            <a:r>
-              <a:rPr lang="en-US" sz="1400" dirty="0">
-                <a:solidFill>
-                  <a:srgbClr val="5C6B77"/>
-                </a:solidFill>
-                <a:latin typeface="Calibri" pitchFamily="34" charset="0"/>
-                <a:ea typeface="Calibri" pitchFamily="34" charset="-122"/>
-                <a:cs typeface="Calibri" pitchFamily="34" charset="-120"/>
-              </a:rPr>
-              <a:t>Control. As mvc-platform but Hibernate, to price the ORM separately.</a:t>
-            </a:r>
-            <a:endParaRPr lang="en-US" sz="1400" dirty="0"/>
-          </a:p>
-        </p:txBody>
-      </p:sp>
-      <p:sp>
-        <p:nvSpPr>
-          <p:cNvPr id="16" name="Shape 14"/>
-          <p:cNvSpPr/>
-          <p:nvPr/>
-        </p:nvSpPr>
-        <p:spPr>
-          <a:xfrm>
-            <a:off x="594360" y="5120640"/>
-            <a:ext cx="10972800" cy="1051560"/>
-          </a:xfrm>
-          <a:prstGeom prst="roundRect">
-            <a:avLst>
-              <a:gd name="adj" fmla="val 6957"/>
-            </a:avLst>
-          </a:prstGeom>
-          <a:solidFill>
-            <a:srgbClr val="F2F5F7"/>
-          </a:solidFill>
-          <a:ln w="12700">
-            <a:solidFill>
-              <a:srgbClr val="D9E0E6"/>
-            </a:solidFill>
-            <a:prstDash val="solid"/>
-          </a:ln>
-        </p:spPr>
-      </p:sp>
-      <p:sp>
-        <p:nvSpPr>
-          <p:cNvPr id="17" name="Text 15"/>
-          <p:cNvSpPr txBox="1"/>
-          <p:nvPr/>
-        </p:nvSpPr>
-        <p:spPr>
-          <a:xfrm>
-            <a:off x="886968" y="5276088"/>
-            <a:ext cx="10387584" cy="292608"/>
-          </a:xfrm>
-          <a:prstGeom prst="rect">
-            <a:avLst/>
-          </a:prstGeom>
-          <a:noFill/>
-          <a:ln/>
-        </p:spPr>
-        <p:txBody>
-          <a:bodyPr wrap="square" lIns="0" tIns="0" rIns="0" bIns="0" rtlCol="0" anchor="ctr"/>
-          <a:lstStyle/>
-          <a:p>
-            <a:pPr indent="0" marL="0">
-              <a:buNone/>
-            </a:pPr>
-            <a:r>
-              <a:rPr lang="en-US" sz="1400" b="1" dirty="0">
-                <a:solidFill>
-                  <a:srgbClr val="1F2933"/>
-                </a:solidFill>
-                <a:latin typeface="Calibri" pitchFamily="34" charset="0"/>
-                <a:ea typeface="Calibri" pitchFamily="34" charset="-122"/>
-                <a:cs typeface="Calibri" pitchFamily="34" charset="-120"/>
-              </a:rPr>
-              <a:t>mvc-virtual and mvc-platform are the same program</a:t>
-            </a:r>
-            <a:endParaRPr lang="en-US" sz="1400" dirty="0"/>
-          </a:p>
-        </p:txBody>
-      </p:sp>
-      <p:sp>
-        <p:nvSpPr>
-          <p:cNvPr id="18" name="Text 16"/>
-          <p:cNvSpPr txBox="1"/>
-          <p:nvPr/>
-        </p:nvSpPr>
-        <p:spPr>
-          <a:xfrm>
-            <a:off x="886968" y="5596128"/>
-            <a:ext cx="10387584" cy="411480"/>
-          </a:xfrm>
-          <a:prstGeom prst="rect">
-            <a:avLst/>
-          </a:prstGeom>
-          <a:noFill/>
-          <a:ln/>
-        </p:spPr>
-        <p:txBody>
-          <a:bodyPr wrap="square" lIns="0" tIns="0" rIns="0" bIns="0" rtlCol="0" anchor="ctr"/>
-          <a:lstStyle/>
-          <a:p>
-            <a:pPr indent="0" marL="0">
-              <a:buNone/>
-            </a:pPr>
-            <a:r>
-              <a:rPr lang="en-US" sz="1300" dirty="0">
-                <a:solidFill>
-                  <a:srgbClr val="1F2933"/>
-                </a:solidFill>
-                <a:latin typeface="Calibri" pitchFamily="34" charset="0"/>
-                <a:ea typeface="Calibri" pitchFamily="34" charset="-122"/>
-                <a:cs typeface="Calibri" pitchFamily="34" charset="-120"/>
-              </a:rPr>
-              <a:t>Identical build files, identical controllers, verified byte for byte. The only difference is three lines of YAML. Any gap between them is the thread model and nothing else.</a:t>
-            </a:r>
-            <a:endParaRPr lang="en-US" sz="1300" dirty="0"/>
           </a:p>
         </p:txBody>
       </p:sp>
@@ -4779,6 +2587,7 @@
         <a:solidFill>
           <a:srgbClr val="FFFFFF"/>
         </a:solidFill>
+        <a:effectLst/>
       </p:bgPr>
     </p:bg>
     <p:spTree>
@@ -4816,11 +2625,11 @@
           <a:bodyPr wrap="square" lIns="0" tIns="0" rIns="0" bIns="0" rtlCol="0" anchor="ctr"/>
           <a:lstStyle/>
           <a:p>
-            <a:pPr indent="0" marL="0">
+            <a:pPr marL="0" indent="0">
               <a:buNone/>
             </a:pPr>
             <a:r>
-              <a:rPr lang="en-US" sz="1100" b="1" spc="160" kern="0" dirty="0">
+              <a:rPr lang="en-US" sz="1100" b="1" kern="0" spc="160" dirty="0">
                 <a:solidFill>
                   <a:srgbClr val="5C6B77"/>
                 </a:solidFill>
@@ -4855,7 +2664,7 @@
           <a:bodyPr wrap="square" lIns="0" tIns="0" rIns="0" bIns="0" rtlCol="0" anchor="ctr"/>
           <a:lstStyle/>
           <a:p>
-            <a:pPr indent="0" marL="0">
+            <a:pPr marL="0" indent="0">
               <a:buNone/>
             </a:pPr>
             <a:r>
@@ -4889,18 +2698,48 @@
         </p:nvGraphicFramePr>
         <p:xfrm>
           <a:off x="594360" y="1444752"/>
-          <a:ext cx="10972800" cy="914400"/>
+          <a:ext cx="10972800" cy="2304288"/>
         </p:xfrm>
         <a:graphic>
           <a:graphicData uri="http://schemas.openxmlformats.org/drawingml/2006/table">
             <a:tbl>
               <a:tblPr/>
               <a:tblGrid>
-                <a:gridCol w="1737360"/>
-                <a:gridCol w="2651760"/>
-                <a:gridCol w="1554480"/>
-                <a:gridCol w="1463040"/>
-                <a:gridCol w="3566160"/>
+                <a:gridCol w="1737360">
+                  <a:extLst>
+                    <a:ext uri="{9D8B030D-6E8A-4147-A177-3AD203B41FA5}">
+                      <a16:colId xmlns:a16="http://schemas.microsoft.com/office/drawing/2014/main" val="20000"/>
+                    </a:ext>
+                  </a:extLst>
+                </a:gridCol>
+                <a:gridCol w="2651760">
+                  <a:extLst>
+                    <a:ext uri="{9D8B030D-6E8A-4147-A177-3AD203B41FA5}">
+                      <a16:colId xmlns:a16="http://schemas.microsoft.com/office/drawing/2014/main" val="20001"/>
+                    </a:ext>
+                  </a:extLst>
+                </a:gridCol>
+                <a:gridCol w="1554480">
+                  <a:extLst>
+                    <a:ext uri="{9D8B030D-6E8A-4147-A177-3AD203B41FA5}">
+                      <a16:colId xmlns:a16="http://schemas.microsoft.com/office/drawing/2014/main" val="20002"/>
+                    </a:ext>
+                  </a:extLst>
+                </a:gridCol>
+                <a:gridCol w="1463040">
+                  <a:extLst>
+                    <a:ext uri="{9D8B030D-6E8A-4147-A177-3AD203B41FA5}">
+                      <a16:colId xmlns:a16="http://schemas.microsoft.com/office/drawing/2014/main" val="20003"/>
+                    </a:ext>
+                  </a:extLst>
+                </a:gridCol>
+                <a:gridCol w="3566160">
+                  <a:extLst>
+                    <a:ext uri="{9D8B030D-6E8A-4147-A177-3AD203B41FA5}">
+                      <a16:colId xmlns:a16="http://schemas.microsoft.com/office/drawing/2014/main" val="20004"/>
+                    </a:ext>
+                  </a:extLst>
+                </a:gridCol>
               </a:tblGrid>
               <a:tr h="384048">
                 <a:tc>
@@ -4908,7 +2747,7 @@
                     <a:bodyPr/>
                     <a:lstStyle/>
                     <a:p>
-                      <a:pPr indent="0" marL="0">
+                      <a:pPr marL="0" indent="0">
                         <a:buNone/>
                       </a:pPr>
                       <a:r>
@@ -4929,7 +2768,7 @@
                       </a:endParaRPr>
                     </a:p>
                   </a:txBody>
-                  <a:tcPr marL="91440" marR="91440" marT="45720" marB="45720">
+                  <a:tcPr>
                     <a:lnL w="12700" cap="flat" cmpd="sng" algn="ctr">
                       <a:solidFill>
                         <a:srgbClr val="D9E0E6"/>
@@ -4976,7 +2815,7 @@
                     <a:bodyPr/>
                     <a:lstStyle/>
                     <a:p>
-                      <a:pPr indent="0" marL="0">
+                      <a:pPr marL="0" indent="0">
                         <a:buNone/>
                       </a:pPr>
                       <a:r>
@@ -4997,7 +2836,7 @@
                       </a:endParaRPr>
                     </a:p>
                   </a:txBody>
-                  <a:tcPr marL="91440" marR="91440" marT="45720" marB="45720">
+                  <a:tcPr>
                     <a:lnL w="12700" cap="flat" cmpd="sng" algn="ctr">
                       <a:solidFill>
                         <a:srgbClr val="D9E0E6"/>
@@ -5044,7 +2883,7 @@
                     <a:bodyPr/>
                     <a:lstStyle/>
                     <a:p>
-                      <a:pPr indent="0" marL="0">
+                      <a:pPr marL="0" indent="0">
                         <a:buNone/>
                       </a:pPr>
                       <a:r>
@@ -5065,7 +2904,7 @@
                       </a:endParaRPr>
                     </a:p>
                   </a:txBody>
-                  <a:tcPr marL="91440" marR="91440" marT="45720" marB="45720">
+                  <a:tcPr>
                     <a:lnL w="12700" cap="flat" cmpd="sng" algn="ctr">
                       <a:solidFill>
                         <a:srgbClr val="D9E0E6"/>
@@ -5112,7 +2951,7 @@
                     <a:bodyPr/>
                     <a:lstStyle/>
                     <a:p>
-                      <a:pPr indent="0" marL="0">
+                      <a:pPr marL="0" indent="0">
                         <a:buNone/>
                       </a:pPr>
                       <a:r>
@@ -5133,7 +2972,7 @@
                       </a:endParaRPr>
                     </a:p>
                   </a:txBody>
-                  <a:tcPr marL="91440" marR="91440" marT="45720" marB="45720">
+                  <a:tcPr>
                     <a:lnL w="12700" cap="flat" cmpd="sng" algn="ctr">
                       <a:solidFill>
                         <a:srgbClr val="D9E0E6"/>
@@ -5180,7 +3019,7 @@
                     <a:bodyPr/>
                     <a:lstStyle/>
                     <a:p>
-                      <a:pPr indent="0" marL="0">
+                      <a:pPr marL="0" indent="0">
                         <a:buNone/>
                       </a:pPr>
                       <a:r>
@@ -5201,7 +3040,7 @@
                       </a:endParaRPr>
                     </a:p>
                   </a:txBody>
-                  <a:tcPr marL="91440" marR="91440" marT="45720" marB="45720">
+                  <a:tcPr>
                     <a:lnL w="12700" cap="flat" cmpd="sng" algn="ctr">
                       <a:solidFill>
                         <a:srgbClr val="D9E0E6"/>
@@ -5243,6 +3082,11 @@
                     </a:solidFill>
                   </a:tcPr>
                 </a:tc>
+                <a:extLst>
+                  <a:ext uri="{0D108BD9-81ED-4DB2-BD59-A6C34878D82A}">
+                    <a16:rowId xmlns:a16="http://schemas.microsoft.com/office/drawing/2014/main" val="10000"/>
+                  </a:ext>
+                </a:extLst>
               </a:tr>
               <a:tr h="384048">
                 <a:tc>
@@ -5250,7 +3094,7 @@
                     <a:bodyPr/>
                     <a:lstStyle/>
                     <a:p>
-                      <a:pPr indent="0" marL="0">
+                      <a:pPr marL="0" indent="0">
                         <a:buNone/>
                       </a:pPr>
                       <a:r>
@@ -5271,7 +3115,7 @@
                       </a:endParaRPr>
                     </a:p>
                   </a:txBody>
-                  <a:tcPr marL="91440" marR="91440" marT="45720" marB="45720">
+                  <a:tcPr>
                     <a:lnL w="12700" cap="flat" cmpd="sng" algn="ctr">
                       <a:solidFill>
                         <a:srgbClr val="D9E0E6"/>
@@ -5318,7 +3162,7 @@
                     <a:bodyPr/>
                     <a:lstStyle/>
                     <a:p>
-                      <a:pPr indent="0" marL="0">
+                      <a:pPr marL="0" indent="0">
                         <a:buNone/>
                       </a:pPr>
                       <a:r>
@@ -5339,7 +3183,7 @@
                       </a:endParaRPr>
                     </a:p>
                   </a:txBody>
-                  <a:tcPr marL="91440" marR="91440" marT="45720" marB="45720">
+                  <a:tcPr>
                     <a:lnL w="12700" cap="flat" cmpd="sng" algn="ctr">
                       <a:solidFill>
                         <a:srgbClr val="D9E0E6"/>
@@ -5386,7 +3230,7 @@
                     <a:bodyPr/>
                     <a:lstStyle/>
                     <a:p>
-                      <a:pPr indent="0" marL="0">
+                      <a:pPr marL="0" indent="0">
                         <a:buNone/>
                       </a:pPr>
                       <a:r>
@@ -5407,7 +3251,7 @@
                       </a:endParaRPr>
                     </a:p>
                   </a:txBody>
-                  <a:tcPr marL="91440" marR="91440" marT="45720" marB="45720">
+                  <a:tcPr>
                     <a:lnL w="12700" cap="flat" cmpd="sng" algn="ctr">
                       <a:solidFill>
                         <a:srgbClr val="D9E0E6"/>
@@ -5454,7 +3298,7 @@
                     <a:bodyPr/>
                     <a:lstStyle/>
                     <a:p>
-                      <a:pPr indent="0" marL="0">
+                      <a:pPr marL="0" indent="0">
                         <a:buNone/>
                       </a:pPr>
                       <a:r>
@@ -5475,7 +3319,7 @@
                       </a:endParaRPr>
                     </a:p>
                   </a:txBody>
-                  <a:tcPr marL="91440" marR="91440" marT="45720" marB="45720">
+                  <a:tcPr>
                     <a:lnL w="12700" cap="flat" cmpd="sng" algn="ctr">
                       <a:solidFill>
                         <a:srgbClr val="D9E0E6"/>
@@ -5522,7 +3366,7 @@
                     <a:bodyPr/>
                     <a:lstStyle/>
                     <a:p>
-                      <a:pPr indent="0" marL="0">
+                      <a:pPr marL="0" indent="0">
                         <a:buNone/>
                       </a:pPr>
                       <a:r>
@@ -5543,7 +3387,7 @@
                       </a:endParaRPr>
                     </a:p>
                   </a:txBody>
-                  <a:tcPr marL="91440" marR="91440" marT="45720" marB="45720">
+                  <a:tcPr>
                     <a:lnL w="12700" cap="flat" cmpd="sng" algn="ctr">
                       <a:solidFill>
                         <a:srgbClr val="D9E0E6"/>
@@ -5585,6 +3429,11 @@
                     </a:solidFill>
                   </a:tcPr>
                 </a:tc>
+                <a:extLst>
+                  <a:ext uri="{0D108BD9-81ED-4DB2-BD59-A6C34878D82A}">
+                    <a16:rowId xmlns:a16="http://schemas.microsoft.com/office/drawing/2014/main" val="10001"/>
+                  </a:ext>
+                </a:extLst>
               </a:tr>
               <a:tr h="384048">
                 <a:tc>
@@ -5592,7 +3441,7 @@
                     <a:bodyPr/>
                     <a:lstStyle/>
                     <a:p>
-                      <a:pPr indent="0" marL="0">
+                      <a:pPr marL="0" indent="0">
                         <a:buNone/>
                       </a:pPr>
                       <a:r>
@@ -5613,7 +3462,7 @@
                       </a:endParaRPr>
                     </a:p>
                   </a:txBody>
-                  <a:tcPr marL="91440" marR="91440" marT="45720" marB="45720">
+                  <a:tcPr>
                     <a:lnL w="12700" cap="flat" cmpd="sng" algn="ctr">
                       <a:solidFill>
                         <a:srgbClr val="D9E0E6"/>
@@ -5660,7 +3509,7 @@
                     <a:bodyPr/>
                     <a:lstStyle/>
                     <a:p>
-                      <a:pPr indent="0" marL="0">
+                      <a:pPr marL="0" indent="0">
                         <a:buNone/>
                       </a:pPr>
                       <a:r>
@@ -5681,7 +3530,7 @@
                       </a:endParaRPr>
                     </a:p>
                   </a:txBody>
-                  <a:tcPr marL="91440" marR="91440" marT="45720" marB="45720">
+                  <a:tcPr>
                     <a:lnL w="12700" cap="flat" cmpd="sng" algn="ctr">
                       <a:solidFill>
                         <a:srgbClr val="D9E0E6"/>
@@ -5728,7 +3577,7 @@
                     <a:bodyPr/>
                     <a:lstStyle/>
                     <a:p>
-                      <a:pPr indent="0" marL="0">
+                      <a:pPr marL="0" indent="0">
                         <a:buNone/>
                       </a:pPr>
                       <a:r>
@@ -5749,7 +3598,7 @@
                       </a:endParaRPr>
                     </a:p>
                   </a:txBody>
-                  <a:tcPr marL="91440" marR="91440" marT="45720" marB="45720">
+                  <a:tcPr>
                     <a:lnL w="12700" cap="flat" cmpd="sng" algn="ctr">
                       <a:solidFill>
                         <a:srgbClr val="D9E0E6"/>
@@ -5796,7 +3645,7 @@
                     <a:bodyPr/>
                     <a:lstStyle/>
                     <a:p>
-                      <a:pPr indent="0" marL="0">
+                      <a:pPr marL="0" indent="0">
                         <a:buNone/>
                       </a:pPr>
                       <a:r>
@@ -5817,7 +3666,7 @@
                       </a:endParaRPr>
                     </a:p>
                   </a:txBody>
-                  <a:tcPr marL="91440" marR="91440" marT="45720" marB="45720">
+                  <a:tcPr>
                     <a:lnL w="12700" cap="flat" cmpd="sng" algn="ctr">
                       <a:solidFill>
                         <a:srgbClr val="D9E0E6"/>
@@ -5864,7 +3713,7 @@
                     <a:bodyPr/>
                     <a:lstStyle/>
                     <a:p>
-                      <a:pPr indent="0" marL="0">
+                      <a:pPr marL="0" indent="0">
                         <a:buNone/>
                       </a:pPr>
                       <a:r>
@@ -5885,7 +3734,7 @@
                       </a:endParaRPr>
                     </a:p>
                   </a:txBody>
-                  <a:tcPr marL="91440" marR="91440" marT="45720" marB="45720">
+                  <a:tcPr>
                     <a:lnL w="12700" cap="flat" cmpd="sng" algn="ctr">
                       <a:solidFill>
                         <a:srgbClr val="D9E0E6"/>
@@ -5927,6 +3776,11 @@
                     </a:solidFill>
                   </a:tcPr>
                 </a:tc>
+                <a:extLst>
+                  <a:ext uri="{0D108BD9-81ED-4DB2-BD59-A6C34878D82A}">
+                    <a16:rowId xmlns:a16="http://schemas.microsoft.com/office/drawing/2014/main" val="10002"/>
+                  </a:ext>
+                </a:extLst>
               </a:tr>
               <a:tr h="384048">
                 <a:tc>
@@ -5934,7 +3788,7 @@
                     <a:bodyPr/>
                     <a:lstStyle/>
                     <a:p>
-                      <a:pPr indent="0" marL="0">
+                      <a:pPr marL="0" indent="0">
                         <a:buNone/>
                       </a:pPr>
                       <a:r>
@@ -5955,7 +3809,7 @@
                       </a:endParaRPr>
                     </a:p>
                   </a:txBody>
-                  <a:tcPr marL="91440" marR="91440" marT="45720" marB="45720">
+                  <a:tcPr>
                     <a:lnL w="12700" cap="flat" cmpd="sng" algn="ctr">
                       <a:solidFill>
                         <a:srgbClr val="D9E0E6"/>
@@ -6002,7 +3856,7 @@
                     <a:bodyPr/>
                     <a:lstStyle/>
                     <a:p>
-                      <a:pPr indent="0" marL="0">
+                      <a:pPr marL="0" indent="0">
                         <a:buNone/>
                       </a:pPr>
                       <a:r>
@@ -6023,7 +3877,7 @@
                       </a:endParaRPr>
                     </a:p>
                   </a:txBody>
-                  <a:tcPr marL="91440" marR="91440" marT="45720" marB="45720">
+                  <a:tcPr>
                     <a:lnL w="12700" cap="flat" cmpd="sng" algn="ctr">
                       <a:solidFill>
                         <a:srgbClr val="D9E0E6"/>
@@ -6070,7 +3924,7 @@
                     <a:bodyPr/>
                     <a:lstStyle/>
                     <a:p>
-                      <a:pPr indent="0" marL="0">
+                      <a:pPr marL="0" indent="0">
                         <a:buNone/>
                       </a:pPr>
                       <a:r>
@@ -6091,7 +3945,7 @@
                       </a:endParaRPr>
                     </a:p>
                   </a:txBody>
-                  <a:tcPr marL="91440" marR="91440" marT="45720" marB="45720">
+                  <a:tcPr>
                     <a:lnL w="12700" cap="flat" cmpd="sng" algn="ctr">
                       <a:solidFill>
                         <a:srgbClr val="D9E0E6"/>
@@ -6138,7 +3992,7 @@
                     <a:bodyPr/>
                     <a:lstStyle/>
                     <a:p>
-                      <a:pPr indent="0" marL="0">
+                      <a:pPr marL="0" indent="0">
                         <a:buNone/>
                       </a:pPr>
                       <a:r>
@@ -6159,7 +4013,7 @@
                       </a:endParaRPr>
                     </a:p>
                   </a:txBody>
-                  <a:tcPr marL="91440" marR="91440" marT="45720" marB="45720">
+                  <a:tcPr>
                     <a:lnL w="12700" cap="flat" cmpd="sng" algn="ctr">
                       <a:solidFill>
                         <a:srgbClr val="D9E0E6"/>
@@ -6206,7 +4060,7 @@
                     <a:bodyPr/>
                     <a:lstStyle/>
                     <a:p>
-                      <a:pPr indent="0" marL="0">
+                      <a:pPr marL="0" indent="0">
                         <a:buNone/>
                       </a:pPr>
                       <a:r>
@@ -6227,7 +4081,7 @@
                       </a:endParaRPr>
                     </a:p>
                   </a:txBody>
-                  <a:tcPr marL="91440" marR="91440" marT="45720" marB="45720">
+                  <a:tcPr>
                     <a:lnL w="12700" cap="flat" cmpd="sng" algn="ctr">
                       <a:solidFill>
                         <a:srgbClr val="D9E0E6"/>
@@ -6269,6 +4123,11 @@
                     </a:solidFill>
                   </a:tcPr>
                 </a:tc>
+                <a:extLst>
+                  <a:ext uri="{0D108BD9-81ED-4DB2-BD59-A6C34878D82A}">
+                    <a16:rowId xmlns:a16="http://schemas.microsoft.com/office/drawing/2014/main" val="10003"/>
+                  </a:ext>
+                </a:extLst>
               </a:tr>
               <a:tr h="384048">
                 <a:tc>
@@ -6276,7 +4135,7 @@
                     <a:bodyPr/>
                     <a:lstStyle/>
                     <a:p>
-                      <a:pPr indent="0" marL="0">
+                      <a:pPr marL="0" indent="0">
                         <a:buNone/>
                       </a:pPr>
                       <a:r>
@@ -6297,7 +4156,7 @@
                       </a:endParaRPr>
                     </a:p>
                   </a:txBody>
-                  <a:tcPr marL="91440" marR="91440" marT="45720" marB="45720">
+                  <a:tcPr>
                     <a:lnL w="12700" cap="flat" cmpd="sng" algn="ctr">
                       <a:solidFill>
                         <a:srgbClr val="D9E0E6"/>
@@ -6344,7 +4203,7 @@
                     <a:bodyPr/>
                     <a:lstStyle/>
                     <a:p>
-                      <a:pPr indent="0" marL="0">
+                      <a:pPr marL="0" indent="0">
                         <a:buNone/>
                       </a:pPr>
                       <a:r>
@@ -6365,7 +4224,7 @@
                       </a:endParaRPr>
                     </a:p>
                   </a:txBody>
-                  <a:tcPr marL="91440" marR="91440" marT="45720" marB="45720">
+                  <a:tcPr>
                     <a:lnL w="12700" cap="flat" cmpd="sng" algn="ctr">
                       <a:solidFill>
                         <a:srgbClr val="D9E0E6"/>
@@ -6412,7 +4271,7 @@
                     <a:bodyPr/>
                     <a:lstStyle/>
                     <a:p>
-                      <a:pPr indent="0" marL="0">
+                      <a:pPr marL="0" indent="0">
                         <a:buNone/>
                       </a:pPr>
                       <a:r>
@@ -6433,7 +4292,7 @@
                       </a:endParaRPr>
                     </a:p>
                   </a:txBody>
-                  <a:tcPr marL="91440" marR="91440" marT="45720" marB="45720">
+                  <a:tcPr>
                     <a:lnL w="12700" cap="flat" cmpd="sng" algn="ctr">
                       <a:solidFill>
                         <a:srgbClr val="D9E0E6"/>
@@ -6480,7 +4339,7 @@
                     <a:bodyPr/>
                     <a:lstStyle/>
                     <a:p>
-                      <a:pPr indent="0" marL="0">
+                      <a:pPr marL="0" indent="0">
                         <a:buNone/>
                       </a:pPr>
                       <a:r>
@@ -6501,7 +4360,7 @@
                       </a:endParaRPr>
                     </a:p>
                   </a:txBody>
-                  <a:tcPr marL="91440" marR="91440" marT="45720" marB="45720">
+                  <a:tcPr>
                     <a:lnL w="12700" cap="flat" cmpd="sng" algn="ctr">
                       <a:solidFill>
                         <a:srgbClr val="D9E0E6"/>
@@ -6548,7 +4407,7 @@
                     <a:bodyPr/>
                     <a:lstStyle/>
                     <a:p>
-                      <a:pPr indent="0" marL="0">
+                      <a:pPr marL="0" indent="0">
                         <a:buNone/>
                       </a:pPr>
                       <a:r>
@@ -6569,7 +4428,7 @@
                       </a:endParaRPr>
                     </a:p>
                   </a:txBody>
-                  <a:tcPr marL="91440" marR="91440" marT="45720" marB="45720">
+                  <a:tcPr>
                     <a:lnL w="12700" cap="flat" cmpd="sng" algn="ctr">
                       <a:solidFill>
                         <a:srgbClr val="D9E0E6"/>
@@ -6611,6 +4470,11 @@
                     </a:solidFill>
                   </a:tcPr>
                 </a:tc>
+                <a:extLst>
+                  <a:ext uri="{0D108BD9-81ED-4DB2-BD59-A6C34878D82A}">
+                    <a16:rowId xmlns:a16="http://schemas.microsoft.com/office/drawing/2014/main" val="10004"/>
+                  </a:ext>
+                </a:extLst>
               </a:tr>
               <a:tr h="384048">
                 <a:tc>
@@ -6618,7 +4482,7 @@
                     <a:bodyPr/>
                     <a:lstStyle/>
                     <a:p>
-                      <a:pPr indent="0" marL="0">
+                      <a:pPr marL="0" indent="0">
                         <a:buNone/>
                       </a:pPr>
                       <a:r>
@@ -6639,7 +4503,7 @@
                       </a:endParaRPr>
                     </a:p>
                   </a:txBody>
-                  <a:tcPr marL="91440" marR="91440" marT="45720" marB="45720">
+                  <a:tcPr>
                     <a:lnL w="12700" cap="flat" cmpd="sng" algn="ctr">
                       <a:solidFill>
                         <a:srgbClr val="D9E0E6"/>
@@ -6686,7 +4550,7 @@
                     <a:bodyPr/>
                     <a:lstStyle/>
                     <a:p>
-                      <a:pPr indent="0" marL="0">
+                      <a:pPr marL="0" indent="0">
                         <a:buNone/>
                       </a:pPr>
                       <a:r>
@@ -6707,7 +4571,7 @@
                       </a:endParaRPr>
                     </a:p>
                   </a:txBody>
-                  <a:tcPr marL="91440" marR="91440" marT="45720" marB="45720">
+                  <a:tcPr>
                     <a:lnL w="12700" cap="flat" cmpd="sng" algn="ctr">
                       <a:solidFill>
                         <a:srgbClr val="D9E0E6"/>
@@ -6754,7 +4618,7 @@
                     <a:bodyPr/>
                     <a:lstStyle/>
                     <a:p>
-                      <a:pPr indent="0" marL="0">
+                      <a:pPr marL="0" indent="0">
                         <a:buNone/>
                       </a:pPr>
                       <a:r>
@@ -6775,7 +4639,7 @@
                       </a:endParaRPr>
                     </a:p>
                   </a:txBody>
-                  <a:tcPr marL="91440" marR="91440" marT="45720" marB="45720">
+                  <a:tcPr>
                     <a:lnL w="12700" cap="flat" cmpd="sng" algn="ctr">
                       <a:solidFill>
                         <a:srgbClr val="D9E0E6"/>
@@ -6822,7 +4686,7 @@
                     <a:bodyPr/>
                     <a:lstStyle/>
                     <a:p>
-                      <a:pPr indent="0" marL="0">
+                      <a:pPr marL="0" indent="0">
                         <a:buNone/>
                       </a:pPr>
                       <a:r>
@@ -6843,7 +4707,7 @@
                       </a:endParaRPr>
                     </a:p>
                   </a:txBody>
-                  <a:tcPr marL="91440" marR="91440" marT="45720" marB="45720">
+                  <a:tcPr>
                     <a:lnL w="12700" cap="flat" cmpd="sng" algn="ctr">
                       <a:solidFill>
                         <a:srgbClr val="D9E0E6"/>
@@ -6890,7 +4754,7 @@
                     <a:bodyPr/>
                     <a:lstStyle/>
                     <a:p>
-                      <a:pPr indent="0" marL="0">
+                      <a:pPr marL="0" indent="0">
                         <a:buNone/>
                       </a:pPr>
                       <a:r>
@@ -6911,7 +4775,7 @@
                       </a:endParaRPr>
                     </a:p>
                   </a:txBody>
-                  <a:tcPr marL="91440" marR="91440" marT="45720" marB="45720">
+                  <a:tcPr>
                     <a:lnL w="12700" cap="flat" cmpd="sng" algn="ctr">
                       <a:solidFill>
                         <a:srgbClr val="D9E0E6"/>
@@ -6953,6 +4817,11 @@
                     </a:solidFill>
                   </a:tcPr>
                 </a:tc>
+                <a:extLst>
+                  <a:ext uri="{0D108BD9-81ED-4DB2-BD59-A6C34878D82A}">
+                    <a16:rowId xmlns:a16="http://schemas.microsoft.com/office/drawing/2014/main" val="10005"/>
+                  </a:ext>
+                </a:extLst>
               </a:tr>
             </a:tbl>
           </a:graphicData>
@@ -6984,6 +4853,13 @@
             <a:prstDash val="solid"/>
           </a:ln>
         </p:spPr>
+        <p:txBody>
+          <a:bodyPr/>
+          <a:lstStyle/>
+          <a:p>
+            <a:endParaRPr lang="en-US"/>
+          </a:p>
+        </p:txBody>
       </p:sp>
       <p:sp>
         <p:nvSpPr>
@@ -7006,7 +4882,7 @@
           <a:bodyPr wrap="square" lIns="0" tIns="0" rIns="0" bIns="0" rtlCol="0" anchor="ctr"/>
           <a:lstStyle/>
           <a:p>
-            <a:pPr indent="0" marL="0">
+            <a:pPr marL="0" indent="0">
               <a:buNone/>
             </a:pPr>
             <a:r>
@@ -7045,7 +4921,7 @@
           <a:bodyPr wrap="square" lIns="0" tIns="0" rIns="0" bIns="0" rtlCol="0" anchor="ctr"/>
           <a:lstStyle/>
           <a:p>
-            <a:pPr indent="0" marL="0">
+            <a:pPr marL="0" indent="0">
               <a:buNone/>
             </a:pPr>
             <a:r>
@@ -7079,6 +4955,7 @@
         <a:solidFill>
           <a:srgbClr val="FFFFFF"/>
         </a:solidFill>
+        <a:effectLst/>
       </p:bgPr>
     </p:bg>
     <p:spTree>
@@ -7116,11 +4993,11 @@
           <a:bodyPr wrap="square" lIns="0" tIns="0" rIns="0" bIns="0" rtlCol="0" anchor="ctr"/>
           <a:lstStyle/>
           <a:p>
-            <a:pPr indent="0" marL="0">
+            <a:pPr marL="0" indent="0">
               <a:buNone/>
             </a:pPr>
             <a:r>
-              <a:rPr lang="en-US" sz="1100" b="1" spc="160" kern="0" dirty="0">
+              <a:rPr lang="en-US" sz="1100" b="1" kern="0" spc="160" dirty="0">
                 <a:solidFill>
                   <a:srgbClr val="5C6B77"/>
                 </a:solidFill>
@@ -7155,7 +5032,7 @@
           <a:bodyPr wrap="square" lIns="0" tIns="0" rIns="0" bIns="0" rtlCol="0" anchor="ctr"/>
           <a:lstStyle/>
           <a:p>
-            <a:pPr indent="0" marL="0">
+            <a:pPr marL="0" indent="0">
               <a:buNone/>
             </a:pPr>
             <a:r>
@@ -7194,7 +5071,7 @@
           <a:bodyPr wrap="square" lIns="0" tIns="0" rIns="0" bIns="0" rtlCol="0" anchor="ctr"/>
           <a:lstStyle/>
           <a:p>
-            <a:pPr indent="0" marL="0">
+            <a:pPr marL="0" indent="0">
               <a:buNone/>
             </a:pPr>
             <a:r>
@@ -7233,7 +5110,7 @@
           <a:bodyPr wrap="square" lIns="0" tIns="0" rIns="0" bIns="0" rtlCol="0" anchor="ctr"/>
           <a:lstStyle/>
           <a:p>
-            <a:pPr indent="0" marL="0">
+            <a:pPr marL="0" indent="0">
               <a:lnSpc>
                 <a:spcPct val="125000"/>
               </a:lnSpc>
@@ -7253,7 +5130,7 @@
             <a:endParaRPr lang="en-US" sz="1300" dirty="0"/>
           </a:p>
           <a:p>
-            <a:pPr indent="0" marL="0">
+            <a:pPr marL="0" indent="0">
               <a:lnSpc>
                 <a:spcPct val="125000"/>
               </a:lnSpc>
@@ -7273,7 +5150,7 @@
             <a:endParaRPr lang="en-US" sz="1300" dirty="0"/>
           </a:p>
           <a:p>
-            <a:pPr indent="0" marL="0">
+            <a:pPr marL="0" indent="0">
               <a:lnSpc>
                 <a:spcPct val="125000"/>
               </a:lnSpc>
@@ -7293,7 +5170,7 @@
             <a:endParaRPr lang="en-US" sz="1300" dirty="0"/>
           </a:p>
           <a:p>
-            <a:pPr indent="0" marL="0">
+            <a:pPr marL="0" indent="0">
               <a:lnSpc>
                 <a:spcPct val="125000"/>
               </a:lnSpc>
@@ -7302,7 +5179,7 @@
             <a:endParaRPr lang="en-US" sz="1300" dirty="0"/>
           </a:p>
           <a:p>
-            <a:pPr indent="0" marL="0">
+            <a:pPr marL="0" indent="0">
               <a:lnSpc>
                 <a:spcPct val="125000"/>
               </a:lnSpc>
@@ -7322,7 +5199,7 @@
             <a:endParaRPr lang="en-US" sz="1300" dirty="0"/>
           </a:p>
           <a:p>
-            <a:pPr indent="0" marL="0">
+            <a:pPr marL="0" indent="0">
               <a:lnSpc>
                 <a:spcPct val="125000"/>
               </a:lnSpc>
@@ -7364,7 +5241,7 @@
           <a:bodyPr wrap="square" lIns="0" tIns="0" rIns="0" bIns="0" rtlCol="0" anchor="ctr"/>
           <a:lstStyle/>
           <a:p>
-            <a:pPr indent="0" marL="0">
+            <a:pPr marL="0" indent="0">
               <a:buNone/>
             </a:pPr>
             <a:r>
@@ -7403,7 +5280,7 @@
           <a:bodyPr wrap="square" lIns="0" tIns="0" rIns="0" bIns="0" rtlCol="0" anchor="ctr"/>
           <a:lstStyle/>
           <a:p>
-            <a:pPr indent="0" marL="0">
+            <a:pPr marL="0" indent="0">
               <a:buNone/>
             </a:pPr>
             <a:r>
@@ -7442,7 +5319,7 @@
           <a:bodyPr wrap="square" lIns="0" tIns="0" rIns="0" bIns="0" rtlCol="0" anchor="ctr"/>
           <a:lstStyle/>
           <a:p>
-            <a:pPr indent="0" marL="0">
+            <a:pPr marL="0" indent="0">
               <a:lnSpc>
                 <a:spcPct val="125000"/>
               </a:lnSpc>
@@ -7462,7 +5339,7 @@
             <a:endParaRPr lang="en-US" sz="1300" dirty="0"/>
           </a:p>
           <a:p>
-            <a:pPr indent="0" marL="0">
+            <a:pPr marL="0" indent="0">
               <a:lnSpc>
                 <a:spcPct val="125000"/>
               </a:lnSpc>
@@ -7471,7 +5348,7 @@
             <a:endParaRPr lang="en-US" sz="1300" dirty="0"/>
           </a:p>
           <a:p>
-            <a:pPr indent="0" marL="0">
+            <a:pPr marL="0" indent="0">
               <a:lnSpc>
                 <a:spcPct val="125000"/>
               </a:lnSpc>
@@ -7491,7 +5368,7 @@
             <a:endParaRPr lang="en-US" sz="1300" dirty="0"/>
           </a:p>
           <a:p>
-            <a:pPr indent="0" marL="0">
+            <a:pPr marL="0" indent="0">
               <a:lnSpc>
                 <a:spcPct val="125000"/>
               </a:lnSpc>
@@ -7511,7 +5388,7 @@
             <a:endParaRPr lang="en-US" sz="1300" dirty="0"/>
           </a:p>
           <a:p>
-            <a:pPr indent="0" marL="0">
+            <a:pPr marL="0" indent="0">
               <a:lnSpc>
                 <a:spcPct val="125000"/>
               </a:lnSpc>
@@ -7531,7 +5408,7 @@
             <a:endParaRPr lang="en-US" sz="1300" dirty="0"/>
           </a:p>
           <a:p>
-            <a:pPr indent="0" marL="0">
+            <a:pPr marL="0" indent="0">
               <a:lnSpc>
                 <a:spcPct val="125000"/>
               </a:lnSpc>
@@ -7573,7 +5450,7 @@
           <a:bodyPr wrap="square" lIns="0" tIns="0" rIns="0" bIns="0" rtlCol="0" anchor="ctr"/>
           <a:lstStyle/>
           <a:p>
-            <a:pPr indent="0" marL="0">
+            <a:pPr marL="0" indent="0">
               <a:buNone/>
             </a:pPr>
             <a:r>
@@ -7586,111 +5463,6 @@
                 <a:cs typeface="Calibri" pitchFamily="34" charset="-120"/>
               </a:rPr>
               <a:t>Tomcat's default is 200 threads. That is why /api at 1,000 rps is the cliff edge and /db is not — the database workloads never put enough requests in flight to matter.</a:t>
-            </a:r>
-            <a:endParaRPr lang="en-US" sz="1300" dirty="0"/>
-          </a:p>
-        </p:txBody>
-      </p:sp>
-      <p:sp>
-        <p:nvSpPr>
-          <p:cNvPr id="10" name="Shape 8"/>
-          <p:cNvSpPr/>
-          <p:nvPr/>
-        </p:nvSpPr>
-        <p:spPr>
-          <a:xfrm>
-            <a:off x="594360" y="5074920"/>
-            <a:ext cx="10972800" cy="1097280"/>
-          </a:xfrm>
-          <a:prstGeom prst="roundRect">
-            <a:avLst>
-              <a:gd name="adj" fmla="val 6667"/>
-            </a:avLst>
-          </a:prstGeom>
-          <a:solidFill>
-            <a:srgbClr val="F2F5F7"/>
-          </a:solidFill>
-          <a:ln w="12700">
-            <a:solidFill>
-              <a:srgbClr val="D9E0E6"/>
-            </a:solidFill>
-            <a:prstDash val="solid"/>
-          </a:ln>
-        </p:spPr>
-      </p:sp>
-      <p:sp>
-        <p:nvSpPr>
-          <p:cNvPr id="11" name="Text 9"/>
-          <p:cNvSpPr txBox="1"/>
-          <p:nvPr/>
-        </p:nvSpPr>
-        <p:spPr>
-          <a:xfrm>
-            <a:off x="886968" y="5230368"/>
-            <a:ext cx="10387584" cy="292608"/>
-          </a:xfrm>
-          <a:prstGeom prst="rect">
-            <a:avLst/>
-          </a:prstGeom>
-          <a:noFill/>
-          <a:ln/>
-        </p:spPr>
-        <p:txBody>
-          <a:bodyPr wrap="square" lIns="0" tIns="0" rIns="0" bIns="0" rtlCol="0" anchor="ctr"/>
-          <a:lstStyle/>
-          <a:p>
-            <a:pPr indent="0" marL="0">
-              <a:buNone/>
-            </a:pPr>
-            <a:r>
-              <a:rPr lang="en-US" sz="1400" b="1" dirty="0">
-                <a:solidFill>
-                  <a:srgbClr val="1F2933"/>
-                </a:solidFill>
-                <a:latin typeface="Calibri" pitchFamily="34" charset="0"/>
-                <a:ea typeface="Calibri" pitchFamily="34" charset="-122"/>
-                <a:cs typeface="Calibri" pitchFamily="34" charset="-120"/>
-              </a:rPr>
-              <a:t>Load was offered, not negotiated</a:t>
-            </a:r>
-            <a:endParaRPr lang="en-US" sz="1400" dirty="0"/>
-          </a:p>
-        </p:txBody>
-      </p:sp>
-      <p:sp>
-        <p:nvSpPr>
-          <p:cNvPr id="12" name="Text 10"/>
-          <p:cNvSpPr txBox="1"/>
-          <p:nvPr/>
-        </p:nvSpPr>
-        <p:spPr>
-          <a:xfrm>
-            <a:off x="886968" y="5550408"/>
-            <a:ext cx="10387584" cy="457200"/>
-          </a:xfrm>
-          <a:prstGeom prst="rect">
-            <a:avLst/>
-          </a:prstGeom>
-          <a:noFill/>
-          <a:ln/>
-        </p:spPr>
-        <p:txBody>
-          <a:bodyPr wrap="square" lIns="0" tIns="0" rIns="0" bIns="0" rtlCol="0" anchor="ctr"/>
-          <a:lstStyle/>
-          <a:p>
-            <a:pPr indent="0" marL="0">
-              <a:buNone/>
-            </a:pPr>
-            <a:r>
-              <a:rPr lang="en-US" sz="1300" dirty="0">
-                <a:solidFill>
-                  <a:srgbClr val="1F2933"/>
-                </a:solidFill>
-                <a:latin typeface="Calibri" pitchFamily="34" charset="0"/>
-                <a:ea typeface="Calibri" pitchFamily="34" charset="-122"/>
-                <a:cs typeface="Calibri" pitchFamily="34" charset="-120"/>
-              </a:rPr>
-              <a:t>k6 ran in open model at a fixed arrival rate. A closed-loop generator slows down when the system does, which hides exactly the saturation behaviour being measured.</a:t>
             </a:r>
             <a:endParaRPr lang="en-US" sz="1300" dirty="0"/>
           </a:p>
@@ -7712,6 +5484,7 @@
         <a:solidFill>
           <a:srgbClr val="FFFFFF"/>
         </a:solidFill>
+        <a:effectLst/>
       </p:bgPr>
     </p:bg>
     <p:spTree>
@@ -7749,11 +5522,11 @@
           <a:bodyPr wrap="square" lIns="0" tIns="0" rIns="0" bIns="0" rtlCol="0" anchor="ctr"/>
           <a:lstStyle/>
           <a:p>
-            <a:pPr indent="0" marL="0">
+            <a:pPr marL="0" indent="0">
               <a:buNone/>
             </a:pPr>
             <a:r>
-              <a:rPr lang="en-US" sz="1100" b="1" spc="160" kern="0" dirty="0">
+              <a:rPr lang="en-US" sz="1100" b="1" kern="0" spc="160" dirty="0">
                 <a:solidFill>
                   <a:srgbClr val="5C6B77"/>
                 </a:solidFill>
@@ -7788,7 +5561,7 @@
           <a:bodyPr wrap="square" lIns="0" tIns="0" rIns="0" bIns="0" rtlCol="0" anchor="ctr"/>
           <a:lstStyle/>
           <a:p>
-            <a:pPr indent="0" marL="0">
+            <a:pPr marL="0" indent="0">
               <a:buNone/>
             </a:pPr>
             <a:r>
@@ -7800,7 +5573,18 @@
                 <a:ea typeface="Cambria" pitchFamily="34" charset="-122"/>
                 <a:cs typeface="Cambria" pitchFamily="34" charset="-120"/>
               </a:rPr>
-              <a:t>Latency: the two candidates are indistinguishable</a:t>
+              <a:t>Latency: the two candidates are </a:t>
+            </a:r>
+            <a:r>
+              <a:rPr lang="en-US" sz="3000" b="1">
+                <a:solidFill>
+                  <a:srgbClr val="1F2933"/>
+                </a:solidFill>
+                <a:latin typeface="Cambria" pitchFamily="34" charset="0"/>
+                <a:ea typeface="Cambria" pitchFamily="34" charset="-122"/>
+                <a:cs typeface="Cambria" pitchFamily="34" charset="-120"/>
+              </a:rPr>
+              <a:t>almost identical</a:t>
             </a:r>
             <a:endParaRPr lang="en-US" sz="3000" dirty="0"/>
           </a:p>
@@ -7822,17 +5606,41 @@
         </p:nvGraphicFramePr>
         <p:xfrm>
           <a:off x="594360" y="1444752"/>
-          <a:ext cx="10972800" cy="914400"/>
+          <a:ext cx="10972800" cy="2414016"/>
         </p:xfrm>
         <a:graphic>
           <a:graphicData uri="http://schemas.openxmlformats.org/drawingml/2006/table">
             <a:tbl>
               <a:tblPr/>
               <a:tblGrid>
-                <a:gridCol w="3017520"/>
-                <a:gridCol w="2468880"/>
-                <a:gridCol w="2651760"/>
-                <a:gridCol w="2834640"/>
+                <a:gridCol w="3017520">
+                  <a:extLst>
+                    <a:ext uri="{9D8B030D-6E8A-4147-A177-3AD203B41FA5}">
+                      <a16:colId xmlns:a16="http://schemas.microsoft.com/office/drawing/2014/main" val="20000"/>
+                    </a:ext>
+                  </a:extLst>
+                </a:gridCol>
+                <a:gridCol w="2468880">
+                  <a:extLst>
+                    <a:ext uri="{9D8B030D-6E8A-4147-A177-3AD203B41FA5}">
+                      <a16:colId xmlns:a16="http://schemas.microsoft.com/office/drawing/2014/main" val="20001"/>
+                    </a:ext>
+                  </a:extLst>
+                </a:gridCol>
+                <a:gridCol w="2651760">
+                  <a:extLst>
+                    <a:ext uri="{9D8B030D-6E8A-4147-A177-3AD203B41FA5}">
+                      <a16:colId xmlns:a16="http://schemas.microsoft.com/office/drawing/2014/main" val="20002"/>
+                    </a:ext>
+                  </a:extLst>
+                </a:gridCol>
+                <a:gridCol w="2834640">
+                  <a:extLst>
+                    <a:ext uri="{9D8B030D-6E8A-4147-A177-3AD203B41FA5}">
+                      <a16:colId xmlns:a16="http://schemas.microsoft.com/office/drawing/2014/main" val="20003"/>
+                    </a:ext>
+                  </a:extLst>
+                </a:gridCol>
               </a:tblGrid>
               <a:tr h="402336">
                 <a:tc>
@@ -7840,7 +5648,7 @@
                     <a:bodyPr/>
                     <a:lstStyle/>
                     <a:p>
-                      <a:pPr algn="l" indent="0" marL="0">
+                      <a:pPr marL="0" indent="0" algn="l">
                         <a:buNone/>
                       </a:pPr>
                       <a:r>
@@ -7861,7 +5669,7 @@
                       </a:endParaRPr>
                     </a:p>
                   </a:txBody>
-                  <a:tcPr marL="91440" marR="91440" marT="45720" marB="45720">
+                  <a:tcPr>
                     <a:lnL w="12700" cap="flat" cmpd="sng" algn="ctr">
                       <a:solidFill>
                         <a:srgbClr val="D9E0E6"/>
@@ -7908,7 +5716,7 @@
                     <a:bodyPr/>
                     <a:lstStyle/>
                     <a:p>
-                      <a:pPr algn="ctr" indent="0" marL="0">
+                      <a:pPr marL="0" indent="0" algn="ctr">
                         <a:buNone/>
                       </a:pPr>
                       <a:r>
@@ -7929,7 +5737,7 @@
                       </a:endParaRPr>
                     </a:p>
                   </a:txBody>
-                  <a:tcPr marL="91440" marR="91440" marT="45720" marB="45720">
+                  <a:tcPr>
                     <a:lnL w="12700" cap="flat" cmpd="sng" algn="ctr">
                       <a:solidFill>
                         <a:srgbClr val="D9E0E6"/>
@@ -7976,7 +5784,7 @@
                     <a:bodyPr/>
                     <a:lstStyle/>
                     <a:p>
-                      <a:pPr algn="ctr" indent="0" marL="0">
+                      <a:pPr marL="0" indent="0" algn="ctr">
                         <a:buNone/>
                       </a:pPr>
                       <a:r>
@@ -7997,7 +5805,7 @@
                       </a:endParaRPr>
                     </a:p>
                   </a:txBody>
-                  <a:tcPr marL="91440" marR="91440" marT="45720" marB="45720">
+                  <a:tcPr>
                     <a:lnL w="12700" cap="flat" cmpd="sng" algn="ctr">
                       <a:solidFill>
                         <a:srgbClr val="D9E0E6"/>
@@ -8044,7 +5852,7 @@
                     <a:bodyPr/>
                     <a:lstStyle/>
                     <a:p>
-                      <a:pPr algn="ctr" indent="0" marL="0">
+                      <a:pPr marL="0" indent="0" algn="ctr">
                         <a:buNone/>
                       </a:pPr>
                       <a:r>
@@ -8065,7 +5873,7 @@
                       </a:endParaRPr>
                     </a:p>
                   </a:txBody>
-                  <a:tcPr marL="91440" marR="91440" marT="45720" marB="45720">
+                  <a:tcPr>
                     <a:lnL w="12700" cap="flat" cmpd="sng" algn="ctr">
                       <a:solidFill>
                         <a:srgbClr val="D9E0E6"/>
@@ -8107,6 +5915,11 @@
                     </a:solidFill>
                   </a:tcPr>
                 </a:tc>
+                <a:extLst>
+                  <a:ext uri="{0D108BD9-81ED-4DB2-BD59-A6C34878D82A}">
+                    <a16:rowId xmlns:a16="http://schemas.microsoft.com/office/drawing/2014/main" val="10000"/>
+                  </a:ext>
+                </a:extLst>
               </a:tr>
               <a:tr h="402336">
                 <a:tc>
@@ -8114,7 +5927,7 @@
                     <a:bodyPr/>
                     <a:lstStyle/>
                     <a:p>
-                      <a:pPr algn="l" indent="0" marL="0">
+                      <a:pPr marL="0" indent="0" algn="l">
                         <a:buNone/>
                       </a:pPr>
                       <a:r>
@@ -8135,7 +5948,7 @@
                       </a:endParaRPr>
                     </a:p>
                   </a:txBody>
-                  <a:tcPr marL="91440" marR="91440" marT="45720" marB="45720">
+                  <a:tcPr>
                     <a:lnL w="12700" cap="flat" cmpd="sng" algn="ctr">
                       <a:solidFill>
                         <a:srgbClr val="D9E0E6"/>
@@ -8182,7 +5995,7 @@
                     <a:bodyPr/>
                     <a:lstStyle/>
                     <a:p>
-                      <a:pPr algn="ctr" indent="0" marL="0">
+                      <a:pPr marL="0" indent="0" algn="ctr">
                         <a:buNone/>
                       </a:pPr>
                       <a:r>
@@ -8203,7 +6016,7 @@
                       </a:endParaRPr>
                     </a:p>
                   </a:txBody>
-                  <a:tcPr marL="91440" marR="91440" marT="45720" marB="45720">
+                  <a:tcPr>
                     <a:lnL w="12700" cap="flat" cmpd="sng" algn="ctr">
                       <a:solidFill>
                         <a:srgbClr val="D9E0E6"/>
@@ -8250,7 +6063,7 @@
                     <a:bodyPr/>
                     <a:lstStyle/>
                     <a:p>
-                      <a:pPr algn="ctr" indent="0" marL="0">
+                      <a:pPr marL="0" indent="0" algn="ctr">
                         <a:buNone/>
                       </a:pPr>
                       <a:r>
@@ -8271,7 +6084,7 @@
                       </a:endParaRPr>
                     </a:p>
                   </a:txBody>
-                  <a:tcPr marL="91440" marR="91440" marT="45720" marB="45720">
+                  <a:tcPr>
                     <a:lnL w="12700" cap="flat" cmpd="sng" algn="ctr">
                       <a:solidFill>
                         <a:srgbClr val="D9E0E6"/>
@@ -8318,7 +6131,7 @@
                     <a:bodyPr/>
                     <a:lstStyle/>
                     <a:p>
-                      <a:pPr algn="ctr" indent="0" marL="0">
+                      <a:pPr marL="0" indent="0" algn="ctr">
                         <a:buNone/>
                       </a:pPr>
                       <a:r>
@@ -8339,7 +6152,7 @@
                       </a:endParaRPr>
                     </a:p>
                   </a:txBody>
-                  <a:tcPr marL="91440" marR="91440" marT="45720" marB="45720">
+                  <a:tcPr>
                     <a:lnL w="12700" cap="flat" cmpd="sng" algn="ctr">
                       <a:solidFill>
                         <a:srgbClr val="D9E0E6"/>
@@ -8381,6 +6194,11 @@
                     </a:solidFill>
                   </a:tcPr>
                 </a:tc>
+                <a:extLst>
+                  <a:ext uri="{0D108BD9-81ED-4DB2-BD59-A6C34878D82A}">
+                    <a16:rowId xmlns:a16="http://schemas.microsoft.com/office/drawing/2014/main" val="10001"/>
+                  </a:ext>
+                </a:extLst>
               </a:tr>
               <a:tr h="402336">
                 <a:tc>
@@ -8388,7 +6206,7 @@
                     <a:bodyPr/>
                     <a:lstStyle/>
                     <a:p>
-                      <a:pPr algn="l" indent="0" marL="0">
+                      <a:pPr marL="0" indent="0" algn="l">
                         <a:buNone/>
                       </a:pPr>
                       <a:r>
@@ -8409,7 +6227,7 @@
                       </a:endParaRPr>
                     </a:p>
                   </a:txBody>
-                  <a:tcPr marL="91440" marR="91440" marT="45720" marB="45720">
+                  <a:tcPr>
                     <a:lnL w="12700" cap="flat" cmpd="sng" algn="ctr">
                       <a:solidFill>
                         <a:srgbClr val="D9E0E6"/>
@@ -8456,7 +6274,7 @@
                     <a:bodyPr/>
                     <a:lstStyle/>
                     <a:p>
-                      <a:pPr algn="ctr" indent="0" marL="0">
+                      <a:pPr marL="0" indent="0" algn="ctr">
                         <a:buNone/>
                       </a:pPr>
                       <a:r>
@@ -8477,7 +6295,7 @@
                       </a:endParaRPr>
                     </a:p>
                   </a:txBody>
-                  <a:tcPr marL="91440" marR="91440" marT="45720" marB="45720">
+                  <a:tcPr>
                     <a:lnL w="12700" cap="flat" cmpd="sng" algn="ctr">
                       <a:solidFill>
                         <a:srgbClr val="D9E0E6"/>
@@ -8524,7 +6342,7 @@
                     <a:bodyPr/>
                     <a:lstStyle/>
                     <a:p>
-                      <a:pPr algn="ctr" indent="0" marL="0">
+                      <a:pPr marL="0" indent="0" algn="ctr">
                         <a:buNone/>
                       </a:pPr>
                       <a:r>
@@ -8545,7 +6363,7 @@
                       </a:endParaRPr>
                     </a:p>
                   </a:txBody>
-                  <a:tcPr marL="91440" marR="91440" marT="45720" marB="45720">
+                  <a:tcPr>
                     <a:lnL w="12700" cap="flat" cmpd="sng" algn="ctr">
                       <a:solidFill>
                         <a:srgbClr val="D9E0E6"/>
@@ -8592,7 +6410,7 @@
                     <a:bodyPr/>
                     <a:lstStyle/>
                     <a:p>
-                      <a:pPr algn="ctr" indent="0" marL="0">
+                      <a:pPr marL="0" indent="0" algn="ctr">
                         <a:buNone/>
                       </a:pPr>
                       <a:r>
@@ -8613,7 +6431,7 @@
                       </a:endParaRPr>
                     </a:p>
                   </a:txBody>
-                  <a:tcPr marL="91440" marR="91440" marT="45720" marB="45720">
+                  <a:tcPr>
                     <a:lnL w="12700" cap="flat" cmpd="sng" algn="ctr">
                       <a:solidFill>
                         <a:srgbClr val="D9E0E6"/>
@@ -8655,6 +6473,11 @@
                     </a:solidFill>
                   </a:tcPr>
                 </a:tc>
+                <a:extLst>
+                  <a:ext uri="{0D108BD9-81ED-4DB2-BD59-A6C34878D82A}">
+                    <a16:rowId xmlns:a16="http://schemas.microsoft.com/office/drawing/2014/main" val="10002"/>
+                  </a:ext>
+                </a:extLst>
               </a:tr>
               <a:tr h="402336">
                 <a:tc>
@@ -8662,7 +6485,7 @@
                     <a:bodyPr/>
                     <a:lstStyle/>
                     <a:p>
-                      <a:pPr algn="l" indent="0" marL="0">
+                      <a:pPr marL="0" indent="0" algn="l">
                         <a:buNone/>
                       </a:pPr>
                       <a:r>
@@ -8683,7 +6506,7 @@
                       </a:endParaRPr>
                     </a:p>
                   </a:txBody>
-                  <a:tcPr marL="91440" marR="91440" marT="45720" marB="45720">
+                  <a:tcPr>
                     <a:lnL w="12700" cap="flat" cmpd="sng" algn="ctr">
                       <a:solidFill>
                         <a:srgbClr val="D9E0E6"/>
@@ -8730,7 +6553,7 @@
                     <a:bodyPr/>
                     <a:lstStyle/>
                     <a:p>
-                      <a:pPr algn="ctr" indent="0" marL="0">
+                      <a:pPr marL="0" indent="0" algn="ctr">
                         <a:buNone/>
                       </a:pPr>
                       <a:r>
@@ -8751,7 +6574,7 @@
                       </a:endParaRPr>
                     </a:p>
                   </a:txBody>
-                  <a:tcPr marL="91440" marR="91440" marT="45720" marB="45720">
+                  <a:tcPr>
                     <a:lnL w="12700" cap="flat" cmpd="sng" algn="ctr">
                       <a:solidFill>
                         <a:srgbClr val="D9E0E6"/>
@@ -8798,7 +6621,7 @@
                     <a:bodyPr/>
                     <a:lstStyle/>
                     <a:p>
-                      <a:pPr algn="ctr" indent="0" marL="0">
+                      <a:pPr marL="0" indent="0" algn="ctr">
                         <a:buNone/>
                       </a:pPr>
                       <a:r>
@@ -8819,7 +6642,7 @@
                       </a:endParaRPr>
                     </a:p>
                   </a:txBody>
-                  <a:tcPr marL="91440" marR="91440" marT="45720" marB="45720">
+                  <a:tcPr>
                     <a:lnL w="12700" cap="flat" cmpd="sng" algn="ctr">
                       <a:solidFill>
                         <a:srgbClr val="D9E0E6"/>
@@ -8866,7 +6689,7 @@
                     <a:bodyPr/>
                     <a:lstStyle/>
                     <a:p>
-                      <a:pPr algn="ctr" indent="0" marL="0">
+                      <a:pPr marL="0" indent="0" algn="ctr">
                         <a:buNone/>
                       </a:pPr>
                       <a:r>
@@ -8887,7 +6710,7 @@
                       </a:endParaRPr>
                     </a:p>
                   </a:txBody>
-                  <a:tcPr marL="91440" marR="91440" marT="45720" marB="45720">
+                  <a:tcPr>
                     <a:lnL w="12700" cap="flat" cmpd="sng" algn="ctr">
                       <a:solidFill>
                         <a:srgbClr val="D9E0E6"/>
@@ -8929,6 +6752,11 @@
                     </a:solidFill>
                   </a:tcPr>
                 </a:tc>
+                <a:extLst>
+                  <a:ext uri="{0D108BD9-81ED-4DB2-BD59-A6C34878D82A}">
+                    <a16:rowId xmlns:a16="http://schemas.microsoft.com/office/drawing/2014/main" val="10003"/>
+                  </a:ext>
+                </a:extLst>
               </a:tr>
               <a:tr h="402336">
                 <a:tc>
@@ -8936,7 +6764,7 @@
                     <a:bodyPr/>
                     <a:lstStyle/>
                     <a:p>
-                      <a:pPr algn="l" indent="0" marL="0">
+                      <a:pPr marL="0" indent="0" algn="l">
                         <a:buNone/>
                       </a:pPr>
                       <a:r>
@@ -8957,7 +6785,7 @@
                       </a:endParaRPr>
                     </a:p>
                   </a:txBody>
-                  <a:tcPr marL="91440" marR="91440" marT="45720" marB="45720">
+                  <a:tcPr>
                     <a:lnL w="12700" cap="flat" cmpd="sng" algn="ctr">
                       <a:solidFill>
                         <a:srgbClr val="D9E0E6"/>
@@ -9004,7 +6832,7 @@
                     <a:bodyPr/>
                     <a:lstStyle/>
                     <a:p>
-                      <a:pPr algn="ctr" indent="0" marL="0">
+                      <a:pPr marL="0" indent="0" algn="ctr">
                         <a:buNone/>
                       </a:pPr>
                       <a:r>
@@ -9025,7 +6853,7 @@
                       </a:endParaRPr>
                     </a:p>
                   </a:txBody>
-                  <a:tcPr marL="91440" marR="91440" marT="45720" marB="45720">
+                  <a:tcPr>
                     <a:lnL w="12700" cap="flat" cmpd="sng" algn="ctr">
                       <a:solidFill>
                         <a:srgbClr val="D9E0E6"/>
@@ -9072,7 +6900,7 @@
                     <a:bodyPr/>
                     <a:lstStyle/>
                     <a:p>
-                      <a:pPr algn="ctr" indent="0" marL="0">
+                      <a:pPr marL="0" indent="0" algn="ctr">
                         <a:buNone/>
                       </a:pPr>
                       <a:r>
@@ -9093,7 +6921,7 @@
                       </a:endParaRPr>
                     </a:p>
                   </a:txBody>
-                  <a:tcPr marL="91440" marR="91440" marT="45720" marB="45720">
+                  <a:tcPr>
                     <a:lnL w="12700" cap="flat" cmpd="sng" algn="ctr">
                       <a:solidFill>
                         <a:srgbClr val="D9E0E6"/>
@@ -9140,7 +6968,7 @@
                     <a:bodyPr/>
                     <a:lstStyle/>
                     <a:p>
-                      <a:pPr algn="ctr" indent="0" marL="0">
+                      <a:pPr marL="0" indent="0" algn="ctr">
                         <a:buNone/>
                       </a:pPr>
                       <a:r>
@@ -9161,7 +6989,7 @@
                       </a:endParaRPr>
                     </a:p>
                   </a:txBody>
-                  <a:tcPr marL="91440" marR="91440" marT="45720" marB="45720">
+                  <a:tcPr>
                     <a:lnL w="12700" cap="flat" cmpd="sng" algn="ctr">
                       <a:solidFill>
                         <a:srgbClr val="D9E0E6"/>
@@ -9203,6 +7031,11 @@
                     </a:solidFill>
                   </a:tcPr>
                 </a:tc>
+                <a:extLst>
+                  <a:ext uri="{0D108BD9-81ED-4DB2-BD59-A6C34878D82A}">
+                    <a16:rowId xmlns:a16="http://schemas.microsoft.com/office/drawing/2014/main" val="10004"/>
+                  </a:ext>
+                </a:extLst>
               </a:tr>
               <a:tr h="402336">
                 <a:tc>
@@ -9210,7 +7043,7 @@
                     <a:bodyPr/>
                     <a:lstStyle/>
                     <a:p>
-                      <a:pPr algn="l" indent="0" marL="0">
+                      <a:pPr marL="0" indent="0" algn="l">
                         <a:buNone/>
                       </a:pPr>
                       <a:r>
@@ -9231,7 +7064,7 @@
                       </a:endParaRPr>
                     </a:p>
                   </a:txBody>
-                  <a:tcPr marL="91440" marR="91440" marT="45720" marB="45720">
+                  <a:tcPr>
                     <a:lnL w="12700" cap="flat" cmpd="sng" algn="ctr">
                       <a:solidFill>
                         <a:srgbClr val="D9E0E6"/>
@@ -9278,7 +7111,7 @@
                     <a:bodyPr/>
                     <a:lstStyle/>
                     <a:p>
-                      <a:pPr algn="ctr" indent="0" marL="0">
+                      <a:pPr marL="0" indent="0" algn="ctr">
                         <a:buNone/>
                       </a:pPr>
                       <a:r>
@@ -9299,7 +7132,7 @@
                       </a:endParaRPr>
                     </a:p>
                   </a:txBody>
-                  <a:tcPr marL="91440" marR="91440" marT="45720" marB="45720">
+                  <a:tcPr>
                     <a:lnL w="12700" cap="flat" cmpd="sng" algn="ctr">
                       <a:solidFill>
                         <a:srgbClr val="D9E0E6"/>
@@ -9346,7 +7179,7 @@
                     <a:bodyPr/>
                     <a:lstStyle/>
                     <a:p>
-                      <a:pPr algn="ctr" indent="0" marL="0">
+                      <a:pPr marL="0" indent="0" algn="ctr">
                         <a:buNone/>
                       </a:pPr>
                       <a:r>
@@ -9367,7 +7200,7 @@
                       </a:endParaRPr>
                     </a:p>
                   </a:txBody>
-                  <a:tcPr marL="91440" marR="91440" marT="45720" marB="45720">
+                  <a:tcPr>
                     <a:lnL w="12700" cap="flat" cmpd="sng" algn="ctr">
                       <a:solidFill>
                         <a:srgbClr val="D9E0E6"/>
@@ -9414,7 +7247,7 @@
                     <a:bodyPr/>
                     <a:lstStyle/>
                     <a:p>
-                      <a:pPr algn="ctr" indent="0" marL="0">
+                      <a:pPr marL="0" indent="0" algn="ctr">
                         <a:buNone/>
                       </a:pPr>
                       <a:r>
@@ -9435,7 +7268,7 @@
                       </a:endParaRPr>
                     </a:p>
                   </a:txBody>
-                  <a:tcPr marL="91440" marR="91440" marT="45720" marB="45720">
+                  <a:tcPr>
                     <a:lnL w="12700" cap="flat" cmpd="sng" algn="ctr">
                       <a:solidFill>
                         <a:srgbClr val="D9E0E6"/>
@@ -9477,6 +7310,11 @@
                     </a:solidFill>
                   </a:tcPr>
                 </a:tc>
+                <a:extLst>
+                  <a:ext uri="{0D108BD9-81ED-4DB2-BD59-A6C34878D82A}">
+                    <a16:rowId xmlns:a16="http://schemas.microsoft.com/office/drawing/2014/main" val="10005"/>
+                  </a:ext>
+                </a:extLst>
               </a:tr>
             </a:tbl>
           </a:graphicData>
@@ -9503,7 +7341,7 @@
           <a:bodyPr wrap="square" lIns="0" tIns="0" rIns="0" bIns="0" rtlCol="0" anchor="ctr"/>
           <a:lstStyle/>
           <a:p>
-            <a:pPr indent="0" marL="0">
+            <a:pPr marL="0" indent="0">
               <a:buNone/>
             </a:pPr>
             <a:r>
@@ -9523,7 +7361,7 @@
       </p:sp>
       <p:sp>
         <p:nvSpPr>
-          <p:cNvPr id="6" name="Shape 3"/>
+          <p:cNvPr id="4" name="Shape 3"/>
           <p:cNvSpPr/>
           <p:nvPr/>
         </p:nvSpPr>
@@ -9547,6 +7385,13 @@
             <a:prstDash val="solid"/>
           </a:ln>
         </p:spPr>
+        <p:txBody>
+          <a:bodyPr/>
+          <a:lstStyle/>
+          <a:p>
+            <a:endParaRPr lang="en-US"/>
+          </a:p>
+        </p:txBody>
       </p:sp>
       <p:sp>
         <p:nvSpPr>
@@ -9569,7 +7414,7 @@
           <a:bodyPr wrap="square" lIns="0" tIns="0" rIns="0" bIns="0" rtlCol="0" anchor="ctr"/>
           <a:lstStyle/>
           <a:p>
-            <a:pPr indent="0" marL="0">
+            <a:pPr marL="0" indent="0">
               <a:buNone/>
             </a:pPr>
             <a:r>
@@ -9608,7 +7453,7 @@
           <a:bodyPr wrap="square" lIns="0" tIns="0" rIns="0" bIns="0" rtlCol="0" anchor="ctr"/>
           <a:lstStyle/>
           <a:p>
-            <a:pPr indent="0" marL="0">
+            <a:pPr marL="0" indent="0">
               <a:buNone/>
             </a:pPr>
             <a:r>
@@ -9642,6 +7487,7 @@
         <a:solidFill>
           <a:srgbClr val="FFFFFF"/>
         </a:solidFill>
+        <a:effectLst/>
       </p:bgPr>
     </p:bg>
     <p:spTree>
@@ -9679,11 +7525,11 @@
           <a:bodyPr wrap="square" lIns="0" tIns="0" rIns="0" bIns="0" rtlCol="0" anchor="ctr"/>
           <a:lstStyle/>
           <a:p>
-            <a:pPr indent="0" marL="0">
+            <a:pPr marL="0" indent="0">
               <a:buNone/>
             </a:pPr>
             <a:r>
-              <a:rPr lang="en-US" sz="1100" b="1" spc="160" kern="0" dirty="0">
+              <a:rPr lang="en-US" sz="1100" b="1" kern="0" spc="160" dirty="0">
                 <a:solidFill>
                   <a:srgbClr val="5C6B77"/>
                 </a:solidFill>
@@ -9718,7 +7564,7 @@
           <a:bodyPr wrap="square" lIns="0" tIns="0" rIns="0" bIns="0" rtlCol="0" anchor="ctr"/>
           <a:lstStyle/>
           <a:p>
-            <a:pPr indent="0" marL="0">
+            <a:pPr marL="0" indent="0">
               <a:buNone/>
             </a:pPr>
             <a:r>
@@ -9752,18 +7598,48 @@
         </p:nvGraphicFramePr>
         <p:xfrm>
           <a:off x="594360" y="1444752"/>
-          <a:ext cx="6858000" cy="914400"/>
+          <a:ext cx="6858000" cy="2011680"/>
         </p:xfrm>
         <a:graphic>
           <a:graphicData uri="http://schemas.openxmlformats.org/drawingml/2006/table">
             <a:tbl>
               <a:tblPr/>
               <a:tblGrid>
-                <a:gridCol w="2468880"/>
-                <a:gridCol w="1188720"/>
-                <a:gridCol w="1005840"/>
-                <a:gridCol w="1005840"/>
-                <a:gridCol w="1188720"/>
+                <a:gridCol w="2468880">
+                  <a:extLst>
+                    <a:ext uri="{9D8B030D-6E8A-4147-A177-3AD203B41FA5}">
+                      <a16:colId xmlns:a16="http://schemas.microsoft.com/office/drawing/2014/main" val="20000"/>
+                    </a:ext>
+                  </a:extLst>
+                </a:gridCol>
+                <a:gridCol w="1188720">
+                  <a:extLst>
+                    <a:ext uri="{9D8B030D-6E8A-4147-A177-3AD203B41FA5}">
+                      <a16:colId xmlns:a16="http://schemas.microsoft.com/office/drawing/2014/main" val="20001"/>
+                    </a:ext>
+                  </a:extLst>
+                </a:gridCol>
+                <a:gridCol w="1005840">
+                  <a:extLst>
+                    <a:ext uri="{9D8B030D-6E8A-4147-A177-3AD203B41FA5}">
+                      <a16:colId xmlns:a16="http://schemas.microsoft.com/office/drawing/2014/main" val="20002"/>
+                    </a:ext>
+                  </a:extLst>
+                </a:gridCol>
+                <a:gridCol w="1005840">
+                  <a:extLst>
+                    <a:ext uri="{9D8B030D-6E8A-4147-A177-3AD203B41FA5}">
+                      <a16:colId xmlns:a16="http://schemas.microsoft.com/office/drawing/2014/main" val="20003"/>
+                    </a:ext>
+                  </a:extLst>
+                </a:gridCol>
+                <a:gridCol w="1188720">
+                  <a:extLst>
+                    <a:ext uri="{9D8B030D-6E8A-4147-A177-3AD203B41FA5}">
+                      <a16:colId xmlns:a16="http://schemas.microsoft.com/office/drawing/2014/main" val="20004"/>
+                    </a:ext>
+                  </a:extLst>
+                </a:gridCol>
               </a:tblGrid>
               <a:tr h="402336">
                 <a:tc>
@@ -9771,7 +7647,7 @@
                     <a:bodyPr/>
                     <a:lstStyle/>
                     <a:p>
-                      <a:pPr algn="l" indent="0" marL="0">
+                      <a:pPr marL="0" indent="0" algn="l">
                         <a:buNone/>
                       </a:pPr>
                       <a:r>
@@ -9792,7 +7668,7 @@
                       </a:endParaRPr>
                     </a:p>
                   </a:txBody>
-                  <a:tcPr marL="91440" marR="91440" marT="45720" marB="45720">
+                  <a:tcPr>
                     <a:lnL w="12700" cap="flat" cmpd="sng" algn="ctr">
                       <a:solidFill>
                         <a:srgbClr val="D9E0E6"/>
@@ -9839,7 +7715,7 @@
                     <a:bodyPr/>
                     <a:lstStyle/>
                     <a:p>
-                      <a:pPr algn="r" indent="0" marL="0">
+                      <a:pPr marL="0" indent="0" algn="r">
                         <a:buNone/>
                       </a:pPr>
                       <a:r>
@@ -9860,7 +7736,7 @@
                       </a:endParaRPr>
                     </a:p>
                   </a:txBody>
-                  <a:tcPr marL="91440" marR="91440" marT="45720" marB="45720">
+                  <a:tcPr>
                     <a:lnL w="12700" cap="flat" cmpd="sng" algn="ctr">
                       <a:solidFill>
                         <a:srgbClr val="D9E0E6"/>
@@ -9907,7 +7783,7 @@
                     <a:bodyPr/>
                     <a:lstStyle/>
                     <a:p>
-                      <a:pPr algn="r" indent="0" marL="0">
+                      <a:pPr marL="0" indent="0" algn="r">
                         <a:buNone/>
                       </a:pPr>
                       <a:r>
@@ -9928,7 +7804,7 @@
                       </a:endParaRPr>
                     </a:p>
                   </a:txBody>
-                  <a:tcPr marL="91440" marR="91440" marT="45720" marB="45720">
+                  <a:tcPr>
                     <a:lnL w="12700" cap="flat" cmpd="sng" algn="ctr">
                       <a:solidFill>
                         <a:srgbClr val="D9E0E6"/>
@@ -9975,7 +7851,7 @@
                     <a:bodyPr/>
                     <a:lstStyle/>
                     <a:p>
-                      <a:pPr algn="r" indent="0" marL="0">
+                      <a:pPr marL="0" indent="0" algn="r">
                         <a:buNone/>
                       </a:pPr>
                       <a:r>
@@ -9996,7 +7872,7 @@
                       </a:endParaRPr>
                     </a:p>
                   </a:txBody>
-                  <a:tcPr marL="91440" marR="91440" marT="45720" marB="45720">
+                  <a:tcPr>
                     <a:lnL w="12700" cap="flat" cmpd="sng" algn="ctr">
                       <a:solidFill>
                         <a:srgbClr val="D9E0E6"/>
@@ -10043,7 +7919,7 @@
                     <a:bodyPr/>
                     <a:lstStyle/>
                     <a:p>
-                      <a:pPr algn="r" indent="0" marL="0">
+                      <a:pPr marL="0" indent="0" algn="r">
                         <a:buNone/>
                       </a:pPr>
                       <a:r>
@@ -10064,7 +7940,7 @@
                       </a:endParaRPr>
                     </a:p>
                   </a:txBody>
-                  <a:tcPr marL="91440" marR="91440" marT="45720" marB="45720">
+                  <a:tcPr>
                     <a:lnL w="12700" cap="flat" cmpd="sng" algn="ctr">
                       <a:solidFill>
                         <a:srgbClr val="D9E0E6"/>
@@ -10106,6 +7982,11 @@
                     </a:solidFill>
                   </a:tcPr>
                 </a:tc>
+                <a:extLst>
+                  <a:ext uri="{0D108BD9-81ED-4DB2-BD59-A6C34878D82A}">
+                    <a16:rowId xmlns:a16="http://schemas.microsoft.com/office/drawing/2014/main" val="10000"/>
+                  </a:ext>
+                </a:extLst>
               </a:tr>
               <a:tr h="402336">
                 <a:tc>
@@ -10113,7 +7994,7 @@
                     <a:bodyPr/>
                     <a:lstStyle/>
                     <a:p>
-                      <a:pPr algn="l" indent="0" marL="0">
+                      <a:pPr marL="0" indent="0" algn="l">
                         <a:buNone/>
                       </a:pPr>
                       <a:r>
@@ -10134,7 +8015,7 @@
                       </a:endParaRPr>
                     </a:p>
                   </a:txBody>
-                  <a:tcPr marL="91440" marR="91440" marT="45720" marB="45720">
+                  <a:tcPr>
                     <a:lnL w="12700" cap="flat" cmpd="sng" algn="ctr">
                       <a:solidFill>
                         <a:srgbClr val="D9E0E6"/>
@@ -10181,7 +8062,7 @@
                     <a:bodyPr/>
                     <a:lstStyle/>
                     <a:p>
-                      <a:pPr algn="r" indent="0" marL="0">
+                      <a:pPr marL="0" indent="0" algn="r">
                         <a:buNone/>
                       </a:pPr>
                       <a:r>
@@ -10202,7 +8083,7 @@
                       </a:endParaRPr>
                     </a:p>
                   </a:txBody>
-                  <a:tcPr marL="91440" marR="91440" marT="45720" marB="45720">
+                  <a:tcPr>
                     <a:lnL w="12700" cap="flat" cmpd="sng" algn="ctr">
                       <a:solidFill>
                         <a:srgbClr val="D9E0E6"/>
@@ -10249,7 +8130,7 @@
                     <a:bodyPr/>
                     <a:lstStyle/>
                     <a:p>
-                      <a:pPr algn="r" indent="0" marL="0">
+                      <a:pPr marL="0" indent="0" algn="r">
                         <a:buNone/>
                       </a:pPr>
                       <a:r>
@@ -10270,7 +8151,7 @@
                       </a:endParaRPr>
                     </a:p>
                   </a:txBody>
-                  <a:tcPr marL="91440" marR="91440" marT="45720" marB="45720">
+                  <a:tcPr>
                     <a:lnL w="12700" cap="flat" cmpd="sng" algn="ctr">
                       <a:solidFill>
                         <a:srgbClr val="D9E0E6"/>
@@ -10317,7 +8198,7 @@
                     <a:bodyPr/>
                     <a:lstStyle/>
                     <a:p>
-                      <a:pPr algn="r" indent="0" marL="0">
+                      <a:pPr marL="0" indent="0" algn="r">
                         <a:buNone/>
                       </a:pPr>
                       <a:r>
@@ -10338,7 +8219,7 @@
                       </a:endParaRPr>
                     </a:p>
                   </a:txBody>
-                  <a:tcPr marL="91440" marR="91440" marT="45720" marB="45720">
+                  <a:tcPr>
                     <a:lnL w="12700" cap="flat" cmpd="sng" algn="ctr">
                       <a:solidFill>
                         <a:srgbClr val="D9E0E6"/>
@@ -10385,7 +8266,7 @@
                     <a:bodyPr/>
                     <a:lstStyle/>
                     <a:p>
-                      <a:pPr algn="r" indent="0" marL="0">
+                      <a:pPr marL="0" indent="0" algn="r">
                         <a:buNone/>
                       </a:pPr>
                       <a:r>
@@ -10406,7 +8287,7 @@
                       </a:endParaRPr>
                     </a:p>
                   </a:txBody>
-                  <a:tcPr marL="91440" marR="91440" marT="45720" marB="45720">
+                  <a:tcPr>
                     <a:lnL w="12700" cap="flat" cmpd="sng" algn="ctr">
                       <a:solidFill>
                         <a:srgbClr val="D9E0E6"/>
@@ -10448,6 +8329,11 @@
                     </a:solidFill>
                   </a:tcPr>
                 </a:tc>
+                <a:extLst>
+                  <a:ext uri="{0D108BD9-81ED-4DB2-BD59-A6C34878D82A}">
+                    <a16:rowId xmlns:a16="http://schemas.microsoft.com/office/drawing/2014/main" val="10001"/>
+                  </a:ext>
+                </a:extLst>
               </a:tr>
               <a:tr h="402336">
                 <a:tc>
@@ -10455,7 +8341,7 @@
                     <a:bodyPr/>
                     <a:lstStyle/>
                     <a:p>
-                      <a:pPr algn="l" indent="0" marL="0">
+                      <a:pPr marL="0" indent="0" algn="l">
                         <a:buNone/>
                       </a:pPr>
                       <a:r>
@@ -10476,7 +8362,7 @@
                       </a:endParaRPr>
                     </a:p>
                   </a:txBody>
-                  <a:tcPr marL="91440" marR="91440" marT="45720" marB="45720">
+                  <a:tcPr>
                     <a:lnL w="12700" cap="flat" cmpd="sng" algn="ctr">
                       <a:solidFill>
                         <a:srgbClr val="D9E0E6"/>
@@ -10523,7 +8409,7 @@
                     <a:bodyPr/>
                     <a:lstStyle/>
                     <a:p>
-                      <a:pPr algn="r" indent="0" marL="0">
+                      <a:pPr marL="0" indent="0" algn="r">
                         <a:buNone/>
                       </a:pPr>
                       <a:r>
@@ -10544,7 +8430,7 @@
                       </a:endParaRPr>
                     </a:p>
                   </a:txBody>
-                  <a:tcPr marL="91440" marR="91440" marT="45720" marB="45720">
+                  <a:tcPr>
                     <a:lnL w="12700" cap="flat" cmpd="sng" algn="ctr">
                       <a:solidFill>
                         <a:srgbClr val="D9E0E6"/>
@@ -10591,7 +8477,7 @@
                     <a:bodyPr/>
                     <a:lstStyle/>
                     <a:p>
-                      <a:pPr algn="r" indent="0" marL="0">
+                      <a:pPr marL="0" indent="0" algn="r">
                         <a:buNone/>
                       </a:pPr>
                       <a:r>
@@ -10612,7 +8498,7 @@
                       </a:endParaRPr>
                     </a:p>
                   </a:txBody>
-                  <a:tcPr marL="91440" marR="91440" marT="45720" marB="45720">
+                  <a:tcPr>
                     <a:lnL w="12700" cap="flat" cmpd="sng" algn="ctr">
                       <a:solidFill>
                         <a:srgbClr val="D9E0E6"/>
@@ -10659,7 +8545,7 @@
                     <a:bodyPr/>
                     <a:lstStyle/>
                     <a:p>
-                      <a:pPr algn="r" indent="0" marL="0">
+                      <a:pPr marL="0" indent="0" algn="r">
                         <a:buNone/>
                       </a:pPr>
                       <a:r>
@@ -10680,7 +8566,7 @@
                       </a:endParaRPr>
                     </a:p>
                   </a:txBody>
-                  <a:tcPr marL="91440" marR="91440" marT="45720" marB="45720">
+                  <a:tcPr>
                     <a:lnL w="12700" cap="flat" cmpd="sng" algn="ctr">
                       <a:solidFill>
                         <a:srgbClr val="D9E0E6"/>
@@ -10727,7 +8613,7 @@
                     <a:bodyPr/>
                     <a:lstStyle/>
                     <a:p>
-                      <a:pPr algn="r" indent="0" marL="0">
+                      <a:pPr marL="0" indent="0" algn="r">
                         <a:buNone/>
                       </a:pPr>
                       <a:r>
@@ -10748,7 +8634,7 @@
                       </a:endParaRPr>
                     </a:p>
                   </a:txBody>
-                  <a:tcPr marL="91440" marR="91440" marT="45720" marB="45720">
+                  <a:tcPr>
                     <a:lnL w="12700" cap="flat" cmpd="sng" algn="ctr">
                       <a:solidFill>
                         <a:srgbClr val="D9E0E6"/>
@@ -10790,6 +8676,11 @@
                     </a:solidFill>
                   </a:tcPr>
                 </a:tc>
+                <a:extLst>
+                  <a:ext uri="{0D108BD9-81ED-4DB2-BD59-A6C34878D82A}">
+                    <a16:rowId xmlns:a16="http://schemas.microsoft.com/office/drawing/2014/main" val="10002"/>
+                  </a:ext>
+                </a:extLst>
               </a:tr>
               <a:tr h="402336">
                 <a:tc>
@@ -10797,7 +8688,7 @@
                     <a:bodyPr/>
                     <a:lstStyle/>
                     <a:p>
-                      <a:pPr algn="l" indent="0" marL="0">
+                      <a:pPr marL="0" indent="0" algn="l">
                         <a:buNone/>
                       </a:pPr>
                       <a:r>
@@ -10818,7 +8709,7 @@
                       </a:endParaRPr>
                     </a:p>
                   </a:txBody>
-                  <a:tcPr marL="91440" marR="91440" marT="45720" marB="45720">
+                  <a:tcPr>
                     <a:lnL w="12700" cap="flat" cmpd="sng" algn="ctr">
                       <a:solidFill>
                         <a:srgbClr val="D9E0E6"/>
@@ -10865,7 +8756,7 @@
                     <a:bodyPr/>
                     <a:lstStyle/>
                     <a:p>
-                      <a:pPr algn="r" indent="0" marL="0">
+                      <a:pPr marL="0" indent="0" algn="r">
                         <a:buNone/>
                       </a:pPr>
                       <a:r>
@@ -10886,7 +8777,7 @@
                       </a:endParaRPr>
                     </a:p>
                   </a:txBody>
-                  <a:tcPr marL="91440" marR="91440" marT="45720" marB="45720">
+                  <a:tcPr>
                     <a:lnL w="12700" cap="flat" cmpd="sng" algn="ctr">
                       <a:solidFill>
                         <a:srgbClr val="D9E0E6"/>
@@ -10933,7 +8824,7 @@
                     <a:bodyPr/>
                     <a:lstStyle/>
                     <a:p>
-                      <a:pPr algn="r" indent="0" marL="0">
+                      <a:pPr marL="0" indent="0" algn="r">
                         <a:buNone/>
                       </a:pPr>
                       <a:r>
@@ -10954,7 +8845,7 @@
                       </a:endParaRPr>
                     </a:p>
                   </a:txBody>
-                  <a:tcPr marL="91440" marR="91440" marT="45720" marB="45720">
+                  <a:tcPr>
                     <a:lnL w="12700" cap="flat" cmpd="sng" algn="ctr">
                       <a:solidFill>
                         <a:srgbClr val="D9E0E6"/>
@@ -11001,7 +8892,7 @@
                     <a:bodyPr/>
                     <a:lstStyle/>
                     <a:p>
-                      <a:pPr algn="r" indent="0" marL="0">
+                      <a:pPr marL="0" indent="0" algn="r">
                         <a:buNone/>
                       </a:pPr>
                       <a:r>
@@ -11022,7 +8913,7 @@
                       </a:endParaRPr>
                     </a:p>
                   </a:txBody>
-                  <a:tcPr marL="91440" marR="91440" marT="45720" marB="45720">
+                  <a:tcPr>
                     <a:lnL w="12700" cap="flat" cmpd="sng" algn="ctr">
                       <a:solidFill>
                         <a:srgbClr val="D9E0E6"/>
@@ -11069,7 +8960,7 @@
                     <a:bodyPr/>
                     <a:lstStyle/>
                     <a:p>
-                      <a:pPr algn="r" indent="0" marL="0">
+                      <a:pPr marL="0" indent="0" algn="r">
                         <a:buNone/>
                       </a:pPr>
                       <a:r>
@@ -11090,7 +8981,7 @@
                       </a:endParaRPr>
                     </a:p>
                   </a:txBody>
-                  <a:tcPr marL="91440" marR="91440" marT="45720" marB="45720">
+                  <a:tcPr>
                     <a:lnL w="12700" cap="flat" cmpd="sng" algn="ctr">
                       <a:solidFill>
                         <a:srgbClr val="D9E0E6"/>
@@ -11132,6 +9023,11 @@
                     </a:solidFill>
                   </a:tcPr>
                 </a:tc>
+                <a:extLst>
+                  <a:ext uri="{0D108BD9-81ED-4DB2-BD59-A6C34878D82A}">
+                    <a16:rowId xmlns:a16="http://schemas.microsoft.com/office/drawing/2014/main" val="10003"/>
+                  </a:ext>
+                </a:extLst>
               </a:tr>
               <a:tr h="402336">
                 <a:tc>
@@ -11139,7 +9035,7 @@
                     <a:bodyPr/>
                     <a:lstStyle/>
                     <a:p>
-                      <a:pPr algn="l" indent="0" marL="0">
+                      <a:pPr marL="0" indent="0" algn="l">
                         <a:buNone/>
                       </a:pPr>
                       <a:r>
@@ -11160,7 +9056,7 @@
                       </a:endParaRPr>
                     </a:p>
                   </a:txBody>
-                  <a:tcPr marL="91440" marR="91440" marT="45720" marB="45720">
+                  <a:tcPr>
                     <a:lnL w="12700" cap="flat" cmpd="sng" algn="ctr">
                       <a:solidFill>
                         <a:srgbClr val="D9E0E6"/>
@@ -11207,7 +9103,7 @@
                     <a:bodyPr/>
                     <a:lstStyle/>
                     <a:p>
-                      <a:pPr algn="r" indent="0" marL="0">
+                      <a:pPr marL="0" indent="0" algn="r">
                         <a:buNone/>
                       </a:pPr>
                       <a:r>
@@ -11228,7 +9124,7 @@
                       </a:endParaRPr>
                     </a:p>
                   </a:txBody>
-                  <a:tcPr marL="91440" marR="91440" marT="45720" marB="45720">
+                  <a:tcPr>
                     <a:lnL w="12700" cap="flat" cmpd="sng" algn="ctr">
                       <a:solidFill>
                         <a:srgbClr val="D9E0E6"/>
@@ -11275,7 +9171,7 @@
                     <a:bodyPr/>
                     <a:lstStyle/>
                     <a:p>
-                      <a:pPr algn="r" indent="0" marL="0">
+                      <a:pPr marL="0" indent="0" algn="r">
                         <a:buNone/>
                       </a:pPr>
                       <a:r>
@@ -11296,7 +9192,7 @@
                       </a:endParaRPr>
                     </a:p>
                   </a:txBody>
-                  <a:tcPr marL="91440" marR="91440" marT="45720" marB="45720">
+                  <a:tcPr>
                     <a:lnL w="12700" cap="flat" cmpd="sng" algn="ctr">
                       <a:solidFill>
                         <a:srgbClr val="D9E0E6"/>
@@ -11343,7 +9239,7 @@
                     <a:bodyPr/>
                     <a:lstStyle/>
                     <a:p>
-                      <a:pPr algn="r" indent="0" marL="0">
+                      <a:pPr marL="0" indent="0" algn="r">
                         <a:buNone/>
                       </a:pPr>
                       <a:r>
@@ -11364,7 +9260,7 @@
                       </a:endParaRPr>
                     </a:p>
                   </a:txBody>
-                  <a:tcPr marL="91440" marR="91440" marT="45720" marB="45720">
+                  <a:tcPr>
                     <a:lnL w="12700" cap="flat" cmpd="sng" algn="ctr">
                       <a:solidFill>
                         <a:srgbClr val="D9E0E6"/>
@@ -11411,7 +9307,7 @@
                     <a:bodyPr/>
                     <a:lstStyle/>
                     <a:p>
-                      <a:pPr algn="r" indent="0" marL="0">
+                      <a:pPr marL="0" indent="0" algn="r">
                         <a:buNone/>
                       </a:pPr>
                       <a:r>
@@ -11432,7 +9328,7 @@
                       </a:endParaRPr>
                     </a:p>
                   </a:txBody>
-                  <a:tcPr marL="91440" marR="91440" marT="45720" marB="45720">
+                  <a:tcPr>
                     <a:lnL w="12700" cap="flat" cmpd="sng" algn="ctr">
                       <a:solidFill>
                         <a:srgbClr val="D9E0E6"/>
@@ -11474,6 +9370,11 @@
                     </a:solidFill>
                   </a:tcPr>
                 </a:tc>
+                <a:extLst>
+                  <a:ext uri="{0D108BD9-81ED-4DB2-BD59-A6C34878D82A}">
+                    <a16:rowId xmlns:a16="http://schemas.microsoft.com/office/drawing/2014/main" val="10004"/>
+                  </a:ext>
+                </a:extLst>
               </a:tr>
             </a:tbl>
           </a:graphicData>
@@ -11500,7 +9401,7 @@
           <a:bodyPr wrap="square" lIns="0" tIns="0" rIns="0" bIns="0" rtlCol="0" anchor="ctr"/>
           <a:lstStyle/>
           <a:p>
-            <a:pPr indent="0" marL="0">
+            <a:pPr marL="0" indent="0">
               <a:buNone/>
             </a:pPr>
             <a:r>
@@ -11539,7 +9440,7 @@
           <a:bodyPr wrap="square" lIns="0" tIns="0" rIns="0" bIns="0" rtlCol="0" anchor="ctr"/>
           <a:lstStyle/>
           <a:p>
-            <a:pPr indent="0" marL="0">
+            <a:pPr marL="0" indent="0">
               <a:buNone/>
             </a:pPr>
             <a:r>
@@ -11559,7 +9460,7 @@
       </p:sp>
       <p:sp>
         <p:nvSpPr>
-          <p:cNvPr id="7" name="Text 4"/>
+          <p:cNvPr id="4" name="Text 4"/>
           <p:cNvSpPr txBox="1"/>
           <p:nvPr/>
         </p:nvSpPr>
@@ -11578,7 +9479,7 @@
           <a:bodyPr wrap="square" lIns="0" tIns="0" rIns="0" bIns="0" rtlCol="0" anchor="ctr"/>
           <a:lstStyle/>
           <a:p>
-            <a:pPr indent="0" marL="0">
+            <a:pPr marL="0" indent="0">
               <a:buNone/>
             </a:pPr>
             <a:r>
@@ -11617,7 +9518,7 @@
           <a:bodyPr wrap="square" lIns="0" tIns="0" rIns="0" bIns="0" rtlCol="0" anchor="ctr"/>
           <a:lstStyle/>
           <a:p>
-            <a:pPr indent="0" marL="0">
+            <a:pPr marL="0" indent="0">
               <a:buNone/>
             </a:pPr>
             <a:r>
@@ -11656,7 +9557,7 @@
           <a:bodyPr wrap="square" lIns="0" tIns="0" rIns="0" bIns="0" rtlCol="0" anchor="ctr"/>
           <a:lstStyle/>
           <a:p>
-            <a:pPr indent="0" marL="0">
+            <a:pPr marL="0" indent="0">
               <a:buNone/>
             </a:pPr>
             <a:r>
@@ -11695,7 +9596,7 @@
           <a:bodyPr wrap="square" lIns="0" tIns="0" rIns="0" bIns="0" rtlCol="0" anchor="ctr"/>
           <a:lstStyle/>
           <a:p>
-            <a:pPr indent="0" marL="0">
+            <a:pPr marL="0" indent="0">
               <a:buNone/>
             </a:pPr>
             <a:r>
@@ -11734,7 +9635,7 @@
           <a:bodyPr wrap="square" lIns="0" tIns="0" rIns="0" bIns="0" rtlCol="0" anchor="ctr"/>
           <a:lstStyle/>
           <a:p>
-            <a:pPr indent="0" marL="0">
+            <a:pPr marL="0" indent="0">
               <a:buNone/>
             </a:pPr>
             <a:r>
@@ -11773,7 +9674,7 @@
           <a:bodyPr wrap="square" lIns="0" tIns="0" rIns="0" bIns="0" rtlCol="0" anchor="ctr"/>
           <a:lstStyle/>
           <a:p>
-            <a:pPr indent="0" marL="0">
+            <a:pPr marL="0" indent="0">
               <a:buNone/>
             </a:pPr>
             <a:r>
@@ -11788,111 +9689,6 @@
               <a:t>Heap sawtooths with GC; a single reading depends on where in the cycle it lands.</a:t>
             </a:r>
             <a:endParaRPr lang="en-US" sz="1200" dirty="0"/>
-          </a:p>
-        </p:txBody>
-      </p:sp>
-      <p:sp>
-        <p:nvSpPr>
-          <p:cNvPr id="13" name="Shape 10"/>
-          <p:cNvSpPr/>
-          <p:nvPr/>
-        </p:nvSpPr>
-        <p:spPr>
-          <a:xfrm>
-            <a:off x="594360" y="4142232"/>
-            <a:ext cx="6858000" cy="1463040"/>
-          </a:xfrm>
-          <a:prstGeom prst="roundRect">
-            <a:avLst>
-              <a:gd name="adj" fmla="val 5000"/>
-            </a:avLst>
-          </a:prstGeom>
-          <a:solidFill>
-            <a:srgbClr val="F2F5F7"/>
-          </a:solidFill>
-          <a:ln w="12700">
-            <a:solidFill>
-              <a:srgbClr val="D9E0E6"/>
-            </a:solidFill>
-            <a:prstDash val="solid"/>
-          </a:ln>
-        </p:spPr>
-      </p:sp>
-      <p:sp>
-        <p:nvSpPr>
-          <p:cNvPr id="14" name="Text 11"/>
-          <p:cNvSpPr txBox="1"/>
-          <p:nvPr/>
-        </p:nvSpPr>
-        <p:spPr>
-          <a:xfrm>
-            <a:off x="886968" y="4297680"/>
-            <a:ext cx="6272784" cy="292608"/>
-          </a:xfrm>
-          <a:prstGeom prst="rect">
-            <a:avLst/>
-          </a:prstGeom>
-          <a:noFill/>
-          <a:ln/>
-        </p:spPr>
-        <p:txBody>
-          <a:bodyPr wrap="square" lIns="0" tIns="0" rIns="0" bIns="0" rtlCol="0" anchor="ctr"/>
-          <a:lstStyle/>
-          <a:p>
-            <a:pPr indent="0" marL="0">
-              <a:buNone/>
-            </a:pPr>
-            <a:r>
-              <a:rPr lang="en-US" sz="1400" b="1" dirty="0">
-                <a:solidFill>
-                  <a:srgbClr val="1F2933"/>
-                </a:solidFill>
-                <a:latin typeface="Calibri" pitchFamily="34" charset="0"/>
-                <a:ea typeface="Calibri" pitchFamily="34" charset="-122"/>
-                <a:cs typeface="Calibri" pitchFamily="34" charset="-120"/>
-              </a:rPr>
-              <a:t>Memory differs far less than thread count suggests</a:t>
-            </a:r>
-            <a:endParaRPr lang="en-US" sz="1400" dirty="0"/>
-          </a:p>
-        </p:txBody>
-      </p:sp>
-      <p:sp>
-        <p:nvSpPr>
-          <p:cNvPr id="15" name="Text 12"/>
-          <p:cNvSpPr txBox="1"/>
-          <p:nvPr/>
-        </p:nvSpPr>
-        <p:spPr>
-          <a:xfrm>
-            <a:off x="886968" y="4617720"/>
-            <a:ext cx="6272784" cy="822960"/>
-          </a:xfrm>
-          <a:prstGeom prst="rect">
-            <a:avLst/>
-          </a:prstGeom>
-          <a:noFill/>
-          <a:ln/>
-        </p:spPr>
-        <p:txBody>
-          <a:bodyPr wrap="square" lIns="0" tIns="0" rIns="0" bIns="0" rtlCol="0" anchor="ctr"/>
-          <a:lstStyle/>
-          <a:p>
-            <a:pPr indent="0" marL="0">
-              <a:buNone/>
-            </a:pPr>
-            <a:r>
-              <a:rPr lang="en-US" sz="1300" dirty="0">
-                <a:solidFill>
-                  <a:srgbClr val="1F2933"/>
-                </a:solidFill>
-                <a:latin typeface="Calibri" pitchFamily="34" charset="0"/>
-                <a:ea typeface="Calibri" pitchFamily="34" charset="-122"/>
-                <a:cs typeface="Calibri" pitchFamily="34" charset="-120"/>
-              </a:rPr>
-              <a:t>15% RSS between WebFlux and virtual threads despite 6x the threads. A thread parked on a socket never touches most of its stack, so it costs address space rather than resident pages.</a:t>
-            </a:r>
-            <a:endParaRPr lang="en-US" sz="1300" dirty="0"/>
           </a:p>
         </p:txBody>
       </p:sp>
@@ -11912,6 +9708,7 @@
         <a:solidFill>
           <a:srgbClr val="FFFFFF"/>
         </a:solidFill>
+        <a:effectLst/>
       </p:bgPr>
     </p:bg>
     <p:spTree>
@@ -11949,11 +9746,11 @@
           <a:bodyPr wrap="square" lIns="0" tIns="0" rIns="0" bIns="0" rtlCol="0" anchor="ctr"/>
           <a:lstStyle/>
           <a:p>
-            <a:pPr indent="0" marL="0">
+            <a:pPr marL="0" indent="0">
               <a:buNone/>
             </a:pPr>
             <a:r>
-              <a:rPr lang="en-US" sz="1100" b="1" spc="160" kern="0" dirty="0">
+              <a:rPr lang="en-US" sz="1100" b="1" kern="0" spc="160" dirty="0">
                 <a:solidFill>
                   <a:srgbClr val="5C6B77"/>
                 </a:solidFill>
@@ -11988,7 +9785,7 @@
           <a:bodyPr wrap="square" lIns="0" tIns="0" rIns="0" bIns="0" rtlCol="0" anchor="ctr"/>
           <a:lstStyle/>
           <a:p>
-            <a:pPr indent="0" marL="0">
+            <a:pPr marL="0" indent="0">
               <a:buNone/>
             </a:pPr>
             <a:r>
@@ -12008,7 +9805,7 @@
       </p:sp>
       <p:graphicFrame>
         <p:nvGraphicFramePr>
-          <p:cNvPr id="4" name="Chart 0" descr=""/>
+          <p:cNvPr id="4" name="Chart 0"/>
           <p:cNvGraphicFramePr/>
           <p:nvPr/>
         </p:nvGraphicFramePr>
@@ -12016,9 +9813,9 @@
           <a:off x="594360" y="1444752"/>
           <a:ext cx="6858000" cy="3931920"/>
         </p:xfrm>
-        <a:graphic xmlns:a="http://schemas.openxmlformats.org/drawingml/2006/main">
+        <a:graphic>
           <a:graphicData uri="http://schemas.openxmlformats.org/drawingml/2006/chart">
-            <c:chart xmlns:c="http://schemas.openxmlformats.org/drawingml/2006/chart" r:id="rId1"/>
+            <c:chart xmlns:c="http://schemas.openxmlformats.org/drawingml/2006/chart" xmlns:r="http://schemas.openxmlformats.org/officeDocument/2006/relationships" r:id="rId3"/>
           </a:graphicData>
         </a:graphic>
       </p:graphicFrame>
@@ -12043,7 +9840,7 @@
           <a:bodyPr wrap="square" lIns="0" tIns="0" rIns="0" bIns="0" rtlCol="0" anchor="ctr"/>
           <a:lstStyle/>
           <a:p>
-            <a:pPr indent="0" marL="0">
+            <a:pPr marL="0" indent="0">
               <a:buNone/>
             </a:pPr>
             <a:r>
@@ -12082,7 +9879,7 @@
           <a:bodyPr wrap="square" lIns="0" tIns="0" rIns="0" bIns="0" rtlCol="0" anchor="ctr"/>
           <a:lstStyle/>
           <a:p>
-            <a:pPr indent="0" marL="0">
+            <a:pPr marL="0" indent="0">
               <a:buNone/>
             </a:pPr>
             <a:r>
@@ -12095,111 +9892,6 @@
                 <a:cs typeface="Calibri" pitchFamily="34" charset="-120"/>
               </a:rPr>
               <a:t>A virtual thread's stack is a heap object that grows and shrinks as it runs. A platform thread's stack is native memory outside -Xmx. A reactive request in flight is neither — it is a continuation object of a few hundred bytes.</a:t>
-            </a:r>
-            <a:endParaRPr lang="en-US" sz="1300" dirty="0"/>
-          </a:p>
-        </p:txBody>
-      </p:sp>
-      <p:sp>
-        <p:nvSpPr>
-          <p:cNvPr id="7" name="Shape 4"/>
-          <p:cNvSpPr/>
-          <p:nvPr/>
-        </p:nvSpPr>
-        <p:spPr>
-          <a:xfrm>
-            <a:off x="7818120" y="3410712"/>
-            <a:ext cx="3749040" cy="1965960"/>
-          </a:xfrm>
-          <a:prstGeom prst="roundRect">
-            <a:avLst>
-              <a:gd name="adj" fmla="val 3721"/>
-            </a:avLst>
-          </a:prstGeom>
-          <a:solidFill>
-            <a:srgbClr val="FDF3E7"/>
-          </a:solidFill>
-          <a:ln w="12700">
-            <a:solidFill>
-              <a:srgbClr val="F2D9BE"/>
-            </a:solidFill>
-            <a:prstDash val="solid"/>
-          </a:ln>
-        </p:spPr>
-      </p:sp>
-      <p:sp>
-        <p:nvSpPr>
-          <p:cNvPr id="8" name="Text 5"/>
-          <p:cNvSpPr txBox="1"/>
-          <p:nvPr/>
-        </p:nvSpPr>
-        <p:spPr>
-          <a:xfrm>
-            <a:off x="8110728" y="3566160"/>
-            <a:ext cx="3163824" cy="292608"/>
-          </a:xfrm>
-          <a:prstGeom prst="rect">
-            <a:avLst/>
-          </a:prstGeom>
-          <a:noFill/>
-          <a:ln/>
-        </p:spPr>
-        <p:txBody>
-          <a:bodyPr wrap="square" lIns="0" tIns="0" rIns="0" bIns="0" rtlCol="0" anchor="ctr"/>
-          <a:lstStyle/>
-          <a:p>
-            <a:pPr indent="0" marL="0">
-              <a:buNone/>
-            </a:pPr>
-            <a:r>
-              <a:rPr lang="en-US" sz="1400" b="1" dirty="0">
-                <a:solidFill>
-                  <a:srgbClr val="8A4B08"/>
-                </a:solidFill>
-                <a:latin typeface="Calibri" pitchFamily="34" charset="0"/>
-                <a:ea typeface="Calibri" pitchFamily="34" charset="-122"/>
-                <a:cs typeface="Calibri" pitchFamily="34" charset="-120"/>
-              </a:rPr>
-              <a:t>Two points, not a trend</a:t>
-            </a:r>
-            <a:endParaRPr lang="en-US" sz="1400" dirty="0"/>
-          </a:p>
-        </p:txBody>
-      </p:sp>
-      <p:sp>
-        <p:nvSpPr>
-          <p:cNvPr id="9" name="Text 6"/>
-          <p:cNvSpPr txBox="1"/>
-          <p:nvPr/>
-        </p:nvSpPr>
-        <p:spPr>
-          <a:xfrm>
-            <a:off x="8110728" y="3886200"/>
-            <a:ext cx="3163824" cy="1325880"/>
-          </a:xfrm>
-          <a:prstGeom prst="rect">
-            <a:avLst/>
-          </a:prstGeom>
-          <a:noFill/>
-          <a:ln/>
-        </p:spPr>
-        <p:txBody>
-          <a:bodyPr wrap="square" lIns="0" tIns="0" rIns="0" bIns="0" rtlCol="0" anchor="ctr"/>
-          <a:lstStyle/>
-          <a:p>
-            <a:pPr indent="0" marL="0">
-              <a:buNone/>
-            </a:pPr>
-            <a:r>
-              <a:rPr lang="en-US" sz="1300" dirty="0">
-                <a:solidFill>
-                  <a:srgbClr val="8A4B08"/>
-                </a:solidFill>
-                <a:latin typeface="Calibri" pitchFamily="34" charset="0"/>
-                <a:ea typeface="Calibri" pitchFamily="34" charset="-122"/>
-                <a:cs typeface="Calibri" pitchFamily="34" charset="-120"/>
-              </a:rPr>
-              <a:t>The shapes differ — roughly flat against roughly linear in concurrency — but extrapolating from two measurements is unsafe. This is the single most important thing for the AWS run to confirm.</a:t>
             </a:r>
             <a:endParaRPr lang="en-US" sz="1300" dirty="0"/>
           </a:p>
@@ -12221,6 +9913,7 @@
         <a:solidFill>
           <a:srgbClr val="FFFFFF"/>
         </a:solidFill>
+        <a:effectLst/>
       </p:bgPr>
     </p:bg>
     <p:spTree>
@@ -12258,11 +9951,11 @@
           <a:bodyPr wrap="square" lIns="0" tIns="0" rIns="0" bIns="0" rtlCol="0" anchor="ctr"/>
           <a:lstStyle/>
           <a:p>
-            <a:pPr indent="0" marL="0">
+            <a:pPr marL="0" indent="0">
               <a:buNone/>
             </a:pPr>
             <a:r>
-              <a:rPr lang="en-US" sz="1100" b="1" spc="160" kern="0" dirty="0">
+              <a:rPr lang="en-US" sz="1100" b="1" kern="0" spc="160" dirty="0">
                 <a:solidFill>
                   <a:srgbClr val="5C6B77"/>
                 </a:solidFill>
@@ -12297,7 +9990,7 @@
           <a:bodyPr wrap="square" lIns="0" tIns="0" rIns="0" bIns="0" rtlCol="0" anchor="ctr"/>
           <a:lstStyle/>
           <a:p>
-            <a:pPr indent="0" marL="0">
+            <a:pPr marL="0" indent="0">
               <a:buNone/>
             </a:pPr>
             <a:r>
@@ -12331,16 +10024,34 @@
         </p:nvGraphicFramePr>
         <p:xfrm>
           <a:off x="594360" y="1444752"/>
-          <a:ext cx="10972800" cy="914400"/>
+          <a:ext cx="10972800" cy="3072384"/>
         </p:xfrm>
         <a:graphic>
           <a:graphicData uri="http://schemas.openxmlformats.org/drawingml/2006/table">
             <a:tbl>
               <a:tblPr/>
               <a:tblGrid>
-                <a:gridCol w="2926080"/>
-                <a:gridCol w="4023360"/>
-                <a:gridCol w="4023360"/>
+                <a:gridCol w="2926080">
+                  <a:extLst>
+                    <a:ext uri="{9D8B030D-6E8A-4147-A177-3AD203B41FA5}">
+                      <a16:colId xmlns:a16="http://schemas.microsoft.com/office/drawing/2014/main" val="20000"/>
+                    </a:ext>
+                  </a:extLst>
+                </a:gridCol>
+                <a:gridCol w="4023360">
+                  <a:extLst>
+                    <a:ext uri="{9D8B030D-6E8A-4147-A177-3AD203B41FA5}">
+                      <a16:colId xmlns:a16="http://schemas.microsoft.com/office/drawing/2014/main" val="20001"/>
+                    </a:ext>
+                  </a:extLst>
+                </a:gridCol>
+                <a:gridCol w="4023360">
+                  <a:extLst>
+                    <a:ext uri="{9D8B030D-6E8A-4147-A177-3AD203B41FA5}">
+                      <a16:colId xmlns:a16="http://schemas.microsoft.com/office/drawing/2014/main" val="20002"/>
+                    </a:ext>
+                  </a:extLst>
+                </a:gridCol>
               </a:tblGrid>
               <a:tr h="384048">
                 <a:tc>
@@ -12348,7 +10059,7 @@
                     <a:bodyPr/>
                     <a:lstStyle/>
                     <a:p>
-                      <a:pPr algn="l" indent="0" marL="0">
+                      <a:pPr marL="0" indent="0" algn="l">
                         <a:buNone/>
                       </a:pPr>
                       <a:endParaRPr lang="en-US" sz="1300" dirty="0">
@@ -12358,7 +10069,7 @@
                       </a:endParaRPr>
                     </a:p>
                   </a:txBody>
-                  <a:tcPr marL="91440" marR="91440" marT="45720" marB="45720">
+                  <a:tcPr>
                     <a:lnL w="12700" cap="flat" cmpd="sng" algn="ctr">
                       <a:solidFill>
                         <a:srgbClr val="D9E0E6"/>
@@ -12405,7 +10116,7 @@
                     <a:bodyPr/>
                     <a:lstStyle/>
                     <a:p>
-                      <a:pPr algn="l" indent="0" marL="0">
+                      <a:pPr marL="0" indent="0" algn="l">
                         <a:buNone/>
                       </a:pPr>
                       <a:r>
@@ -12426,7 +10137,7 @@
                       </a:endParaRPr>
                     </a:p>
                   </a:txBody>
-                  <a:tcPr marL="91440" marR="91440" marT="45720" marB="45720">
+                  <a:tcPr>
                     <a:lnL w="12700" cap="flat" cmpd="sng" algn="ctr">
                       <a:solidFill>
                         <a:srgbClr val="D9E0E6"/>
@@ -12473,7 +10184,7 @@
                     <a:bodyPr/>
                     <a:lstStyle/>
                     <a:p>
-                      <a:pPr algn="l" indent="0" marL="0">
+                      <a:pPr marL="0" indent="0" algn="l">
                         <a:buNone/>
                       </a:pPr>
                       <a:r>
@@ -12494,7 +10205,7 @@
                       </a:endParaRPr>
                     </a:p>
                   </a:txBody>
-                  <a:tcPr marL="91440" marR="91440" marT="45720" marB="45720">
+                  <a:tcPr>
                     <a:lnL w="12700" cap="flat" cmpd="sng" algn="ctr">
                       <a:solidFill>
                         <a:srgbClr val="D9E0E6"/>
@@ -12536,6 +10247,11 @@
                     </a:solidFill>
                   </a:tcPr>
                 </a:tc>
+                <a:extLst>
+                  <a:ext uri="{0D108BD9-81ED-4DB2-BD59-A6C34878D82A}">
+                    <a16:rowId xmlns:a16="http://schemas.microsoft.com/office/drawing/2014/main" val="10000"/>
+                  </a:ext>
+                </a:extLst>
               </a:tr>
               <a:tr h="384048">
                 <a:tc>
@@ -12543,7 +10259,7 @@
                     <a:bodyPr/>
                     <a:lstStyle/>
                     <a:p>
-                      <a:pPr indent="0" marL="0">
+                      <a:pPr marL="0" indent="0">
                         <a:buNone/>
                       </a:pPr>
                       <a:r>
@@ -12564,7 +10280,7 @@
                       </a:endParaRPr>
                     </a:p>
                   </a:txBody>
-                  <a:tcPr marL="91440" marR="91440" marT="45720" marB="45720">
+                  <a:tcPr>
                     <a:lnL w="12700" cap="flat" cmpd="sng" algn="ctr">
                       <a:solidFill>
                         <a:srgbClr val="D9E0E6"/>
@@ -12611,7 +10327,7 @@
                     <a:bodyPr/>
                     <a:lstStyle/>
                     <a:p>
-                      <a:pPr indent="0" marL="0">
+                      <a:pPr marL="0" indent="0">
                         <a:buNone/>
                       </a:pPr>
                       <a:r>
@@ -12632,7 +10348,7 @@
                       </a:endParaRPr>
                     </a:p>
                   </a:txBody>
-                  <a:tcPr marL="91440" marR="91440" marT="45720" marB="45720">
+                  <a:tcPr>
                     <a:lnL w="12700" cap="flat" cmpd="sng" algn="ctr">
                       <a:solidFill>
                         <a:srgbClr val="D9E0E6"/>
@@ -12679,7 +10395,7 @@
                     <a:bodyPr/>
                     <a:lstStyle/>
                     <a:p>
-                      <a:pPr indent="0" marL="0">
+                      <a:pPr marL="0" indent="0">
                         <a:buNone/>
                       </a:pPr>
                       <a:r>
@@ -12700,7 +10416,7 @@
                       </a:endParaRPr>
                     </a:p>
                   </a:txBody>
-                  <a:tcPr marL="91440" marR="91440" marT="45720" marB="45720">
+                  <a:tcPr>
                     <a:lnL w="12700" cap="flat" cmpd="sng" algn="ctr">
                       <a:solidFill>
                         <a:srgbClr val="D9E0E6"/>
@@ -12742,6 +10458,11 @@
                     </a:solidFill>
                   </a:tcPr>
                 </a:tc>
+                <a:extLst>
+                  <a:ext uri="{0D108BD9-81ED-4DB2-BD59-A6C34878D82A}">
+                    <a16:rowId xmlns:a16="http://schemas.microsoft.com/office/drawing/2014/main" val="10001"/>
+                  </a:ext>
+                </a:extLst>
               </a:tr>
               <a:tr h="384048">
                 <a:tc>
@@ -12749,7 +10470,7 @@
                     <a:bodyPr/>
                     <a:lstStyle/>
                     <a:p>
-                      <a:pPr indent="0" marL="0">
+                      <a:pPr marL="0" indent="0">
                         <a:buNone/>
                       </a:pPr>
                       <a:r>
@@ -12770,7 +10491,7 @@
                       </a:endParaRPr>
                     </a:p>
                   </a:txBody>
-                  <a:tcPr marL="91440" marR="91440" marT="45720" marB="45720">
+                  <a:tcPr>
                     <a:lnL w="12700" cap="flat" cmpd="sng" algn="ctr">
                       <a:solidFill>
                         <a:srgbClr val="D9E0E6"/>
@@ -12817,7 +10538,7 @@
                     <a:bodyPr/>
                     <a:lstStyle/>
                     <a:p>
-                      <a:pPr indent="0" marL="0">
+                      <a:pPr marL="0" indent="0">
                         <a:buNone/>
                       </a:pPr>
                       <a:r>
@@ -12838,7 +10559,7 @@
                       </a:endParaRPr>
                     </a:p>
                   </a:txBody>
-                  <a:tcPr marL="91440" marR="91440" marT="45720" marB="45720">
+                  <a:tcPr>
                     <a:lnL w="12700" cap="flat" cmpd="sng" algn="ctr">
                       <a:solidFill>
                         <a:srgbClr val="D9E0E6"/>
@@ -12885,7 +10606,7 @@
                     <a:bodyPr/>
                     <a:lstStyle/>
                     <a:p>
-                      <a:pPr indent="0" marL="0">
+                      <a:pPr marL="0" indent="0">
                         <a:buNone/>
                       </a:pPr>
                       <a:r>
@@ -12906,7 +10627,7 @@
                       </a:endParaRPr>
                     </a:p>
                   </a:txBody>
-                  <a:tcPr marL="91440" marR="91440" marT="45720" marB="45720">
+                  <a:tcPr>
                     <a:lnL w="12700" cap="flat" cmpd="sng" algn="ctr">
                       <a:solidFill>
                         <a:srgbClr val="D9E0E6"/>
@@ -12948,6 +10669,11 @@
                     </a:solidFill>
                   </a:tcPr>
                 </a:tc>
+                <a:extLst>
+                  <a:ext uri="{0D108BD9-81ED-4DB2-BD59-A6C34878D82A}">
+                    <a16:rowId xmlns:a16="http://schemas.microsoft.com/office/drawing/2014/main" val="10002"/>
+                  </a:ext>
+                </a:extLst>
               </a:tr>
               <a:tr h="384048">
                 <a:tc>
@@ -12955,7 +10681,7 @@
                     <a:bodyPr/>
                     <a:lstStyle/>
                     <a:p>
-                      <a:pPr indent="0" marL="0">
+                      <a:pPr marL="0" indent="0">
                         <a:buNone/>
                       </a:pPr>
                       <a:r>
@@ -12976,7 +10702,7 @@
                       </a:endParaRPr>
                     </a:p>
                   </a:txBody>
-                  <a:tcPr marL="91440" marR="91440" marT="45720" marB="45720">
+                  <a:tcPr>
                     <a:lnL w="12700" cap="flat" cmpd="sng" algn="ctr">
                       <a:solidFill>
                         <a:srgbClr val="D9E0E6"/>
@@ -13023,7 +10749,7 @@
                     <a:bodyPr/>
                     <a:lstStyle/>
                     <a:p>
-                      <a:pPr indent="0" marL="0">
+                      <a:pPr marL="0" indent="0">
                         <a:buNone/>
                       </a:pPr>
                       <a:r>
@@ -13044,7 +10770,7 @@
                       </a:endParaRPr>
                     </a:p>
                   </a:txBody>
-                  <a:tcPr marL="91440" marR="91440" marT="45720" marB="45720">
+                  <a:tcPr>
                     <a:lnL w="12700" cap="flat" cmpd="sng" algn="ctr">
                       <a:solidFill>
                         <a:srgbClr val="D9E0E6"/>
@@ -13091,7 +10817,7 @@
                     <a:bodyPr/>
                     <a:lstStyle/>
                     <a:p>
-                      <a:pPr indent="0" marL="0">
+                      <a:pPr marL="0" indent="0">
                         <a:buNone/>
                       </a:pPr>
                       <a:r>
@@ -13112,7 +10838,7 @@
                       </a:endParaRPr>
                     </a:p>
                   </a:txBody>
-                  <a:tcPr marL="91440" marR="91440" marT="45720" marB="45720">
+                  <a:tcPr>
                     <a:lnL w="12700" cap="flat" cmpd="sng" algn="ctr">
                       <a:solidFill>
                         <a:srgbClr val="D9E0E6"/>
@@ -13154,6 +10880,11 @@
                     </a:solidFill>
                   </a:tcPr>
                 </a:tc>
+                <a:extLst>
+                  <a:ext uri="{0D108BD9-81ED-4DB2-BD59-A6C34878D82A}">
+                    <a16:rowId xmlns:a16="http://schemas.microsoft.com/office/drawing/2014/main" val="10003"/>
+                  </a:ext>
+                </a:extLst>
               </a:tr>
               <a:tr h="384048">
                 <a:tc>
@@ -13161,7 +10892,7 @@
                     <a:bodyPr/>
                     <a:lstStyle/>
                     <a:p>
-                      <a:pPr indent="0" marL="0">
+                      <a:pPr marL="0" indent="0">
                         <a:buNone/>
                       </a:pPr>
                       <a:r>
@@ -13182,7 +10913,7 @@
                       </a:endParaRPr>
                     </a:p>
                   </a:txBody>
-                  <a:tcPr marL="91440" marR="91440" marT="45720" marB="45720">
+                  <a:tcPr>
                     <a:lnL w="12700" cap="flat" cmpd="sng" algn="ctr">
                       <a:solidFill>
                         <a:srgbClr val="D9E0E6"/>
@@ -13229,7 +10960,7 @@
                     <a:bodyPr/>
                     <a:lstStyle/>
                     <a:p>
-                      <a:pPr indent="0" marL="0">
+                      <a:pPr marL="0" indent="0">
                         <a:buNone/>
                       </a:pPr>
                       <a:r>
@@ -13250,7 +10981,7 @@
                       </a:endParaRPr>
                     </a:p>
                   </a:txBody>
-                  <a:tcPr marL="91440" marR="91440" marT="45720" marB="45720">
+                  <a:tcPr>
                     <a:lnL w="12700" cap="flat" cmpd="sng" algn="ctr">
                       <a:solidFill>
                         <a:srgbClr val="D9E0E6"/>
@@ -13297,7 +11028,7 @@
                     <a:bodyPr/>
                     <a:lstStyle/>
                     <a:p>
-                      <a:pPr indent="0" marL="0">
+                      <a:pPr marL="0" indent="0">
                         <a:buNone/>
                       </a:pPr>
                       <a:r>
@@ -13318,7 +11049,7 @@
                       </a:endParaRPr>
                     </a:p>
                   </a:txBody>
-                  <a:tcPr marL="91440" marR="91440" marT="45720" marB="45720">
+                  <a:tcPr>
                     <a:lnL w="12700" cap="flat" cmpd="sng" algn="ctr">
                       <a:solidFill>
                         <a:srgbClr val="D9E0E6"/>
@@ -13360,6 +11091,11 @@
                     </a:solidFill>
                   </a:tcPr>
                 </a:tc>
+                <a:extLst>
+                  <a:ext uri="{0D108BD9-81ED-4DB2-BD59-A6C34878D82A}">
+                    <a16:rowId xmlns:a16="http://schemas.microsoft.com/office/drawing/2014/main" val="10004"/>
+                  </a:ext>
+                </a:extLst>
               </a:tr>
               <a:tr h="384048">
                 <a:tc>
@@ -13367,7 +11103,7 @@
                     <a:bodyPr/>
                     <a:lstStyle/>
                     <a:p>
-                      <a:pPr indent="0" marL="0">
+                      <a:pPr marL="0" indent="0">
                         <a:buNone/>
                       </a:pPr>
                       <a:r>
@@ -13388,7 +11124,7 @@
                       </a:endParaRPr>
                     </a:p>
                   </a:txBody>
-                  <a:tcPr marL="91440" marR="91440" marT="45720" marB="45720">
+                  <a:tcPr>
                     <a:lnL w="12700" cap="flat" cmpd="sng" algn="ctr">
                       <a:solidFill>
                         <a:srgbClr val="D9E0E6"/>
@@ -13435,7 +11171,7 @@
                     <a:bodyPr/>
                     <a:lstStyle/>
                     <a:p>
-                      <a:pPr indent="0" marL="0">
+                      <a:pPr marL="0" indent="0">
                         <a:buNone/>
                       </a:pPr>
                       <a:r>
@@ -13456,7 +11192,7 @@
                       </a:endParaRPr>
                     </a:p>
                   </a:txBody>
-                  <a:tcPr marL="91440" marR="91440" marT="45720" marB="45720">
+                  <a:tcPr>
                     <a:lnL w="12700" cap="flat" cmpd="sng" algn="ctr">
                       <a:solidFill>
                         <a:srgbClr val="D9E0E6"/>
@@ -13503,7 +11239,7 @@
                     <a:bodyPr/>
                     <a:lstStyle/>
                     <a:p>
-                      <a:pPr indent="0" marL="0">
+                      <a:pPr marL="0" indent="0">
                         <a:buNone/>
                       </a:pPr>
                       <a:r>
@@ -13524,7 +11260,7 @@
                       </a:endParaRPr>
                     </a:p>
                   </a:txBody>
-                  <a:tcPr marL="91440" marR="91440" marT="45720" marB="45720">
+                  <a:tcPr>
                     <a:lnL w="12700" cap="flat" cmpd="sng" algn="ctr">
                       <a:solidFill>
                         <a:srgbClr val="D9E0E6"/>
@@ -13566,6 +11302,11 @@
                     </a:solidFill>
                   </a:tcPr>
                 </a:tc>
+                <a:extLst>
+                  <a:ext uri="{0D108BD9-81ED-4DB2-BD59-A6C34878D82A}">
+                    <a16:rowId xmlns:a16="http://schemas.microsoft.com/office/drawing/2014/main" val="10005"/>
+                  </a:ext>
+                </a:extLst>
               </a:tr>
               <a:tr h="384048">
                 <a:tc>
@@ -13573,7 +11314,7 @@
                     <a:bodyPr/>
                     <a:lstStyle/>
                     <a:p>
-                      <a:pPr indent="0" marL="0">
+                      <a:pPr marL="0" indent="0">
                         <a:buNone/>
                       </a:pPr>
                       <a:r>
@@ -13594,7 +11335,7 @@
                       </a:endParaRPr>
                     </a:p>
                   </a:txBody>
-                  <a:tcPr marL="91440" marR="91440" marT="45720" marB="45720">
+                  <a:tcPr>
                     <a:lnL w="12700" cap="flat" cmpd="sng" algn="ctr">
                       <a:solidFill>
                         <a:srgbClr val="D9E0E6"/>
@@ -13641,7 +11382,7 @@
                     <a:bodyPr/>
                     <a:lstStyle/>
                     <a:p>
-                      <a:pPr indent="0" marL="0">
+                      <a:pPr marL="0" indent="0">
                         <a:buNone/>
                       </a:pPr>
                       <a:r>
@@ -13662,7 +11403,7 @@
                       </a:endParaRPr>
                     </a:p>
                   </a:txBody>
-                  <a:tcPr marL="91440" marR="91440" marT="45720" marB="45720">
+                  <a:tcPr>
                     <a:lnL w="12700" cap="flat" cmpd="sng" algn="ctr">
                       <a:solidFill>
                         <a:srgbClr val="D9E0E6"/>
@@ -13709,7 +11450,7 @@
                     <a:bodyPr/>
                     <a:lstStyle/>
                     <a:p>
-                      <a:pPr indent="0" marL="0">
+                      <a:pPr marL="0" indent="0">
                         <a:buNone/>
                       </a:pPr>
                       <a:r>
@@ -13730,7 +11471,7 @@
                       </a:endParaRPr>
                     </a:p>
                   </a:txBody>
-                  <a:tcPr marL="91440" marR="91440" marT="45720" marB="45720">
+                  <a:tcPr>
                     <a:lnL w="12700" cap="flat" cmpd="sng" algn="ctr">
                       <a:solidFill>
                         <a:srgbClr val="D9E0E6"/>
@@ -13772,6 +11513,11 @@
                     </a:solidFill>
                   </a:tcPr>
                 </a:tc>
+                <a:extLst>
+                  <a:ext uri="{0D108BD9-81ED-4DB2-BD59-A6C34878D82A}">
+                    <a16:rowId xmlns:a16="http://schemas.microsoft.com/office/drawing/2014/main" val="10006"/>
+                  </a:ext>
+                </a:extLst>
               </a:tr>
               <a:tr h="384048">
                 <a:tc>
@@ -13779,7 +11525,7 @@
                     <a:bodyPr/>
                     <a:lstStyle/>
                     <a:p>
-                      <a:pPr indent="0" marL="0">
+                      <a:pPr marL="0" indent="0">
                         <a:buNone/>
                       </a:pPr>
                       <a:r>
@@ -13800,7 +11546,7 @@
                       </a:endParaRPr>
                     </a:p>
                   </a:txBody>
-                  <a:tcPr marL="91440" marR="91440" marT="45720" marB="45720">
+                  <a:tcPr>
                     <a:lnL w="12700" cap="flat" cmpd="sng" algn="ctr">
                       <a:solidFill>
                         <a:srgbClr val="D9E0E6"/>
@@ -13847,7 +11593,7 @@
                     <a:bodyPr/>
                     <a:lstStyle/>
                     <a:p>
-                      <a:pPr indent="0" marL="0">
+                      <a:pPr marL="0" indent="0">
                         <a:buNone/>
                       </a:pPr>
                       <a:r>
@@ -13868,7 +11614,7 @@
                       </a:endParaRPr>
                     </a:p>
                   </a:txBody>
-                  <a:tcPr marL="91440" marR="91440" marT="45720" marB="45720">
+                  <a:tcPr>
                     <a:lnL w="12700" cap="flat" cmpd="sng" algn="ctr">
                       <a:solidFill>
                         <a:srgbClr val="D9E0E6"/>
@@ -13915,7 +11661,7 @@
                     <a:bodyPr/>
                     <a:lstStyle/>
                     <a:p>
-                      <a:pPr indent="0" marL="0">
+                      <a:pPr marL="0" indent="0">
                         <a:buNone/>
                       </a:pPr>
                       <a:r>
@@ -13936,7 +11682,7 @@
                       </a:endParaRPr>
                     </a:p>
                   </a:txBody>
-                  <a:tcPr marL="91440" marR="91440" marT="45720" marB="45720">
+                  <a:tcPr>
                     <a:lnL w="12700" cap="flat" cmpd="sng" algn="ctr">
                       <a:solidFill>
                         <a:srgbClr val="D9E0E6"/>
@@ -13978,6 +11724,11 @@
                     </a:solidFill>
                   </a:tcPr>
                 </a:tc>
+                <a:extLst>
+                  <a:ext uri="{0D108BD9-81ED-4DB2-BD59-A6C34878D82A}">
+                    <a16:rowId xmlns:a16="http://schemas.microsoft.com/office/drawing/2014/main" val="10007"/>
+                  </a:ext>
+                </a:extLst>
               </a:tr>
             </a:tbl>
           </a:graphicData>
@@ -14004,7 +11755,7 @@
           <a:bodyPr wrap="square" lIns="0" tIns="0" rIns="0" bIns="0" rtlCol="0" anchor="ctr"/>
           <a:lstStyle/>
           <a:p>
-            <a:pPr indent="0" marL="0">
+            <a:pPr marL="0" indent="0">
               <a:buNone/>
             </a:pPr>
             <a:r>
@@ -14032,12 +11783,13 @@
 
 <file path=ppt/slides/slide9.xml><?xml version="1.0" encoding="utf-8"?>
 <p:sld xmlns:a="http://schemas.openxmlformats.org/drawingml/2006/main" xmlns:r="http://schemas.openxmlformats.org/officeDocument/2006/relationships" xmlns:p="http://schemas.openxmlformats.org/presentationml/2006/main">
-  <p:cSld name="Slide 9">
+  <p:cSld name="Slide 12">
     <p:bg>
       <p:bgPr>
         <a:solidFill>
-          <a:srgbClr val="FFFFFF"/>
+          <a:srgbClr val="1F2933"/>
         </a:solidFill>
+        <a:effectLst/>
       </p:bgPr>
     </p:bg>
     <p:spTree>
@@ -14062,8 +11814,8 @@
         </p:nvSpPr>
         <p:spPr>
           <a:xfrm>
-            <a:off x="594360" y="347472"/>
-            <a:ext cx="10972800" cy="237744"/>
+            <a:off x="594360" y="502920"/>
+            <a:ext cx="10972800" cy="274320"/>
           </a:xfrm>
           <a:prstGeom prst="rect">
             <a:avLst/>
@@ -14075,21 +11827,21 @@
           <a:bodyPr wrap="square" lIns="0" tIns="0" rIns="0" bIns="0" rtlCol="0" anchor="ctr"/>
           <a:lstStyle/>
           <a:p>
-            <a:pPr indent="0" marL="0">
+            <a:pPr marL="0" indent="0">
               <a:buNone/>
             </a:pPr>
             <a:r>
-              <a:rPr lang="en-US" sz="1100" b="1" spc="160" kern="0" dirty="0">
+              <a:rPr lang="en-US" sz="1200" b="1" kern="0" spc="180" dirty="0">
                 <a:solidFill>
-                  <a:srgbClr val="5C6B77"/>
+                  <a:srgbClr val="8896A2"/>
                 </a:solidFill>
                 <a:latin typeface="Calibri" pitchFamily="34" charset="0"/>
                 <a:ea typeface="Calibri" pitchFamily="34" charset="-122"/>
                 <a:cs typeface="Calibri" pitchFamily="34" charset="-120"/>
               </a:rPr>
-              <a:t>CONFIDENCE</a:t>
+              <a:t>WHERE THIS LEAVES US</a:t>
             </a:r>
-            <a:endParaRPr lang="en-US" sz="1100" dirty="0"/>
+            <a:endParaRPr lang="en-US" sz="1200" dirty="0"/>
           </a:p>
         </p:txBody>
       </p:sp>
@@ -14101,8 +11853,8 @@
         </p:nvSpPr>
         <p:spPr>
           <a:xfrm>
-            <a:off x="594360" y="603504"/>
-            <a:ext cx="10972800" cy="749808"/>
+            <a:off x="594360" y="868680"/>
+            <a:ext cx="10607040" cy="914400"/>
           </a:xfrm>
           <a:prstGeom prst="rect">
             <a:avLst/>
@@ -14114,54 +11866,34 @@
           <a:bodyPr wrap="square" lIns="0" tIns="0" rIns="0" bIns="0" rtlCol="0" anchor="ctr"/>
           <a:lstStyle/>
           <a:p>
-            <a:pPr indent="0" marL="0">
+            <a:pPr marL="0" indent="0">
               <a:buNone/>
             </a:pPr>
             <a:r>
-              <a:rPr lang="en-US" sz="3000" b="1" dirty="0">
+              <a:rPr lang="en-US" sz="2800" b="1" dirty="0">
                 <a:solidFill>
-                  <a:srgbClr val="1F2933"/>
+                  <a:srgbClr val="FFFFFF"/>
                 </a:solidFill>
                 <a:latin typeface="Cambria" pitchFamily="34" charset="0"/>
                 <a:ea typeface="Cambria" pitchFamily="34" charset="-122"/>
                 <a:cs typeface="Cambria" pitchFamily="34" charset="-120"/>
               </a:rPr>
-              <a:t>What we checked before trusting any of this</a:t>
+              <a:t>Virtual threads are a credible replacement. The open question is cost, not capability.</a:t>
             </a:r>
-            <a:endParaRPr lang="en-US" sz="3000" dirty="0"/>
+            <a:endParaRPr lang="en-US" sz="2800" dirty="0"/>
           </a:p>
         </p:txBody>
       </p:sp>
       <p:sp>
         <p:nvSpPr>
-          <p:cNvPr id="4" name="Shape 2"/>
-          <p:cNvSpPr/>
-          <p:nvPr/>
-        </p:nvSpPr>
-        <p:spPr>
-          <a:xfrm>
-            <a:off x="594360" y="1481328"/>
-            <a:ext cx="347472" cy="347472"/>
-          </a:xfrm>
-          <a:prstGeom prst="ellipse">
-            <a:avLst/>
-          </a:prstGeom>
-          <a:solidFill>
-            <a:srgbClr val="009E73"/>
-          </a:solidFill>
-          <a:ln/>
-        </p:spPr>
-      </p:sp>
-      <p:sp>
-        <p:nvSpPr>
-          <p:cNvPr id="5" name="Text 3"/>
+          <p:cNvPr id="4" name="Text 2"/>
           <p:cNvSpPr txBox="1"/>
           <p:nvPr/>
         </p:nvSpPr>
         <p:spPr>
           <a:xfrm>
-            <a:off x="594360" y="1517904"/>
-            <a:ext cx="347472" cy="274320"/>
+            <a:off x="594360" y="1965960"/>
+            <a:ext cx="2286000" cy="310896"/>
           </a:xfrm>
           <a:prstGeom prst="rect">
             <a:avLst/>
@@ -14173,21 +11905,60 @@
           <a:bodyPr wrap="square" lIns="0" tIns="0" rIns="0" bIns="0" rtlCol="0" anchor="ctr"/>
           <a:lstStyle/>
           <a:p>
-            <a:pPr algn="ctr" indent="0" marL="0">
+            <a:pPr marL="0" indent="0">
               <a:buNone/>
             </a:pPr>
             <a:r>
-              <a:rPr lang="en-US" sz="1300" b="1" dirty="0">
+              <a:rPr lang="en-US" sz="1600" b="1" dirty="0">
                 <a:solidFill>
-                  <a:srgbClr val="FFFFFF"/>
+                  <a:srgbClr val="009E73"/>
                 </a:solidFill>
                 <a:latin typeface="Calibri" pitchFamily="34" charset="0"/>
                 <a:ea typeface="Calibri" pitchFamily="34" charset="-122"/>
                 <a:cs typeface="Calibri" pitchFamily="34" charset="-120"/>
               </a:rPr>
-              <a:t>1</a:t>
+              <a:t>Capability</a:t>
             </a:r>
-            <a:endParaRPr lang="en-US" sz="1300" dirty="0"/>
+            <a:endParaRPr lang="en-US" sz="1600" dirty="0"/>
+          </a:p>
+        </p:txBody>
+      </p:sp>
+      <p:sp>
+        <p:nvSpPr>
+          <p:cNvPr id="5" name="Text 3"/>
+          <p:cNvSpPr txBox="1"/>
+          <p:nvPr/>
+        </p:nvSpPr>
+        <p:spPr>
+          <a:xfrm>
+            <a:off x="3063240" y="1965960"/>
+            <a:ext cx="8412480" cy="777240"/>
+          </a:xfrm>
+          <a:prstGeom prst="rect">
+            <a:avLst/>
+          </a:prstGeom>
+          <a:noFill/>
+          <a:ln/>
+        </p:spPr>
+        <p:txBody>
+          <a:bodyPr wrap="square" lIns="0" tIns="0" rIns="0" bIns="0" rtlCol="0" anchor="ctr"/>
+          <a:lstStyle/>
+          <a:p>
+            <a:pPr marL="0" indent="0">
+              <a:buNone/>
+            </a:pPr>
+            <a:r>
+              <a:rPr lang="en-US" sz="1400" dirty="0">
+                <a:solidFill>
+                  <a:srgbClr val="C9D3DB"/>
+                </a:solidFill>
+                <a:latin typeface="Calibri" pitchFamily="34" charset="0"/>
+                <a:ea typeface="Calibri" pitchFamily="34" charset="-122"/>
+                <a:cs typeface="Calibri" pitchFamily="34" charset="-120"/>
+              </a:rPr>
+              <a:t>Matched WebFlux on latency and errors at every rate tested, on every workload.</a:t>
+            </a:r>
+            <a:endParaRPr lang="en-US" sz="1400" dirty="0"/>
           </a:p>
         </p:txBody>
       </p:sp>
@@ -14199,8 +11970,8 @@
         </p:nvSpPr>
         <p:spPr>
           <a:xfrm>
-            <a:off x="1143000" y="1444752"/>
-            <a:ext cx="10424160" cy="310896"/>
+            <a:off x="594360" y="2990088"/>
+            <a:ext cx="2286000" cy="310896"/>
           </a:xfrm>
           <a:prstGeom prst="rect">
             <a:avLst/>
@@ -14212,19 +11983,19 @@
           <a:bodyPr wrap="square" lIns="0" tIns="0" rIns="0" bIns="0" rtlCol="0" anchor="ctr"/>
           <a:lstStyle/>
           <a:p>
-            <a:pPr indent="0" marL="0">
+            <a:pPr marL="0" indent="0">
               <a:buNone/>
             </a:pPr>
             <a:r>
               <a:rPr lang="en-US" sz="1600" b="1" dirty="0">
                 <a:solidFill>
-                  <a:srgbClr val="1F2933"/>
+                  <a:srgbClr val="E8B4A0"/>
                 </a:solidFill>
                 <a:latin typeface="Calibri" pitchFamily="34" charset="0"/>
                 <a:ea typeface="Calibri" pitchFamily="34" charset="-122"/>
                 <a:cs typeface="Calibri" pitchFamily="34" charset="-120"/>
               </a:rPr>
-              <a:t>Carrier pinning ruled out</a:t>
+              <a:t>CPU</a:t>
             </a:r>
             <a:endParaRPr lang="en-US" sz="1600" dirty="0"/>
           </a:p>
@@ -14238,8 +12009,8 @@
         </p:nvSpPr>
         <p:spPr>
           <a:xfrm>
-            <a:off x="1143000" y="1773936"/>
-            <a:ext cx="10424160" cy="1005840"/>
+            <a:off x="3063240" y="2990088"/>
+            <a:ext cx="8412480" cy="777240"/>
           </a:xfrm>
           <a:prstGeom prst="rect">
             <a:avLst/>
@@ -14251,54 +12022,34 @@
           <a:bodyPr wrap="square" lIns="0" tIns="0" rIns="0" bIns="0" rtlCol="0" anchor="ctr"/>
           <a:lstStyle/>
           <a:p>
-            <a:pPr indent="0" marL="0">
+            <a:pPr marL="0" indent="0">
               <a:buNone/>
             </a:pPr>
             <a:r>
-              <a:rPr lang="en-US" sz="1300" dirty="0">
+              <a:rPr lang="en-US" sz="1400" dirty="0">
                 <a:solidFill>
-                  <a:srgbClr val="5C6B77"/>
+                  <a:srgbClr val="C9D3DB"/>
                 </a:solidFill>
                 <a:latin typeface="Calibri" pitchFamily="34" charset="0"/>
                 <a:ea typeface="Calibri" pitchFamily="34" charset="-122"/>
                 <a:cs typeface="Calibri" pitchFamily="34" charset="-120"/>
               </a:rPr>
-              <a:t>A flight recording over ~50,000 requests held one VirtualThreadPinned event — 33.9 ms, on first-time class loading of a Hikari proxy — and zero submit failures. Java 25 removed the synchronized pinning that made this a real risk on 21.</a:t>
+              <a:t>About 40% more for identical work. Affordable at our load; verify on AWS.</a:t>
             </a:r>
-            <a:endParaRPr lang="en-US" sz="1300" dirty="0"/>
+            <a:endParaRPr lang="en-US" sz="1400" dirty="0"/>
           </a:p>
         </p:txBody>
       </p:sp>
       <p:sp>
         <p:nvSpPr>
-          <p:cNvPr id="8" name="Shape 6"/>
-          <p:cNvSpPr/>
-          <p:nvPr/>
-        </p:nvSpPr>
-        <p:spPr>
-          <a:xfrm>
-            <a:off x="594360" y="2990088"/>
-            <a:ext cx="347472" cy="347472"/>
-          </a:xfrm>
-          <a:prstGeom prst="ellipse">
-            <a:avLst/>
-          </a:prstGeom>
-          <a:solidFill>
-            <a:srgbClr val="009E73"/>
-          </a:solidFill>
-          <a:ln/>
-        </p:spPr>
-      </p:sp>
-      <p:sp>
-        <p:nvSpPr>
-          <p:cNvPr id="9" name="Text 7"/>
+          <p:cNvPr id="8" name="Text 6"/>
           <p:cNvSpPr txBox="1"/>
           <p:nvPr/>
         </p:nvSpPr>
         <p:spPr>
           <a:xfrm>
-            <a:off x="594360" y="3026664"/>
-            <a:ext cx="347472" cy="274320"/>
+            <a:off x="594360" y="4014216"/>
+            <a:ext cx="2286000" cy="310896"/>
           </a:xfrm>
           <a:prstGeom prst="rect">
             <a:avLst/>
@@ -14310,21 +12061,60 @@
           <a:bodyPr wrap="square" lIns="0" tIns="0" rIns="0" bIns="0" rtlCol="0" anchor="ctr"/>
           <a:lstStyle/>
           <a:p>
-            <a:pPr algn="ctr" indent="0" marL="0">
+            <a:pPr marL="0" indent="0">
               <a:buNone/>
             </a:pPr>
             <a:r>
-              <a:rPr lang="en-US" sz="1300" b="1" dirty="0">
+              <a:rPr lang="en-US" sz="1600" b="1" dirty="0">
                 <a:solidFill>
-                  <a:srgbClr val="FFFFFF"/>
+                  <a:srgbClr val="E8B4A0"/>
                 </a:solidFill>
                 <a:latin typeface="Calibri" pitchFamily="34" charset="0"/>
                 <a:ea typeface="Calibri" pitchFamily="34" charset="-122"/>
                 <a:cs typeface="Calibri" pitchFamily="34" charset="-120"/>
               </a:rPr>
-              <a:t>2</a:t>
+              <a:t>Memory</a:t>
             </a:r>
-            <a:endParaRPr lang="en-US" sz="1300" dirty="0"/>
+            <a:endParaRPr lang="en-US" sz="1600" dirty="0"/>
+          </a:p>
+        </p:txBody>
+      </p:sp>
+      <p:sp>
+        <p:nvSpPr>
+          <p:cNvPr id="9" name="Text 7"/>
+          <p:cNvSpPr txBox="1"/>
+          <p:nvPr/>
+        </p:nvSpPr>
+        <p:spPr>
+          <a:xfrm>
+            <a:off x="3063240" y="4014216"/>
+            <a:ext cx="8412480" cy="777240"/>
+          </a:xfrm>
+          <a:prstGeom prst="rect">
+            <a:avLst/>
+          </a:prstGeom>
+          <a:noFill/>
+          <a:ln/>
+        </p:spPr>
+        <p:txBody>
+          <a:bodyPr wrap="square" lIns="0" tIns="0" rIns="0" bIns="0" rtlCol="0" anchor="ctr"/>
+          <a:lstStyle/>
+          <a:p>
+            <a:pPr marL="0" indent="0">
+              <a:buNone/>
+            </a:pPr>
+            <a:r>
+              <a:rPr lang="en-US" sz="1400" dirty="0">
+                <a:solidFill>
+                  <a:srgbClr val="C9D3DB"/>
+                </a:solidFill>
+                <a:latin typeface="Calibri" pitchFamily="34" charset="0"/>
+                <a:ea typeface="Calibri" pitchFamily="34" charset="-122"/>
+                <a:cs typeface="Calibri" pitchFamily="34" charset="-120"/>
+              </a:rPr>
+              <a:t>15% more at rest, and it grows with concurrency where reactive does not. The one thing that could change the answer.</a:t>
+            </a:r>
+            <a:endParaRPr lang="en-US" sz="1400" dirty="0"/>
           </a:p>
         </p:txBody>
       </p:sp>
@@ -14336,8 +12126,8 @@
         </p:nvSpPr>
         <p:spPr>
           <a:xfrm>
-            <a:off x="1143000" y="2953512"/>
-            <a:ext cx="10424160" cy="310896"/>
+            <a:off x="594360" y="5038344"/>
+            <a:ext cx="2286000" cy="310896"/>
           </a:xfrm>
           <a:prstGeom prst="rect">
             <a:avLst/>
@@ -14349,19 +12139,19 @@
           <a:bodyPr wrap="square" lIns="0" tIns="0" rIns="0" bIns="0" rtlCol="0" anchor="ctr"/>
           <a:lstStyle/>
           <a:p>
-            <a:pPr indent="0" marL="0">
+            <a:pPr marL="0" indent="0">
               <a:buNone/>
             </a:pPr>
             <a:r>
               <a:rPr lang="en-US" sz="1600" b="1" dirty="0">
                 <a:solidFill>
-                  <a:srgbClr val="1F2933"/>
+                  <a:srgbClr val="009E73"/>
                 </a:solidFill>
                 <a:latin typeface="Calibri" pitchFamily="34" charset="0"/>
                 <a:ea typeface="Calibri" pitchFamily="34" charset="-122"/>
                 <a:cs typeface="Calibri" pitchFamily="34" charset="-120"/>
               </a:rPr>
-              <a:t>Generator never the bottleneck</a:t>
+              <a:t>Engineering</a:t>
             </a:r>
             <a:endParaRPr lang="en-US" sz="1600" dirty="0"/>
           </a:p>
@@ -14375,8 +12165,8 @@
         </p:nvSpPr>
         <p:spPr>
           <a:xfrm>
-            <a:off x="1143000" y="3282696"/>
-            <a:ext cx="10424160" cy="1005840"/>
+            <a:off x="3063240" y="5038344"/>
+            <a:ext cx="8412480" cy="777240"/>
           </a:xfrm>
           <a:prstGeom prst="rect">
             <a:avLst/>
@@ -14388,54 +12178,34 @@
           <a:bodyPr wrap="square" lIns="0" tIns="0" rIns="0" bIns="0" rtlCol="0" anchor="ctr"/>
           <a:lstStyle/>
           <a:p>
-            <a:pPr indent="0" marL="0">
+            <a:pPr marL="0" indent="0">
               <a:buNone/>
             </a:pPr>
             <a:r>
-              <a:rPr lang="en-US" sz="1300" dirty="0">
+              <a:rPr lang="en-US" sz="1400" dirty="0">
                 <a:solidFill>
-                  <a:srgbClr val="5C6B77"/>
+                  <a:srgbClr val="C9D3DB"/>
                 </a:solidFill>
                 <a:latin typeface="Calibri" pitchFamily="34" charset="0"/>
                 <a:ea typeface="Calibri" pitchFamily="34" charset="-122"/>
                 <a:cs typeface="Calibri" pitchFamily="34" charset="-120"/>
               </a:rPr>
-              <a:t>k6 ran open-model with the VU pool pre-allocated. Any cell where it dropped an iteration during measurement is marked invalid and excluded, rather than averaged in.</a:t>
+              <a:t>Ordinary code, real stack traces, working debuggers, a mature driver, a larger hiring pool.</a:t>
             </a:r>
-            <a:endParaRPr lang="en-US" sz="1300" dirty="0"/>
+            <a:endParaRPr lang="en-US" sz="1400" dirty="0"/>
           </a:p>
         </p:txBody>
       </p:sp>
       <p:sp>
         <p:nvSpPr>
-          <p:cNvPr id="12" name="Shape 10"/>
-          <p:cNvSpPr/>
-          <p:nvPr/>
-        </p:nvSpPr>
-        <p:spPr>
-          <a:xfrm>
-            <a:off x="594360" y="4498848"/>
-            <a:ext cx="347472" cy="347472"/>
-          </a:xfrm>
-          <a:prstGeom prst="ellipse">
-            <a:avLst/>
-          </a:prstGeom>
-          <a:solidFill>
-            <a:srgbClr val="009E73"/>
-          </a:solidFill>
-          <a:ln/>
-        </p:spPr>
-      </p:sp>
-      <p:sp>
-        <p:nvSpPr>
-          <p:cNvPr id="13" name="Text 11"/>
+          <p:cNvPr id="12" name="Text 10"/>
           <p:cNvSpPr txBox="1"/>
           <p:nvPr/>
         </p:nvSpPr>
         <p:spPr>
           <a:xfrm>
-            <a:off x="594360" y="4535424"/>
-            <a:ext cx="347472" cy="274320"/>
+            <a:off x="594360" y="5897880"/>
+            <a:ext cx="10972800" cy="365760"/>
           </a:xfrm>
           <a:prstGeom prst="rect">
             <a:avLst/>
@@ -14447,136 +12217,19 @@
           <a:bodyPr wrap="square" lIns="0" tIns="0" rIns="0" bIns="0" rtlCol="0" anchor="ctr"/>
           <a:lstStyle/>
           <a:p>
-            <a:pPr algn="ctr" indent="0" marL="0">
+            <a:pPr marL="0" indent="0">
               <a:buNone/>
             </a:pPr>
             <a:r>
-              <a:rPr lang="en-US" sz="1300" b="1" dirty="0">
+              <a:rPr lang="en-US" sz="1300" i="1" dirty="0">
                 <a:solidFill>
-                  <a:srgbClr val="FFFFFF"/>
+                  <a:srgbClr val="8896A2"/>
                 </a:solidFill>
                 <a:latin typeface="Calibri" pitchFamily="34" charset="0"/>
                 <a:ea typeface="Calibri" pitchFamily="34" charset="-122"/>
                 <a:cs typeface="Calibri" pitchFamily="34" charset="-120"/>
               </a:rPr>
-              <a:t>3</a:t>
-            </a:r>
-            <a:endParaRPr lang="en-US" sz="1300" dirty="0"/>
-          </a:p>
-        </p:txBody>
-      </p:sp>
-      <p:sp>
-        <p:nvSpPr>
-          <p:cNvPr id="14" name="Text 12"/>
-          <p:cNvSpPr txBox="1"/>
-          <p:nvPr/>
-        </p:nvSpPr>
-        <p:spPr>
-          <a:xfrm>
-            <a:off x="1143000" y="4462272"/>
-            <a:ext cx="10424160" cy="310896"/>
-          </a:xfrm>
-          <a:prstGeom prst="rect">
-            <a:avLst/>
-          </a:prstGeom>
-          <a:noFill/>
-          <a:ln/>
-        </p:spPr>
-        <p:txBody>
-          <a:bodyPr wrap="square" lIns="0" tIns="0" rIns="0" bIns="0" rtlCol="0" anchor="ctr"/>
-          <a:lstStyle/>
-          <a:p>
-            <a:pPr indent="0" marL="0">
-              <a:buNone/>
-            </a:pPr>
-            <a:r>
-              <a:rPr lang="en-US" sz="1600" b="1" dirty="0">
-                <a:solidFill>
-                  <a:srgbClr val="1F2933"/>
-                </a:solidFill>
-                <a:latin typeface="Calibri" pitchFamily="34" charset="0"/>
-                <a:ea typeface="Calibri" pitchFamily="34" charset="-122"/>
-                <a:cs typeface="Calibri" pitchFamily="34" charset="-120"/>
-              </a:rPr>
-              <a:t>Two findings retracted</a:t>
-            </a:r>
-            <a:endParaRPr lang="en-US" sz="1600" dirty="0"/>
-          </a:p>
-        </p:txBody>
-      </p:sp>
-      <p:sp>
-        <p:nvSpPr>
-          <p:cNvPr id="15" name="Text 13"/>
-          <p:cNvSpPr txBox="1"/>
-          <p:nvPr/>
-        </p:nvSpPr>
-        <p:spPr>
-          <a:xfrm>
-            <a:off x="1143000" y="4791456"/>
-            <a:ext cx="10424160" cy="1005840"/>
-          </a:xfrm>
-          <a:prstGeom prst="rect">
-            <a:avLst/>
-          </a:prstGeom>
-          <a:noFill/>
-          <a:ln/>
-        </p:spPr>
-        <p:txBody>
-          <a:bodyPr wrap="square" lIns="0" tIns="0" rIns="0" bIns="0" rtlCol="0" anchor="ctr"/>
-          <a:lstStyle/>
-          <a:p>
-            <a:pPr indent="0" marL="0">
-              <a:buNone/>
-            </a:pPr>
-            <a:r>
-              <a:rPr lang="en-US" sz="1300" dirty="0">
-                <a:solidFill>
-                  <a:srgbClr val="5C6B77"/>
-                </a:solidFill>
-                <a:latin typeface="Calibri" pitchFamily="34" charset="0"/>
-                <a:ea typeface="Calibri" pitchFamily="34" charset="-122"/>
-                <a:cs typeface="Calibri" pitchFamily="34" charset="-120"/>
-              </a:rPr>
-              <a:t>An early p99 of 422 ms for virtual threads on /db did not reproduce with a proper warmup — the corrected medians are 6.4 ms against 9.2 ms. An early '24x heap' figure was a single sample taken with a committed heap; measured properly it is ~2x.</a:t>
-            </a:r>
-            <a:endParaRPr lang="en-US" sz="1300" dirty="0"/>
-          </a:p>
-        </p:txBody>
-      </p:sp>
-      <p:sp>
-        <p:nvSpPr>
-          <p:cNvPr id="16" name="Text 14"/>
-          <p:cNvSpPr txBox="1"/>
-          <p:nvPr/>
-        </p:nvSpPr>
-        <p:spPr>
-          <a:xfrm>
-            <a:off x="594360" y="5806440"/>
-            <a:ext cx="10972800" cy="502920"/>
-          </a:xfrm>
-          <a:prstGeom prst="rect">
-            <a:avLst/>
-          </a:prstGeom>
-          <a:noFill/>
-          <a:ln/>
-        </p:spPr>
-        <p:txBody>
-          <a:bodyPr wrap="square" lIns="0" tIns="0" rIns="0" bIns="0" rtlCol="0" anchor="ctr"/>
-          <a:lstStyle/>
-          <a:p>
-            <a:pPr indent="0" marL="0">
-              <a:buNone/>
-            </a:pPr>
-            <a:r>
-              <a:rPr lang="en-US" sz="1300" i="1" dirty="0">
-                <a:solidFill>
-                  <a:srgbClr val="5C6B77"/>
-                </a:solidFill>
-                <a:latin typeface="Calibri" pitchFamily="34" charset="0"/>
-                <a:ea typeface="Calibri" pitchFamily="34" charset="-122"/>
-                <a:cs typeface="Calibri" pitchFamily="34" charset="-120"/>
-              </a:rPr>
-              <a:t>Method rules adopted from those mistakes: 60 s warmup minimum, three repetitions with the spread reported, and flight recordings taken with jcmd rather than dumponexit.</a:t>
+              <a:t>Recommendation: hold the decision until the AWS numbers land, then decide on the memory curve.</a:t>
             </a:r>
             <a:endParaRPr lang="en-US" sz="1300" dirty="0"/>
           </a:p>
@@ -14883,4 +12536,319 @@
     </a:ext>
   </a:extLst>
 </a:theme>
+</file>
+
+<file path=ppt/theme/theme2.xml><?xml version="1.0" encoding="utf-8"?>
+<a:theme xmlns:a="http://schemas.openxmlformats.org/drawingml/2006/main" name="Office Theme">
+  <a:themeElements>
+    <a:clrScheme name="Office">
+      <a:dk1>
+        <a:sysClr val="windowText" lastClr="000000"/>
+      </a:dk1>
+      <a:lt1>
+        <a:sysClr val="window" lastClr="FFFFFF"/>
+      </a:lt1>
+      <a:dk2>
+        <a:srgbClr val="0E2841"/>
+      </a:dk2>
+      <a:lt2>
+        <a:srgbClr val="E8E8E8"/>
+      </a:lt2>
+      <a:accent1>
+        <a:srgbClr val="156082"/>
+      </a:accent1>
+      <a:accent2>
+        <a:srgbClr val="E97132"/>
+      </a:accent2>
+      <a:accent3>
+        <a:srgbClr val="196B24"/>
+      </a:accent3>
+      <a:accent4>
+        <a:srgbClr val="0F9ED5"/>
+      </a:accent4>
+      <a:accent5>
+        <a:srgbClr val="A02B93"/>
+      </a:accent5>
+      <a:accent6>
+        <a:srgbClr val="4EA72E"/>
+      </a:accent6>
+      <a:hlink>
+        <a:srgbClr val="467886"/>
+      </a:hlink>
+      <a:folHlink>
+        <a:srgbClr val="96607D"/>
+      </a:folHlink>
+    </a:clrScheme>
+    <a:fontScheme name="Office">
+      <a:majorFont>
+        <a:latin typeface="Aptos Display" panose="02110004020202020204"/>
+        <a:ea typeface=""/>
+        <a:cs typeface=""/>
+        <a:font script="Jpan" typeface="游ゴシック Light"/>
+        <a:font script="Hang" typeface="맑은 고딕"/>
+        <a:font script="Hans" typeface="等线 Light"/>
+        <a:font script="Hant" typeface="新細明體"/>
+        <a:font script="Arab" typeface="Times New Roman"/>
+        <a:font script="Hebr" typeface="Times New Roman"/>
+        <a:font script="Thai" typeface="Angsana New"/>
+        <a:font script="Ethi" typeface="Nyala"/>
+        <a:font script="Beng" typeface="Vrinda"/>
+        <a:font script="Gujr" typeface="Shruti"/>
+        <a:font script="Khmr" typeface="MoolBoran"/>
+        <a:font script="Knda" typeface="Tunga"/>
+        <a:font script="Guru" typeface="Raavi"/>
+        <a:font script="Cans" typeface="Euphemia"/>
+        <a:font script="Cher" typeface="Plantagenet Cherokee"/>
+        <a:font script="Yiii" typeface="Microsoft Yi Baiti"/>
+        <a:font script="Tibt" typeface="Microsoft Himalaya"/>
+        <a:font script="Thaa" typeface="MV Boli"/>
+        <a:font script="Deva" typeface="Mangal"/>
+        <a:font script="Telu" typeface="Gautami"/>
+        <a:font script="Taml" typeface="Latha"/>
+        <a:font script="Syrc" typeface="Estrangelo Edessa"/>
+        <a:font script="Orya" typeface="Kalinga"/>
+        <a:font script="Mlym" typeface="Kartika"/>
+        <a:font script="Laoo" typeface="DokChampa"/>
+        <a:font script="Sinh" typeface="Iskoola Pota"/>
+        <a:font script="Mong" typeface="Mongolian Baiti"/>
+        <a:font script="Viet" typeface="Times New Roman"/>
+        <a:font script="Uigh" typeface="Microsoft Uighur"/>
+        <a:font script="Geor" typeface="Sylfaen"/>
+        <a:font script="Armn" typeface="Arial"/>
+        <a:font script="Bugi" typeface="Leelawadee UI"/>
+        <a:font script="Bopo" typeface="Microsoft JhengHei"/>
+        <a:font script="Java" typeface="Javanese Text"/>
+        <a:font script="Lisu" typeface="Segoe UI"/>
+        <a:font script="Mymr" typeface="Myanmar Text"/>
+        <a:font script="Nkoo" typeface="Ebrima"/>
+        <a:font script="Olck" typeface="Nirmala UI"/>
+        <a:font script="Osma" typeface="Ebrima"/>
+        <a:font script="Phag" typeface="Phagspa"/>
+        <a:font script="Syrn" typeface="Estrangelo Edessa"/>
+        <a:font script="Syrj" typeface="Estrangelo Edessa"/>
+        <a:font script="Syre" typeface="Estrangelo Edessa"/>
+        <a:font script="Sora" typeface="Nirmala UI"/>
+        <a:font script="Tale" typeface="Microsoft Tai Le"/>
+        <a:font script="Talu" typeface="Microsoft New Tai Lue"/>
+        <a:font script="Tfng" typeface="Ebrima"/>
+      </a:majorFont>
+      <a:minorFont>
+        <a:latin typeface="Aptos" panose="02110004020202020204"/>
+        <a:ea typeface=""/>
+        <a:cs typeface=""/>
+        <a:font script="Jpan" typeface="游ゴシック"/>
+        <a:font script="Hang" typeface="맑은 고딕"/>
+        <a:font script="Hans" typeface="等线"/>
+        <a:font script="Hant" typeface="新細明體"/>
+        <a:font script="Arab" typeface="Arial"/>
+        <a:font script="Hebr" typeface="Arial"/>
+        <a:font script="Thai" typeface="Cordia New"/>
+        <a:font script="Ethi" typeface="Nyala"/>
+        <a:font script="Beng" typeface="Vrinda"/>
+        <a:font script="Gujr" typeface="Shruti"/>
+        <a:font script="Khmr" typeface="DaunPenh"/>
+        <a:font script="Knda" typeface="Tunga"/>
+        <a:font script="Guru" typeface="Raavi"/>
+        <a:font script="Cans" typeface="Euphemia"/>
+        <a:font script="Cher" typeface="Plantagenet Cherokee"/>
+        <a:font script="Yiii" typeface="Microsoft Yi Baiti"/>
+        <a:font script="Tibt" typeface="Microsoft Himalaya"/>
+        <a:font script="Thaa" typeface="MV Boli"/>
+        <a:font script="Deva" typeface="Mangal"/>
+        <a:font script="Telu" typeface="Gautami"/>
+        <a:font script="Taml" typeface="Latha"/>
+        <a:font script="Syrc" typeface="Estrangelo Edessa"/>
+        <a:font script="Orya" typeface="Kalinga"/>
+        <a:font script="Mlym" typeface="Kartika"/>
+        <a:font script="Laoo" typeface="DokChampa"/>
+        <a:font script="Sinh" typeface="Iskoola Pota"/>
+        <a:font script="Mong" typeface="Mongolian Baiti"/>
+        <a:font script="Viet" typeface="Arial"/>
+        <a:font script="Uigh" typeface="Microsoft Uighur"/>
+        <a:font script="Geor" typeface="Sylfaen"/>
+        <a:font script="Armn" typeface="Arial"/>
+        <a:font script="Bugi" typeface="Leelawadee UI"/>
+        <a:font script="Bopo" typeface="Microsoft JhengHei"/>
+        <a:font script="Java" typeface="Javanese Text"/>
+        <a:font script="Lisu" typeface="Segoe UI"/>
+        <a:font script="Mymr" typeface="Myanmar Text"/>
+        <a:font script="Nkoo" typeface="Ebrima"/>
+        <a:font script="Olck" typeface="Nirmala UI"/>
+        <a:font script="Osma" typeface="Ebrima"/>
+        <a:font script="Phag" typeface="Phagspa"/>
+        <a:font script="Syrn" typeface="Estrangelo Edessa"/>
+        <a:font script="Syrj" typeface="Estrangelo Edessa"/>
+        <a:font script="Syre" typeface="Estrangelo Edessa"/>
+        <a:font script="Sora" typeface="Nirmala UI"/>
+        <a:font script="Tale" typeface="Microsoft Tai Le"/>
+        <a:font script="Talu" typeface="Microsoft New Tai Lue"/>
+        <a:font script="Tfng" typeface="Ebrima"/>
+      </a:minorFont>
+    </a:fontScheme>
+    <a:fmtScheme name="Office">
+      <a:fillStyleLst>
+        <a:solidFill>
+          <a:schemeClr val="phClr"/>
+        </a:solidFill>
+        <a:gradFill rotWithShape="1">
+          <a:gsLst>
+            <a:gs pos="0">
+              <a:schemeClr val="phClr">
+                <a:lumMod val="110000"/>
+                <a:satMod val="105000"/>
+                <a:tint val="67000"/>
+              </a:schemeClr>
+            </a:gs>
+            <a:gs pos="50000">
+              <a:schemeClr val="phClr">
+                <a:lumMod val="105000"/>
+                <a:satMod val="103000"/>
+                <a:tint val="73000"/>
+              </a:schemeClr>
+            </a:gs>
+            <a:gs pos="100000">
+              <a:schemeClr val="phClr">
+                <a:lumMod val="105000"/>
+                <a:satMod val="109000"/>
+                <a:tint val="81000"/>
+              </a:schemeClr>
+            </a:gs>
+          </a:gsLst>
+          <a:lin ang="5400000" scaled="0"/>
+        </a:gradFill>
+        <a:gradFill rotWithShape="1">
+          <a:gsLst>
+            <a:gs pos="0">
+              <a:schemeClr val="phClr">
+                <a:satMod val="103000"/>
+                <a:lumMod val="102000"/>
+                <a:tint val="94000"/>
+              </a:schemeClr>
+            </a:gs>
+            <a:gs pos="50000">
+              <a:schemeClr val="phClr">
+                <a:satMod val="110000"/>
+                <a:lumMod val="100000"/>
+                <a:shade val="100000"/>
+              </a:schemeClr>
+            </a:gs>
+            <a:gs pos="100000">
+              <a:schemeClr val="phClr">
+                <a:lumMod val="99000"/>
+                <a:satMod val="120000"/>
+                <a:shade val="78000"/>
+              </a:schemeClr>
+            </a:gs>
+          </a:gsLst>
+          <a:lin ang="5400000" scaled="0"/>
+        </a:gradFill>
+      </a:fillStyleLst>
+      <a:lnStyleLst>
+        <a:ln w="12700" cap="flat" cmpd="sng" algn="ctr">
+          <a:solidFill>
+            <a:schemeClr val="phClr"/>
+          </a:solidFill>
+          <a:prstDash val="solid"/>
+          <a:miter lim="800000"/>
+        </a:ln>
+        <a:ln w="19050" cap="flat" cmpd="sng" algn="ctr">
+          <a:solidFill>
+            <a:schemeClr val="phClr"/>
+          </a:solidFill>
+          <a:prstDash val="solid"/>
+          <a:miter lim="800000"/>
+        </a:ln>
+        <a:ln w="25400" cap="flat" cmpd="sng" algn="ctr">
+          <a:solidFill>
+            <a:schemeClr val="phClr"/>
+          </a:solidFill>
+          <a:prstDash val="solid"/>
+          <a:miter lim="800000"/>
+        </a:ln>
+      </a:lnStyleLst>
+      <a:effectStyleLst>
+        <a:effectStyle>
+          <a:effectLst/>
+        </a:effectStyle>
+        <a:effectStyle>
+          <a:effectLst/>
+        </a:effectStyle>
+        <a:effectStyle>
+          <a:effectLst>
+            <a:outerShdw blurRad="57150" dist="19050" dir="5400000" algn="ctr" rotWithShape="0">
+              <a:srgbClr val="000000">
+                <a:alpha val="63000"/>
+              </a:srgbClr>
+            </a:outerShdw>
+          </a:effectLst>
+        </a:effectStyle>
+      </a:effectStyleLst>
+      <a:bgFillStyleLst>
+        <a:solidFill>
+          <a:schemeClr val="phClr"/>
+        </a:solidFill>
+        <a:solidFill>
+          <a:schemeClr val="phClr">
+            <a:tint val="95000"/>
+            <a:satMod val="170000"/>
+          </a:schemeClr>
+        </a:solidFill>
+        <a:gradFill rotWithShape="1">
+          <a:gsLst>
+            <a:gs pos="0">
+              <a:schemeClr val="phClr">
+                <a:tint val="93000"/>
+                <a:satMod val="150000"/>
+                <a:shade val="98000"/>
+                <a:lumMod val="102000"/>
+              </a:schemeClr>
+            </a:gs>
+            <a:gs pos="50000">
+              <a:schemeClr val="phClr">
+                <a:tint val="98000"/>
+                <a:satMod val="130000"/>
+                <a:shade val="90000"/>
+                <a:lumMod val="103000"/>
+              </a:schemeClr>
+            </a:gs>
+            <a:gs pos="100000">
+              <a:schemeClr val="phClr">
+                <a:shade val="63000"/>
+                <a:satMod val="120000"/>
+              </a:schemeClr>
+            </a:gs>
+          </a:gsLst>
+          <a:lin ang="5400000" scaled="0"/>
+        </a:gradFill>
+      </a:bgFillStyleLst>
+    </a:fmtScheme>
+  </a:themeElements>
+  <a:objectDefaults>
+    <a:lnDef>
+      <a:spPr/>
+      <a:bodyPr/>
+      <a:lstStyle/>
+      <a:style>
+        <a:lnRef idx="2">
+          <a:schemeClr val="accent1"/>
+        </a:lnRef>
+        <a:fillRef idx="0">
+          <a:schemeClr val="accent1"/>
+        </a:fillRef>
+        <a:effectRef idx="1">
+          <a:schemeClr val="accent1"/>
+        </a:effectRef>
+        <a:fontRef idx="minor">
+          <a:schemeClr val="tx1"/>
+        </a:fontRef>
+      </a:style>
+    </a:lnDef>
+  </a:objectDefaults>
+  <a:extraClrSchemeLst/>
+  <a:extLst>
+    <a:ext uri="{05A4C25C-085E-4340-85A3-A5531E510DB2}">
+      <thm15:themeFamily xmlns:thm15="http://schemas.microsoft.com/office/thememl/2012/main" name="Office Theme" id="{2E142A2C-CD16-42D6-873A-C26D2A0506FA}" vid="{1BDDFF52-6CD6-40A5-AB3C-68EB2F1E4D0A}"/>
+    </a:ext>
+  </a:extLst>
+</a:theme>
 </file>